--- a/03-frontend/apresentacao-frontend.pptx
+++ b/03-frontend/apresentacao-frontend.pptx
@@ -4,13 +4,14 @@
   <p:sldMasterIdLst>
     <p:sldMasterId id="2147483648" r:id="rId1"/>
   </p:sldMasterIdLst>
+  <p:notesMasterIdLst>
+    <p:notesMasterId r:id="rId12"/>
+  </p:notesMasterIdLst>
   <p:sldIdLst>
-    <p:sldId id="256" r:id="rId4"/>
-    <p:sldId id="257" r:id="rId3"/>
+    <p:sldId id="256" r:id="rId7"/>
+    <p:sldId id="257" r:id="rId8"/>
+    <p:sldId id="258" r:id="rId9"/>
   </p:sldIdLst>
-  <p:notesMasterIdLst>
-    <p:notesMasterId r:id="rId5"/>
-  </p:notesMasterIdLst>
   <p:sldSz cx="12192000" cy="6858000"/>
   <p:notesSz cx="6858000" cy="12192000"/>
   <p:defaultTextStyle>
@@ -105,6 +106,11 @@
       </a:defRPr>
     </a:lvl9pPr>
   </p:defaultTextStyle>
+  <p:extLst>
+    <p:ext uri="{EFAFB233-063F-42B5-8137-9DF3F51BA10A}">
+      <p15:sldGuideLst xmlns:p15="http://schemas.microsoft.com/office/powerpoint/2012/main"/>
+    </p:ext>
+  </p:extLst>
 </p:presentation>
 </file>
 
@@ -130,234 +136,10 @@
           <a:chExt cx="0" cy="0"/>
         </a:xfrm>
       </p:grpSpPr>
-      <p:sp>
-        <p:nvSpPr>
-          <p:cNvPr id="2" name="Header Placeholder 1"/>
-          <p:cNvSpPr>
-            <a:spLocks noGrp="1"/>
-          </p:cNvSpPr>
-          <p:nvPr>
-            <p:ph type="hdr" sz="quarter"/>
-          </p:nvPr>
-        </p:nvSpPr>
-        <p:spPr>
-          <a:xfrm>
-            <a:off x="0" y="0"/>
-            <a:ext cx="2971800" cy="458788"/>
-          </a:xfrm>
-          <a:prstGeom prst="rect">
-            <a:avLst/>
-          </a:prstGeom>
-        </p:spPr>
-        <p:txBody>
-          <a:bodyPr vert="horz" lIns="91440" tIns="45720" rIns="91440" bIns="45720" rtlCol="0"/>
-          <a:lstStyle>
-            <a:lvl1pPr algn="l">
-              <a:defRPr sz="1200"/>
-            </a:lvl1pPr>
-          </a:lstStyle>
-          <a:p>
-            <a:endParaRPr lang="en-US"/>
-          </a:p>
-        </p:txBody>
-      </p:sp>
-      <p:sp>
-        <p:nvSpPr>
-          <p:cNvPr id="3" name="Date Placeholder 2"/>
-          <p:cNvSpPr>
-            <a:spLocks noGrp="1"/>
-          </p:cNvSpPr>
-          <p:nvPr>
-            <p:ph type="dt" idx="1"/>
-          </p:nvPr>
-        </p:nvSpPr>
-        <p:spPr>
-          <a:xfrm>
-            <a:off x="3884613" y="0"/>
-            <a:ext cx="2971800" cy="458788"/>
-          </a:xfrm>
-          <a:prstGeom prst="rect">
-            <a:avLst/>
-          </a:prstGeom>
-        </p:spPr>
-        <p:txBody>
-          <a:bodyPr vert="horz" lIns="91440" tIns="45720" rIns="91440" bIns="45720" rtlCol="0"/>
-          <a:lstStyle>
-            <a:lvl1pPr algn="r">
-              <a:defRPr sz="1200"/>
-            </a:lvl1pPr>
-          </a:lstStyle>
-          <a:p>
-            <a:fld id="{5282F153-3F37-0F45-9E97-73ACFA13230C}" type="datetimeFigureOut">
-              <a:rPr lang="en-US"/>
-              <a:t>7/23/19</a:t>
-            </a:fld>
-            <a:endParaRPr lang="en-US"/>
-          </a:p>
-        </p:txBody>
-      </p:sp>
-      <p:sp>
-        <p:nvSpPr>
-          <p:cNvPr id="4" name="Slide Image Placeholder 3"/>
-          <p:cNvSpPr>
-            <a:spLocks noGrp="1" noRot="1" noChangeAspect="1"/>
-          </p:cNvSpPr>
-          <p:nvPr>
-            <p:ph type="sldImg" idx="2"/>
-          </p:nvPr>
-        </p:nvSpPr>
-        <p:spPr>
-          <a:xfrm>
-            <a:off x="685800" y="1143000"/>
-            <a:ext cx="5486400" cy="3086100"/>
-          </a:xfrm>
-          <a:prstGeom prst="rect">
-            <a:avLst/>
-          </a:prstGeom>
-          <a:noFill/>
-          <a:ln w="12700">
-            <a:solidFill>
-              <a:prstClr val="black"/>
-            </a:solidFill>
-          </a:ln>
-        </p:spPr>
-        <p:txBody>
-          <a:bodyPr vert="horz" lIns="91440" tIns="45720" rIns="91440" bIns="45720" rtlCol="0" anchor="ctr"/>
-          <a:lstStyle/>
-          <a:p>
-            <a:endParaRPr lang="en-US"/>
-          </a:p>
-        </p:txBody>
-      </p:sp>
-      <p:sp>
-        <p:nvSpPr>
-          <p:cNvPr id="5" name="Notes Placeholder 4"/>
-          <p:cNvSpPr>
-            <a:spLocks noGrp="1"/>
-          </p:cNvSpPr>
-          <p:nvPr>
-            <p:ph type="body" sz="quarter" idx="3"/>
-          </p:nvPr>
-        </p:nvSpPr>
-        <p:spPr>
-          <a:xfrm>
-            <a:off x="685800" y="4400550"/>
-            <a:ext cx="5486400" cy="3600450"/>
-          </a:xfrm>
-          <a:prstGeom prst="rect">
-            <a:avLst/>
-          </a:prstGeom>
-        </p:spPr>
-        <p:txBody>
-          <a:bodyPr vert="horz" lIns="91440" tIns="45720" rIns="91440" bIns="45720" rtlCol="0"/>
-          <a:lstStyle/>
-          <a:p>
-            <a:pPr lvl="0"/>
-            <a:r>
-              <a:rPr lang="en-US"/>
-              <a:t>Click to edit Master text styles</a:t>
-            </a:r>
-          </a:p>
-          <a:p>
-            <a:pPr lvl="1"/>
-            <a:r>
-              <a:rPr lang="en-US"/>
-              <a:t>Second level</a:t>
-            </a:r>
-          </a:p>
-          <a:p>
-            <a:pPr lvl="2"/>
-            <a:r>
-              <a:rPr lang="en-US"/>
-              <a:t>Third level</a:t>
-            </a:r>
-          </a:p>
-          <a:p>
-            <a:pPr lvl="3"/>
-            <a:r>
-              <a:rPr lang="en-US"/>
-              <a:t>Fourth level</a:t>
-            </a:r>
-          </a:p>
-          <a:p>
-            <a:pPr lvl="4"/>
-            <a:r>
-              <a:rPr lang="en-US"/>
-              <a:t>Fifth level</a:t>
-            </a:r>
-          </a:p>
-        </p:txBody>
-      </p:sp>
-      <p:sp>
-        <p:nvSpPr>
-          <p:cNvPr id="6" name="Footer Placeholder 5"/>
-          <p:cNvSpPr>
-            <a:spLocks noGrp="1"/>
-          </p:cNvSpPr>
-          <p:nvPr>
-            <p:ph type="ftr" sz="quarter" idx="4"/>
-          </p:nvPr>
-        </p:nvSpPr>
-        <p:spPr>
-          <a:xfrm>
-            <a:off x="0" y="8685213"/>
-            <a:ext cx="2971800" cy="458787"/>
-          </a:xfrm>
-          <a:prstGeom prst="rect">
-            <a:avLst/>
-          </a:prstGeom>
-        </p:spPr>
-        <p:txBody>
-          <a:bodyPr vert="horz" lIns="91440" tIns="45720" rIns="91440" bIns="45720" rtlCol="0" anchor="b"/>
-          <a:lstStyle>
-            <a:lvl1pPr algn="l">
-              <a:defRPr sz="1200"/>
-            </a:lvl1pPr>
-          </a:lstStyle>
-          <a:p>
-            <a:endParaRPr lang="en-US"/>
-          </a:p>
-        </p:txBody>
-      </p:sp>
-      <p:sp>
-        <p:nvSpPr>
-          <p:cNvPr id="7" name="Slide Number Placeholder 6"/>
-          <p:cNvSpPr>
-            <a:spLocks noGrp="1"/>
-          </p:cNvSpPr>
-          <p:nvPr>
-            <p:ph type="sldNum" sz="quarter" idx="5"/>
-          </p:nvPr>
-        </p:nvSpPr>
-        <p:spPr>
-          <a:xfrm>
-            <a:off x="3884613" y="8685213"/>
-            <a:ext cx="2971800" cy="458787"/>
-          </a:xfrm>
-          <a:prstGeom prst="rect">
-            <a:avLst/>
-          </a:prstGeom>
-        </p:spPr>
-        <p:txBody>
-          <a:bodyPr vert="horz" lIns="91440" tIns="45720" rIns="91440" bIns="45720" rtlCol="0" anchor="b"/>
-          <a:lstStyle>
-            <a:lvl1pPr algn="r">
-              <a:defRPr sz="1200"/>
-            </a:lvl1pPr>
-          </a:lstStyle>
-          <a:p>
-            <a:fld id="{CE5E9CC1-C706-0F49-92D6-E571CC5EEA8F}" type="slidenum">
-              <a:rPr lang="en-US"/>
-              <a:t>‹#›</a:t>
-            </a:fld>
-            <a:endParaRPr lang="en-US"/>
-          </a:p>
-        </p:txBody>
-      </p:sp>
     </p:spTree>
     <p:extLst>
       <p:ext uri="{BB962C8B-B14F-4D97-AF65-F5344CB8AC3E}">
-        <p14:creationId xmlns:p14="http://schemas.microsoft.com/office/powerpoint/2010/main" val="1024086991"/>
+        <p14:creationId xmlns:p14="http://schemas.microsoft.com/office/powerpoint/2010/main" val="4019786482"/>
       </p:ext>
     </p:extLst>
   </p:cSld>
@@ -489,12 +271,13 @@
 
 <file path=ppt/slideLayouts/slideLayout2.xml><?xml version="1.0" encoding="utf-8"?>
 <p:sldLayout xmlns:a="http://schemas.openxmlformats.org/drawingml/2006/main" xmlns:r="http://schemas.openxmlformats.org/officeDocument/2006/relationships" xmlns:p="http://schemas.openxmlformats.org/presentationml/2006/main" preserve="1">
-  <p:cSld name="MASTER">
+  <p:cSld name="BASE">
     <p:bg>
       <p:bgPr>
         <a:solidFill>
-          <a:srgbClr val="F7FAFC"/>
+          <a:srgbClr val="FAFAFB"/>
         </a:solidFill>
+        <a:effectLst/>
       </p:bgPr>
     </p:bg>
     <p:spTree>
@@ -519,18 +302,16 @@
         </p:nvSpPr>
         <p:spPr>
           <a:xfrm>
-            <a:off x="0" y="0"/>
-            <a:ext cx="12191695" cy="109728"/>
-          </a:xfrm>
-          <a:prstGeom prst="rect">
-            <a:avLst/>
-          </a:prstGeom>
-          <a:solidFill>
-            <a:srgbClr val="0F766E"/>
-          </a:solidFill>
-          <a:ln w="12700">
+            <a:off x="603504" y="6455664"/>
+            <a:ext cx="11000232" cy="0"/>
+          </a:xfrm>
+          <a:prstGeom prst="line">
+            <a:avLst/>
+          </a:prstGeom>
+          <a:noFill/>
+          <a:ln w="8890">
             <a:solidFill>
-              <a:srgbClr val="0F766E"/>
+              <a:srgbClr val="D7D8E1"/>
             </a:solidFill>
             <a:prstDash val="solid"/>
           </a:ln>
@@ -544,8 +325,8 @@
         </p:nvSpPr>
         <p:spPr>
           <a:xfrm>
-            <a:off x="502920" y="6473952"/>
-            <a:ext cx="2103120" cy="182880"/>
+            <a:off x="621792" y="6492240"/>
+            <a:ext cx="5303520" cy="164592"/>
           </a:xfrm>
           <a:prstGeom prst="rect">
             <a:avLst/>
@@ -557,60 +338,21 @@
           <a:bodyPr wrap="square" lIns="0" tIns="0" rIns="0" bIns="0" rtlCol="0" anchor="ctr"/>
           <a:lstStyle/>
           <a:p>
-            <a:pPr indent="0" marL="0">
+            <a:pPr marL="0" indent="0">
               <a:buNone/>
             </a:pPr>
             <a:r>
-              <a:rPr lang="en-US" sz="900" dirty="0">
-                <a:solidFill>
-                  <a:srgbClr val="64748B"/>
+              <a:rPr lang="en-US" sz="850" dirty="0">
+                <a:solidFill>
+                  <a:srgbClr val="7A7B85"/>
                 </a:solidFill>
                 <a:latin typeface="Aptos" pitchFamily="34" charset="0"/>
                 <a:ea typeface="Aptos" pitchFamily="34" charset="-122"/>
                 <a:cs typeface="Aptos" pitchFamily="34" charset="-120"/>
               </a:rPr>
-              <a:t>Clínica-Tech</a:t>
-            </a:r>
-            <a:endParaRPr lang="en-US" sz="900" dirty="0"/>
-          </a:p>
-        </p:txBody>
-      </p:sp>
-      <p:sp>
-        <p:nvSpPr>
-          <p:cNvPr id="4" name="Text 2"/>
-          <p:cNvSpPr/>
-          <p:nvPr/>
-        </p:nvSpPr>
-        <p:spPr>
-          <a:xfrm>
-            <a:off x="9966960" y="6473952"/>
-            <a:ext cx="1737360" cy="182880"/>
-          </a:xfrm>
-          <a:prstGeom prst="rect">
-            <a:avLst/>
-          </a:prstGeom>
-          <a:noFill/>
-          <a:ln/>
-        </p:spPr>
-        <p:txBody>
-          <a:bodyPr wrap="square" lIns="0" tIns="0" rIns="0" bIns="0" rtlCol="0" anchor="ctr"/>
-          <a:lstStyle/>
-          <a:p>
-            <a:pPr algn="r" indent="0" marL="0">
-              <a:buNone/>
-            </a:pPr>
-            <a:r>
-              <a:rPr lang="en-US" sz="900" dirty="0">
-                <a:solidFill>
-                  <a:srgbClr val="94A3B8"/>
-                </a:solidFill>
-                <a:latin typeface="Aptos" pitchFamily="34" charset="0"/>
-                <a:ea typeface="Aptos" pitchFamily="34" charset="-122"/>
-                <a:cs typeface="Aptos" pitchFamily="34" charset="-120"/>
-              </a:rPr>
-              <a:t>Projeto acadêmico</a:t>
-            </a:r>
-            <a:endParaRPr lang="en-US" sz="900" dirty="0"/>
+              <a:t>Clínica-Tech · Projeto de Perfil Profissional</a:t>
+            </a:r>
+            <a:endParaRPr lang="en-US" sz="850" dirty="0"/>
           </a:p>
         </p:txBody>
       </p:sp>
@@ -626,34 +368,37 @@
         </p:nvSpPr>
         <p:spPr>
           <a:xfrm>
-            <a:off x="11750040" y="6473952"/>
-            <a:ext cx="228600" cy="182880"/>
+            <a:off x="11064240" y="6473952"/>
+            <a:ext cx="502920" cy="201168"/>
           </a:xfrm>
           <a:prstGeom prst="rect">
             <a:avLst/>
           </a:prstGeom>
           <a:extLst>
             <a:ext uri="{C572A759-6A51-4108-AA02-DFA0A04FC94B}">
-              <ma14:wrappingTextBoxFlag xmlns:ma14="http://schemas.microsoft.com/office/mac/drawingml/2011/main" val="0"/>
+              <ma14:wrappingTextBoxFlag xmlns="" xmlns:ma14="http://schemas.microsoft.com/office/mac/drawingml/2011/main" val="0"/>
             </a:ext>
           </a:extLst>
         </p:spPr>
         <p:txBody>
-          <a:bodyPr/>
+          <a:bodyPr lIns="0" tIns="0" rIns="0" bIns="0"/>
           <a:lstStyle>
             <a:lvl1pPr>
               <a:defRPr sz="900">
                 <a:solidFill>
-                  <a:srgbClr val="94A3B8"/>
-                </a:solidFill>
+                  <a:srgbClr val="6D6F79"/>
+                </a:solidFill>
+                <a:latin typeface="Aptos"/>
+                <a:ea typeface="Aptos"/>
+                <a:cs typeface="Aptos"/>
               </a:defRPr>
             </a:lvl1pPr>
           </a:lstStyle>
           <a:p>
-            <a:pPr algn="l"/>
+            <a:pPr algn="r"/>
             <a:fld id="{F7021451-1387-4CA6-816F-3879F97B5CBC}" type="slidenum">
-              <a:rPr b="0" lang="en-US"/>
-              <a:t>1002</a:t>
+              <a:rPr lang="en-US" b="0"/>
+              <a:t>‹nº›</a:t>
             </a:fld>
             <a:endParaRPr lang="en-US"/>
           </a:p>
@@ -670,6 +415,11 @@
 <file path=ppt/slideMasters/slideMaster1.xml><?xml version="1.0" encoding="utf-8"?>
 <p:sldMaster xmlns:a="http://schemas.openxmlformats.org/drawingml/2006/main" xmlns:r="http://schemas.openxmlformats.org/officeDocument/2006/relationships" xmlns:p="http://schemas.openxmlformats.org/presentationml/2006/main">
   <p:cSld>
+    <p:bg>
+      <p:bgRef idx="1001">
+        <a:schemeClr val="bg1"/>
+      </p:bgRef>
+    </p:bg>
     <p:spTree>
       <p:nvGrpSpPr>
         <p:cNvPr id="1" name=""/>
@@ -696,34 +446,37 @@
         </p:nvSpPr>
         <p:spPr>
           <a:xfrm>
-            <a:off x="11750040" y="6473952"/>
-            <a:ext cx="228600" cy="182880"/>
+            <a:off x="11064240" y="6473952"/>
+            <a:ext cx="502920" cy="201168"/>
           </a:xfrm>
           <a:prstGeom prst="rect">
             <a:avLst/>
           </a:prstGeom>
           <a:extLst>
             <a:ext uri="{C572A759-6A51-4108-AA02-DFA0A04FC94B}">
-              <ma14:wrappingTextBoxFlag xmlns:ma14="http://schemas.microsoft.com/office/mac/drawingml/2011/main" val="0"/>
+              <ma14:wrappingTextBoxFlag xmlns="" xmlns:ma14="http://schemas.microsoft.com/office/mac/drawingml/2011/main" val="0"/>
             </a:ext>
           </a:extLst>
         </p:spPr>
         <p:txBody>
-          <a:bodyPr/>
+          <a:bodyPr lIns="0" tIns="0" rIns="0" bIns="0"/>
           <a:lstStyle>
             <a:lvl1pPr>
               <a:defRPr sz="900">
                 <a:solidFill>
-                  <a:srgbClr val="94A3B8"/>
-                </a:solidFill>
+                  <a:srgbClr val="6D6F79"/>
+                </a:solidFill>
+                <a:latin typeface="Aptos"/>
+                <a:ea typeface="Aptos"/>
+                <a:cs typeface="Aptos"/>
               </a:defRPr>
             </a:lvl1pPr>
           </a:lstStyle>
           <a:p>
-            <a:pPr algn="l"/>
+            <a:pPr algn="r"/>
             <a:fld id="{F7021451-1387-4CA6-816F-3879F97B5CBC}" type="slidenum">
-              <a:rPr b="0" lang="en-US"/>
-              <a:t>null</a:t>
+              <a:rPr lang="en-US" b="0"/>
+              <a:t>‹nº›</a:t>
             </a:fld>
             <a:endParaRPr lang="en-US"/>
           </a:p>
@@ -1002,94 +755,26 @@
       <p:grpSpPr/>
       <p:sp>
         <p:nvSpPr>
-          <p:cNvPr id="2" name="TextBox 1"/>
-          <p:cNvSpPr txBox="1"/>
-          <p:nvPr/>
-        </p:nvSpPr>
-        <p:spPr>
-          <a:xfrm>
-            <a:off x="566928" y="438912"/>
-            <a:ext cx="10881360" cy="502920"/>
-          </a:xfrm>
-          <a:prstGeom prst="rect">
-            <a:avLst/>
-          </a:prstGeom>
-          <a:noFill/>
-        </p:spPr>
-        <p:txBody>
-          <a:bodyPr wrap="square" lIns="0" rIns="0" tIns="0" bIns="0" anchor="ctr">
-            <a:spAutoFit/>
-          </a:bodyPr>
-          <a:lstStyle/>
-          <a:p>
-            <a:pPr algn="l"/>
-            <a:r>
-              <a:rPr sz="2700" b="1">
-                <a:solidFill>
-                  <a:srgbClr val="0F172A"/>
-                </a:solidFill>
-              </a:rPr>
-              <a:t>Front-end: o que o usuário verá</a:t>
-            </a:r>
-          </a:p>
-        </p:txBody>
-      </p:sp>
-      <p:sp>
-        <p:nvSpPr>
-          <p:cNvPr id="3" name="TextBox 2"/>
-          <p:cNvSpPr txBox="1"/>
-          <p:nvPr/>
-        </p:nvSpPr>
-        <p:spPr>
-          <a:xfrm>
-            <a:off x="585216" y="941832"/>
-            <a:ext cx="10607040" cy="320040"/>
-          </a:xfrm>
-          <a:prstGeom prst="rect">
-            <a:avLst/>
-          </a:prstGeom>
-          <a:noFill/>
-        </p:spPr>
-        <p:txBody>
-          <a:bodyPr wrap="square" lIns="0" rIns="0" tIns="0" bIns="0" anchor="ctr">
-            <a:spAutoFit/>
-          </a:bodyPr>
-          <a:lstStyle/>
-          <a:p>
-            <a:pPr algn="l"/>
-            <a:r>
-              <a:rPr sz="1250" b="0">
-                <a:solidFill>
-                  <a:srgbClr val="475569"/>
-                </a:solidFill>
-              </a:rPr>
-              <a:t>Do requisito ao fluxo de UX/UI e, então, às telas no navegador</a:t>
-            </a:r>
-          </a:p>
-        </p:txBody>
-      </p:sp>
-      <p:sp>
-        <p:nvSpPr>
-          <p:cNvPr id="4" name="Rounded Rectangle 3"/>
+          <p:cNvPr id="2" name="Rounded Rectangle 1"/>
           <p:cNvSpPr/>
           <p:nvPr/>
         </p:nvSpPr>
         <p:spPr>
           <a:xfrm>
-            <a:off x="685800" y="1481328"/>
-            <a:ext cx="2240280" cy="868680"/>
+            <a:off x="658368" y="438912"/>
+            <a:ext cx="1115568" cy="274320"/>
           </a:xfrm>
           <a:prstGeom prst="roundRect">
             <a:avLst>
-              <a:gd name="adj" fmla="val 6000"/>
+              <a:gd name="adj" fmla="val 20000"/>
             </a:avLst>
           </a:prstGeom>
           <a:solidFill>
-            <a:srgbClr val="FFFFFF"/>
+            <a:srgbClr val="E6E6EE"/>
           </a:solidFill>
-          <a:ln w="25400">
+          <a:ln w="12700">
             <a:solidFill>
-              <a:srgbClr val="2563EB"/>
+              <a:srgbClr val="E6E6EE"/>
             </a:solidFill>
           </a:ln>
           <a:effectLst/>
@@ -1111,7 +796,79 @@
         <p:txBody>
           <a:bodyPr rtlCol="0" anchor="ctr"/>
           <a:lstStyle/>
-          <a:p/>
+          <a:p>
+            <a:pPr algn="ctr"/>
+          </a:p>
+        </p:txBody>
+      </p:sp>
+      <p:sp>
+        <p:nvSpPr>
+          <p:cNvPr id="3" name="TextBox 2"/>
+          <p:cNvSpPr txBox="1"/>
+          <p:nvPr/>
+        </p:nvSpPr>
+        <p:spPr>
+          <a:xfrm>
+            <a:off x="768096" y="493776"/>
+            <a:ext cx="932688" cy="164592"/>
+          </a:xfrm>
+          <a:prstGeom prst="rect">
+            <a:avLst/>
+          </a:prstGeom>
+          <a:noFill/>
+        </p:spPr>
+        <p:txBody>
+          <a:bodyPr wrap="square" lIns="0" rIns="0" tIns="0" bIns="0" anchor="ctr">
+            <a:spAutoFit/>
+          </a:bodyPr>
+          <a:lstStyle/>
+          <a:p>
+            <a:pPr algn="l"/>
+            <a:r>
+              <a:rPr sz="840" b="0">
+                <a:solidFill>
+                  <a:srgbClr val="44454D"/>
+                </a:solidFill>
+                <a:latin typeface="Aptos"/>
+              </a:rPr>
+              <a:t>INTERFACES</a:t>
+            </a:r>
+          </a:p>
+        </p:txBody>
+      </p:sp>
+      <p:sp>
+        <p:nvSpPr>
+          <p:cNvPr id="4" name="TextBox 3"/>
+          <p:cNvSpPr txBox="1"/>
+          <p:nvPr/>
+        </p:nvSpPr>
+        <p:spPr>
+          <a:xfrm>
+            <a:off x="658368" y="841248"/>
+            <a:ext cx="6766560" cy="640080"/>
+          </a:xfrm>
+          <a:prstGeom prst="rect">
+            <a:avLst/>
+          </a:prstGeom>
+          <a:noFill/>
+        </p:spPr>
+        <p:txBody>
+          <a:bodyPr wrap="square" lIns="0" rIns="0" tIns="0" bIns="0" anchor="ctr">
+            <a:spAutoFit/>
+          </a:bodyPr>
+          <a:lstStyle/>
+          <a:p>
+            <a:pPr algn="l"/>
+            <a:r>
+              <a:rPr sz="2600" b="0">
+                <a:solidFill>
+                  <a:srgbClr val="24252E"/>
+                </a:solidFill>
+                <a:latin typeface="Aptos Display"/>
+              </a:rPr>
+              <a:t>O que o usuário verá</a:t>
+            </a:r>
+          </a:p>
         </p:txBody>
       </p:sp>
       <p:sp>
@@ -1122,8 +879,67 @@
         </p:nvSpPr>
         <p:spPr>
           <a:xfrm>
-            <a:off x="822960" y="1664208"/>
-            <a:ext cx="1965960" cy="274320"/>
+            <a:off x="676656" y="1527048"/>
+            <a:ext cx="6400800" cy="347472"/>
+          </a:xfrm>
+          <a:prstGeom prst="rect">
+            <a:avLst/>
+          </a:prstGeom>
+          <a:noFill/>
+        </p:spPr>
+        <p:txBody>
+          <a:bodyPr wrap="square" lIns="0" rIns="0" tIns="0" bIns="0" anchor="ctr">
+            <a:spAutoFit/>
+          </a:bodyPr>
+          <a:lstStyle/>
+          <a:p>
+            <a:pPr algn="l"/>
+            <a:r>
+              <a:rPr sz="1150" b="0">
+                <a:solidFill>
+                  <a:srgbClr val="44454D"/>
+                </a:solidFill>
+                <a:latin typeface="Aptos"/>
+              </a:rPr>
+              <a:t>Cada tela nasce de um requisito do produto e de um fluxo aprovado em UX/UI.</a:t>
+            </a:r>
+          </a:p>
+        </p:txBody>
+      </p:sp>
+      <p:pic>
+        <p:nvPicPr>
+          <p:cNvPr id="6" name="Picture 5" descr="ilustracao-frontend.png"/>
+          <p:cNvPicPr>
+            <a:picLocks noChangeAspect="1"/>
+          </p:cNvPicPr>
+          <p:nvPr/>
+        </p:nvPicPr>
+        <p:blipFill>
+          <a:blip r:embed="rId2"/>
+          <a:stretch>
+            <a:fillRect/>
+          </a:stretch>
+        </p:blipFill>
+        <p:spPr>
+          <a:xfrm>
+            <a:off x="7370064" y="1572768"/>
+            <a:ext cx="4169663" cy="4160520"/>
+          </a:xfrm>
+          <a:prstGeom prst="rect">
+            <a:avLst/>
+          </a:prstGeom>
+        </p:spPr>
+      </p:pic>
+      <p:sp>
+        <p:nvSpPr>
+          <p:cNvPr id="7" name="TextBox 6"/>
+          <p:cNvSpPr txBox="1"/>
+          <p:nvPr/>
+        </p:nvSpPr>
+        <p:spPr>
+          <a:xfrm>
+            <a:off x="7370064" y="5870448"/>
+            <a:ext cx="4169663" cy="237744"/>
           </a:xfrm>
           <a:prstGeom prst="rect">
             <a:avLst/>
@@ -1136,74 +952,81 @@
           </a:bodyPr>
           <a:lstStyle/>
           <a:p>
+            <a:pPr algn="ctr"/>
+            <a:r>
+              <a:rPr sz="900" b="0">
+                <a:solidFill>
+                  <a:srgbClr val="777985"/>
+                </a:solidFill>
+                <a:latin typeface="Aptos"/>
+              </a:rPr>
+              <a:t>A mesma agenda, vista por quem atende e por quem gerencia.</a:t>
+            </a:r>
+          </a:p>
+        </p:txBody>
+      </p:sp>
+      <p:sp>
+        <p:nvSpPr>
+          <p:cNvPr id="8" name="TextBox 7"/>
+          <p:cNvSpPr txBox="1"/>
+          <p:nvPr/>
+        </p:nvSpPr>
+        <p:spPr>
+          <a:xfrm>
+            <a:off x="658368" y="2048256"/>
+            <a:ext cx="6309360" cy="182880"/>
+          </a:xfrm>
+          <a:prstGeom prst="rect">
+            <a:avLst/>
+          </a:prstGeom>
+          <a:noFill/>
+        </p:spPr>
+        <p:txBody>
+          <a:bodyPr wrap="square" lIns="0" rIns="0" tIns="0" bIns="0" anchor="ctr">
+            <a:spAutoFit/>
+          </a:bodyPr>
+          <a:lstStyle/>
+          <a:p>
             <a:pPr algn="l"/>
             <a:r>
-              <a:rPr sz="1400" b="1">
-                <a:solidFill>
-                  <a:srgbClr val="2563EB"/>
-                </a:solidFill>
-              </a:rPr>
-              <a:t>Requisito</a:t>
-            </a:r>
-          </a:p>
-        </p:txBody>
-      </p:sp>
-      <p:sp>
-        <p:nvSpPr>
-          <p:cNvPr id="6" name="TextBox 5"/>
-          <p:cNvSpPr txBox="1"/>
-          <p:nvPr/>
-        </p:nvSpPr>
-        <p:spPr>
-          <a:xfrm>
-            <a:off x="822960" y="1956816"/>
-            <a:ext cx="1965960" cy="237744"/>
-          </a:xfrm>
-          <a:prstGeom prst="rect">
-            <a:avLst/>
-          </a:prstGeom>
-          <a:noFill/>
-        </p:spPr>
-        <p:txBody>
-          <a:bodyPr wrap="square" lIns="0" rIns="0" tIns="0" bIns="0" anchor="t">
-            <a:spAutoFit/>
-          </a:bodyPr>
-          <a:lstStyle/>
-          <a:p>
-            <a:pPr algn="l"/>
-            <a:r>
-              <a:rPr sz="1050" b="0">
-                <a:solidFill>
-                  <a:srgbClr val="475569"/>
-                </a:solidFill>
-              </a:rPr>
-              <a:t>PO</a:t>
-            </a:r>
-          </a:p>
-        </p:txBody>
-      </p:sp>
-      <p:sp>
-        <p:nvSpPr>
-          <p:cNvPr id="7" name="Rounded Rectangle 6"/>
+              <a:rPr sz="860" b="1">
+                <a:solidFill>
+                  <a:srgbClr val="24252E"/>
+                </a:solidFill>
+                <a:latin typeface="Aptos"/>
+              </a:rPr>
+              <a:t>SITE PÚBLICO</a:t>
+            </a:r>
+            <a:r>
+              <a:rPr sz="860" b="0">
+                <a:solidFill>
+                  <a:srgbClr val="777985"/>
+                </a:solidFill>
+                <a:latin typeface="Aptos"/>
+              </a:rPr>
+              <a:t>   sem login · paciente</a:t>
+            </a:r>
+          </a:p>
+        </p:txBody>
+      </p:sp>
+      <p:sp>
+        <p:nvSpPr>
+          <p:cNvPr id="9" name="Rectangle 8"/>
           <p:cNvSpPr/>
           <p:nvPr/>
         </p:nvSpPr>
         <p:spPr>
           <a:xfrm>
-            <a:off x="3246120" y="1481328"/>
-            <a:ext cx="2240280" cy="868680"/>
-          </a:xfrm>
-          <a:prstGeom prst="roundRect">
-            <a:avLst>
-              <a:gd name="adj" fmla="val 6000"/>
-            </a:avLst>
-          </a:prstGeom>
-          <a:solidFill>
-            <a:srgbClr val="FFFFFF"/>
-          </a:solidFill>
-          <a:ln w="25400">
+            <a:off x="658368" y="2304288"/>
+            <a:ext cx="6309360" cy="0"/>
+          </a:xfrm>
+          <a:prstGeom prst="rect">
+            <a:avLst/>
+          </a:prstGeom>
+          <a:noFill/>
+          <a:ln w="9525">
             <a:solidFill>
-              <a:srgbClr val="14B8A6"/>
+              <a:srgbClr val="E6E6EE"/>
             </a:solidFill>
           </a:ln>
           <a:effectLst/>
@@ -1225,99 +1048,99 @@
         <p:txBody>
           <a:bodyPr rtlCol="0" anchor="ctr"/>
           <a:lstStyle/>
-          <a:p/>
-        </p:txBody>
-      </p:sp>
-      <p:sp>
-        <p:nvSpPr>
-          <p:cNvPr id="8" name="TextBox 7"/>
-          <p:cNvSpPr txBox="1"/>
-          <p:nvPr/>
-        </p:nvSpPr>
-        <p:spPr>
-          <a:xfrm>
-            <a:off x="3383279" y="1664208"/>
-            <a:ext cx="1965960" cy="274320"/>
-          </a:xfrm>
-          <a:prstGeom prst="rect">
-            <a:avLst/>
-          </a:prstGeom>
-          <a:noFill/>
-        </p:spPr>
-        <p:txBody>
-          <a:bodyPr wrap="square" lIns="0" rIns="0" tIns="0" bIns="0" anchor="t">
+          <a:p>
+            <a:pPr algn="ctr"/>
+          </a:p>
+        </p:txBody>
+      </p:sp>
+      <p:sp>
+        <p:nvSpPr>
+          <p:cNvPr id="10" name="TextBox 9"/>
+          <p:cNvSpPr txBox="1"/>
+          <p:nvPr/>
+        </p:nvSpPr>
+        <p:spPr>
+          <a:xfrm>
+            <a:off x="658368" y="2359152"/>
+            <a:ext cx="5074920" cy="256032"/>
+          </a:xfrm>
+          <a:prstGeom prst="rect">
+            <a:avLst/>
+          </a:prstGeom>
+          <a:noFill/>
+        </p:spPr>
+        <p:txBody>
+          <a:bodyPr wrap="square" lIns="0" rIns="0" tIns="0" bIns="0" anchor="ctr">
             <a:spAutoFit/>
           </a:bodyPr>
           <a:lstStyle/>
           <a:p>
             <a:pPr algn="l"/>
             <a:r>
-              <a:rPr sz="1400" b="1">
-                <a:solidFill>
-                  <a:srgbClr val="14B8A6"/>
-                </a:solidFill>
-              </a:rPr>
-              <a:t>Fluxo e tela</a:t>
-            </a:r>
-          </a:p>
-        </p:txBody>
-      </p:sp>
-      <p:sp>
-        <p:nvSpPr>
-          <p:cNvPr id="9" name="TextBox 8"/>
-          <p:cNvSpPr txBox="1"/>
-          <p:nvPr/>
-        </p:nvSpPr>
-        <p:spPr>
-          <a:xfrm>
-            <a:off x="3383279" y="1956816"/>
-            <a:ext cx="1965960" cy="237744"/>
-          </a:xfrm>
-          <a:prstGeom prst="rect">
-            <a:avLst/>
-          </a:prstGeom>
-          <a:noFill/>
-        </p:spPr>
-        <p:txBody>
-          <a:bodyPr wrap="square" lIns="0" rIns="0" tIns="0" bIns="0" anchor="t">
-            <a:spAutoFit/>
-          </a:bodyPr>
-          <a:lstStyle/>
-          <a:p>
-            <a:pPr algn="l"/>
-            <a:r>
-              <a:rPr sz="1050" b="0">
-                <a:solidFill>
-                  <a:srgbClr val="475569"/>
-                </a:solidFill>
-              </a:rPr>
-              <a:t>UX/UI</a:t>
-            </a:r>
-          </a:p>
-        </p:txBody>
-      </p:sp>
-      <p:sp>
-        <p:nvSpPr>
-          <p:cNvPr id="10" name="Rounded Rectangle 9"/>
+              <a:rPr sz="980" b="0">
+                <a:solidFill>
+                  <a:srgbClr val="44454D"/>
+                </a:solidFill>
+                <a:latin typeface="Aptos"/>
+              </a:rPr>
+              <a:t>Página inicial — rede, WhatsApp e telefone</a:t>
+            </a:r>
+          </a:p>
+        </p:txBody>
+      </p:sp>
+      <p:sp>
+        <p:nvSpPr>
+          <p:cNvPr id="11" name="TextBox 10"/>
+          <p:cNvSpPr txBox="1"/>
+          <p:nvPr/>
+        </p:nvSpPr>
+        <p:spPr>
+          <a:xfrm>
+            <a:off x="5733288" y="2359152"/>
+            <a:ext cx="1234440" cy="256032"/>
+          </a:xfrm>
+          <a:prstGeom prst="rect">
+            <a:avLst/>
+          </a:prstGeom>
+          <a:noFill/>
+        </p:spPr>
+        <p:txBody>
+          <a:bodyPr wrap="square" lIns="0" rIns="0" tIns="0" bIns="0" anchor="ctr">
+            <a:spAutoFit/>
+          </a:bodyPr>
+          <a:lstStyle/>
+          <a:p>
+            <a:pPr algn="r"/>
+            <a:r>
+              <a:rPr sz="819" b="0">
+                <a:solidFill>
+                  <a:srgbClr val="777985"/>
+                </a:solidFill>
+                <a:latin typeface="Aptos"/>
+              </a:rPr>
+              <a:t>RF01 · RF02</a:t>
+            </a:r>
+          </a:p>
+        </p:txBody>
+      </p:sp>
+      <p:sp>
+        <p:nvSpPr>
+          <p:cNvPr id="12" name="Rectangle 11"/>
           <p:cNvSpPr/>
           <p:nvPr/>
         </p:nvSpPr>
         <p:spPr>
           <a:xfrm>
-            <a:off x="5806440" y="1481328"/>
-            <a:ext cx="2240280" cy="868680"/>
-          </a:xfrm>
-          <a:prstGeom prst="roundRect">
-            <a:avLst>
-              <a:gd name="adj" fmla="val 6000"/>
-            </a:avLst>
-          </a:prstGeom>
-          <a:solidFill>
-            <a:srgbClr val="FFFFFF"/>
-          </a:solidFill>
-          <a:ln w="25400">
+            <a:off x="658368" y="2670048"/>
+            <a:ext cx="6309360" cy="0"/>
+          </a:xfrm>
+          <a:prstGeom prst="rect">
+            <a:avLst/>
+          </a:prstGeom>
+          <a:noFill/>
+          <a:ln w="9525">
             <a:solidFill>
-              <a:srgbClr val="0F766E"/>
+              <a:srgbClr val="E6E6EE"/>
             </a:solidFill>
           </a:ln>
           <a:effectLst/>
@@ -1339,99 +1162,99 @@
         <p:txBody>
           <a:bodyPr rtlCol="0" anchor="ctr"/>
           <a:lstStyle/>
-          <a:p/>
-        </p:txBody>
-      </p:sp>
-      <p:sp>
-        <p:nvSpPr>
-          <p:cNvPr id="11" name="TextBox 10"/>
-          <p:cNvSpPr txBox="1"/>
-          <p:nvPr/>
-        </p:nvSpPr>
-        <p:spPr>
-          <a:xfrm>
-            <a:off x="5943600" y="1664208"/>
-            <a:ext cx="1965960" cy="274320"/>
-          </a:xfrm>
-          <a:prstGeom prst="rect">
-            <a:avLst/>
-          </a:prstGeom>
-          <a:noFill/>
-        </p:spPr>
-        <p:txBody>
-          <a:bodyPr wrap="square" lIns="0" rIns="0" tIns="0" bIns="0" anchor="t">
+          <a:p>
+            <a:pPr algn="ctr"/>
+          </a:p>
+        </p:txBody>
+      </p:sp>
+      <p:sp>
+        <p:nvSpPr>
+          <p:cNvPr id="13" name="TextBox 12"/>
+          <p:cNvSpPr txBox="1"/>
+          <p:nvPr/>
+        </p:nvSpPr>
+        <p:spPr>
+          <a:xfrm>
+            <a:off x="658368" y="2724912"/>
+            <a:ext cx="5074920" cy="256032"/>
+          </a:xfrm>
+          <a:prstGeom prst="rect">
+            <a:avLst/>
+          </a:prstGeom>
+          <a:noFill/>
+        </p:spPr>
+        <p:txBody>
+          <a:bodyPr wrap="square" lIns="0" rIns="0" tIns="0" bIns="0" anchor="ctr">
             <a:spAutoFit/>
           </a:bodyPr>
           <a:lstStyle/>
           <a:p>
             <a:pPr algn="l"/>
             <a:r>
-              <a:rPr sz="1400" b="1">
-                <a:solidFill>
-                  <a:srgbClr val="0F766E"/>
-                </a:solidFill>
-              </a:rPr>
-              <a:t>Telas no navegador</a:t>
-            </a:r>
-          </a:p>
-        </p:txBody>
-      </p:sp>
-      <p:sp>
-        <p:nvSpPr>
-          <p:cNvPr id="12" name="TextBox 11"/>
-          <p:cNvSpPr txBox="1"/>
-          <p:nvPr/>
-        </p:nvSpPr>
-        <p:spPr>
-          <a:xfrm>
-            <a:off x="5943600" y="1956816"/>
-            <a:ext cx="1965960" cy="237744"/>
-          </a:xfrm>
-          <a:prstGeom prst="rect">
-            <a:avLst/>
-          </a:prstGeom>
-          <a:noFill/>
-        </p:spPr>
-        <p:txBody>
-          <a:bodyPr wrap="square" lIns="0" rIns="0" tIns="0" bIns="0" anchor="t">
-            <a:spAutoFit/>
-          </a:bodyPr>
-          <a:lstStyle/>
-          <a:p>
-            <a:pPr algn="l"/>
-            <a:r>
-              <a:rPr sz="1050" b="0">
-                <a:solidFill>
-                  <a:srgbClr val="475569"/>
-                </a:solidFill>
-              </a:rPr>
-              <a:t>Front-end</a:t>
-            </a:r>
-          </a:p>
-        </p:txBody>
-      </p:sp>
-      <p:sp>
-        <p:nvSpPr>
-          <p:cNvPr id="13" name="Rounded Rectangle 12"/>
+              <a:rPr sz="980" b="0">
+                <a:solidFill>
+                  <a:srgbClr val="44454D"/>
+                </a:solidFill>
+                <a:latin typeface="Aptos"/>
+              </a:rPr>
+              <a:t>Unidades — endereço, horário e contato</a:t>
+            </a:r>
+          </a:p>
+        </p:txBody>
+      </p:sp>
+      <p:sp>
+        <p:nvSpPr>
+          <p:cNvPr id="14" name="TextBox 13"/>
+          <p:cNvSpPr txBox="1"/>
+          <p:nvPr/>
+        </p:nvSpPr>
+        <p:spPr>
+          <a:xfrm>
+            <a:off x="5733288" y="2724912"/>
+            <a:ext cx="1234440" cy="256032"/>
+          </a:xfrm>
+          <a:prstGeom prst="rect">
+            <a:avLst/>
+          </a:prstGeom>
+          <a:noFill/>
+        </p:spPr>
+        <p:txBody>
+          <a:bodyPr wrap="square" lIns="0" rIns="0" tIns="0" bIns="0" anchor="ctr">
+            <a:spAutoFit/>
+          </a:bodyPr>
+          <a:lstStyle/>
+          <a:p>
+            <a:pPr algn="r"/>
+            <a:r>
+              <a:rPr sz="819" b="0">
+                <a:solidFill>
+                  <a:srgbClr val="777985"/>
+                </a:solidFill>
+                <a:latin typeface="Aptos"/>
+              </a:rPr>
+              <a:t>RF01</a:t>
+            </a:r>
+          </a:p>
+        </p:txBody>
+      </p:sp>
+      <p:sp>
+        <p:nvSpPr>
+          <p:cNvPr id="15" name="Rectangle 14"/>
           <p:cNvSpPr/>
           <p:nvPr/>
         </p:nvSpPr>
         <p:spPr>
           <a:xfrm>
-            <a:off x="8366760" y="1481328"/>
-            <a:ext cx="2240280" cy="868680"/>
-          </a:xfrm>
-          <a:prstGeom prst="roundRect">
-            <a:avLst>
-              <a:gd name="adj" fmla="val 6000"/>
-            </a:avLst>
-          </a:prstGeom>
-          <a:solidFill>
-            <a:srgbClr val="FFFFFF"/>
-          </a:solidFill>
-          <a:ln w="25400">
+            <a:off x="658368" y="3035808"/>
+            <a:ext cx="6309360" cy="0"/>
+          </a:xfrm>
+          <a:prstGeom prst="rect">
+            <a:avLst/>
+          </a:prstGeom>
+          <a:noFill/>
+          <a:ln w="9525">
             <a:solidFill>
-              <a:srgbClr val="0F172A"/>
+              <a:srgbClr val="E6E6EE"/>
             </a:solidFill>
           </a:ln>
           <a:effectLst/>
@@ -1453,97 +1276,99 @@
         <p:txBody>
           <a:bodyPr rtlCol="0" anchor="ctr"/>
           <a:lstStyle/>
-          <a:p/>
-        </p:txBody>
-      </p:sp>
-      <p:sp>
-        <p:nvSpPr>
-          <p:cNvPr id="14" name="TextBox 13"/>
-          <p:cNvSpPr txBox="1"/>
-          <p:nvPr/>
-        </p:nvSpPr>
-        <p:spPr>
-          <a:xfrm>
-            <a:off x="8503920" y="1664208"/>
-            <a:ext cx="1965960" cy="274320"/>
-          </a:xfrm>
-          <a:prstGeom prst="rect">
-            <a:avLst/>
-          </a:prstGeom>
-          <a:noFill/>
-        </p:spPr>
-        <p:txBody>
-          <a:bodyPr wrap="square" lIns="0" rIns="0" tIns="0" bIns="0" anchor="t">
+          <a:p>
+            <a:pPr algn="ctr"/>
+          </a:p>
+        </p:txBody>
+      </p:sp>
+      <p:sp>
+        <p:nvSpPr>
+          <p:cNvPr id="16" name="TextBox 15"/>
+          <p:cNvSpPr txBox="1"/>
+          <p:nvPr/>
+        </p:nvSpPr>
+        <p:spPr>
+          <a:xfrm>
+            <a:off x="658368" y="3090672"/>
+            <a:ext cx="5074920" cy="256032"/>
+          </a:xfrm>
+          <a:prstGeom prst="rect">
+            <a:avLst/>
+          </a:prstGeom>
+          <a:noFill/>
+        </p:spPr>
+        <p:txBody>
+          <a:bodyPr wrap="square" lIns="0" rIns="0" tIns="0" bIns="0" anchor="ctr">
             <a:spAutoFit/>
           </a:bodyPr>
           <a:lstStyle/>
           <a:p>
             <a:pPr algn="l"/>
             <a:r>
-              <a:rPr sz="1400" b="1">
-                <a:solidFill>
-                  <a:srgbClr val="0F172A"/>
-                </a:solidFill>
-              </a:rPr>
-              <a:t>Dados e regras</a:t>
-            </a:r>
-          </a:p>
-        </p:txBody>
-      </p:sp>
-      <p:sp>
-        <p:nvSpPr>
-          <p:cNvPr id="15" name="TextBox 14"/>
-          <p:cNvSpPr txBox="1"/>
-          <p:nvPr/>
-        </p:nvSpPr>
-        <p:spPr>
-          <a:xfrm>
-            <a:off x="8503920" y="1956816"/>
-            <a:ext cx="1965960" cy="237744"/>
-          </a:xfrm>
-          <a:prstGeom prst="rect">
-            <a:avLst/>
-          </a:prstGeom>
-          <a:noFill/>
-        </p:spPr>
-        <p:txBody>
-          <a:bodyPr wrap="square" lIns="0" rIns="0" tIns="0" bIns="0" anchor="t">
-            <a:spAutoFit/>
-          </a:bodyPr>
-          <a:lstStyle/>
-          <a:p>
-            <a:pPr algn="l"/>
-            <a:r>
-              <a:rPr sz="1050" b="0">
-                <a:solidFill>
-                  <a:srgbClr val="475569"/>
-                </a:solidFill>
-              </a:rPr>
-              <a:t>Back-end</a:t>
-            </a:r>
-          </a:p>
-        </p:txBody>
-      </p:sp>
-      <p:sp>
-        <p:nvSpPr>
-          <p:cNvPr id="16" name="Chevron 15"/>
+              <a:rPr sz="980" b="0">
+                <a:solidFill>
+                  <a:srgbClr val="44454D"/>
+                </a:solidFill>
+                <a:latin typeface="Aptos"/>
+              </a:rPr>
+              <a:t>Profissionais e especialidades</a:t>
+            </a:r>
+          </a:p>
+        </p:txBody>
+      </p:sp>
+      <p:sp>
+        <p:nvSpPr>
+          <p:cNvPr id="17" name="TextBox 16"/>
+          <p:cNvSpPr txBox="1"/>
+          <p:nvPr/>
+        </p:nvSpPr>
+        <p:spPr>
+          <a:xfrm>
+            <a:off x="5733288" y="3090672"/>
+            <a:ext cx="1234440" cy="256032"/>
+          </a:xfrm>
+          <a:prstGeom prst="rect">
+            <a:avLst/>
+          </a:prstGeom>
+          <a:noFill/>
+        </p:spPr>
+        <p:txBody>
+          <a:bodyPr wrap="square" lIns="0" rIns="0" tIns="0" bIns="0" anchor="ctr">
+            <a:spAutoFit/>
+          </a:bodyPr>
+          <a:lstStyle/>
+          <a:p>
+            <a:pPr algn="r"/>
+            <a:r>
+              <a:rPr sz="819" b="0">
+                <a:solidFill>
+                  <a:srgbClr val="777985"/>
+                </a:solidFill>
+                <a:latin typeface="Aptos"/>
+              </a:rPr>
+              <a:t>RF01</a:t>
+            </a:r>
+          </a:p>
+        </p:txBody>
+      </p:sp>
+      <p:sp>
+        <p:nvSpPr>
+          <p:cNvPr id="18" name="Rectangle 17"/>
           <p:cNvSpPr/>
           <p:nvPr/>
         </p:nvSpPr>
         <p:spPr>
           <a:xfrm>
-            <a:off x="2999232" y="1764792"/>
-            <a:ext cx="310896" cy="310896"/>
-          </a:xfrm>
-          <a:prstGeom prst="chevron">
-            <a:avLst/>
-          </a:prstGeom>
-          <a:solidFill>
-            <a:srgbClr val="CBD5E1"/>
-          </a:solidFill>
-          <a:ln w="12700">
+            <a:off x="658368" y="3401568"/>
+            <a:ext cx="6309360" cy="0"/>
+          </a:xfrm>
+          <a:prstGeom prst="rect">
+            <a:avLst/>
+          </a:prstGeom>
+          <a:noFill/>
+          <a:ln w="9525">
             <a:solidFill>
-              <a:srgbClr val="CBD5E1"/>
+              <a:srgbClr val="E6E6EE"/>
             </a:solidFill>
           </a:ln>
           <a:effectLst/>
@@ -1572,24 +1397,92 @@
       </p:sp>
       <p:sp>
         <p:nvSpPr>
-          <p:cNvPr id="17" name="Chevron 16"/>
+          <p:cNvPr id="19" name="TextBox 18"/>
+          <p:cNvSpPr txBox="1"/>
+          <p:nvPr/>
+        </p:nvSpPr>
+        <p:spPr>
+          <a:xfrm>
+            <a:off x="658368" y="3456432"/>
+            <a:ext cx="5074920" cy="256032"/>
+          </a:xfrm>
+          <a:prstGeom prst="rect">
+            <a:avLst/>
+          </a:prstGeom>
+          <a:noFill/>
+        </p:spPr>
+        <p:txBody>
+          <a:bodyPr wrap="square" lIns="0" rIns="0" tIns="0" bIns="0" anchor="ctr">
+            <a:spAutoFit/>
+          </a:bodyPr>
+          <a:lstStyle/>
+          <a:p>
+            <a:pPr algn="l"/>
+            <a:r>
+              <a:rPr sz="980" b="0">
+                <a:solidFill>
+                  <a:srgbClr val="44454D"/>
+                </a:solidFill>
+                <a:latin typeface="Aptos"/>
+              </a:rPr>
+              <a:t>Como agendar — passo a passo</a:t>
+            </a:r>
+          </a:p>
+        </p:txBody>
+      </p:sp>
+      <p:sp>
+        <p:nvSpPr>
+          <p:cNvPr id="20" name="TextBox 19"/>
+          <p:cNvSpPr txBox="1"/>
+          <p:nvPr/>
+        </p:nvSpPr>
+        <p:spPr>
+          <a:xfrm>
+            <a:off x="5733288" y="3456432"/>
+            <a:ext cx="1234440" cy="256032"/>
+          </a:xfrm>
+          <a:prstGeom prst="rect">
+            <a:avLst/>
+          </a:prstGeom>
+          <a:noFill/>
+        </p:spPr>
+        <p:txBody>
+          <a:bodyPr wrap="square" lIns="0" rIns="0" tIns="0" bIns="0" anchor="ctr">
+            <a:spAutoFit/>
+          </a:bodyPr>
+          <a:lstStyle/>
+          <a:p>
+            <a:pPr algn="r"/>
+            <a:r>
+              <a:rPr sz="819" b="0">
+                <a:solidFill>
+                  <a:srgbClr val="777985"/>
+                </a:solidFill>
+                <a:latin typeface="Aptos"/>
+              </a:rPr>
+              <a:t>RF02</a:t>
+            </a:r>
+          </a:p>
+        </p:txBody>
+      </p:sp>
+      <p:sp>
+        <p:nvSpPr>
+          <p:cNvPr id="21" name="Rectangle 20"/>
           <p:cNvSpPr/>
           <p:nvPr/>
         </p:nvSpPr>
         <p:spPr>
           <a:xfrm>
-            <a:off x="5559552" y="1764792"/>
-            <a:ext cx="310896" cy="310896"/>
-          </a:xfrm>
-          <a:prstGeom prst="chevron">
-            <a:avLst/>
-          </a:prstGeom>
-          <a:solidFill>
-            <a:srgbClr val="CBD5E1"/>
-          </a:solidFill>
-          <a:ln w="12700">
+            <a:off x="658368" y="3767328"/>
+            <a:ext cx="6309360" cy="0"/>
+          </a:xfrm>
+          <a:prstGeom prst="rect">
+            <a:avLst/>
+          </a:prstGeom>
+          <a:noFill/>
+          <a:ln w="9525">
             <a:solidFill>
-              <a:srgbClr val="CBD5E1"/>
+              <a:srgbClr val="E6E6EE"/>
             </a:solidFill>
           </a:ln>
           <a:effectLst/>
@@ -1618,24 +1511,66 @@
       </p:sp>
       <p:sp>
         <p:nvSpPr>
-          <p:cNvPr id="18" name="Chevron 17"/>
+          <p:cNvPr id="22" name="TextBox 21"/>
+          <p:cNvSpPr txBox="1"/>
+          <p:nvPr/>
+        </p:nvSpPr>
+        <p:spPr>
+          <a:xfrm>
+            <a:off x="658368" y="4041648"/>
+            <a:ext cx="6309360" cy="182880"/>
+          </a:xfrm>
+          <a:prstGeom prst="rect">
+            <a:avLst/>
+          </a:prstGeom>
+          <a:noFill/>
+        </p:spPr>
+        <p:txBody>
+          <a:bodyPr wrap="square" lIns="0" rIns="0" tIns="0" bIns="0" anchor="ctr">
+            <a:spAutoFit/>
+          </a:bodyPr>
+          <a:lstStyle/>
+          <a:p>
+            <a:pPr algn="l"/>
+            <a:r>
+              <a:rPr sz="860" b="1">
+                <a:solidFill>
+                  <a:srgbClr val="24252E"/>
+                </a:solidFill>
+                <a:latin typeface="Aptos"/>
+              </a:rPr>
+              <a:t>AMBIENTE ADMINISTRATIVO</a:t>
+            </a:r>
+            <a:r>
+              <a:rPr sz="860" b="0">
+                <a:solidFill>
+                  <a:srgbClr val="777985"/>
+                </a:solidFill>
+                <a:latin typeface="Aptos"/>
+              </a:rPr>
+              <a:t>   com login · equipe da rede</a:t>
+            </a:r>
+          </a:p>
+        </p:txBody>
+      </p:sp>
+      <p:sp>
+        <p:nvSpPr>
+          <p:cNvPr id="23" name="Rectangle 22"/>
           <p:cNvSpPr/>
           <p:nvPr/>
         </p:nvSpPr>
         <p:spPr>
           <a:xfrm>
-            <a:off x="8119872" y="1764792"/>
-            <a:ext cx="310896" cy="310896"/>
-          </a:xfrm>
-          <a:prstGeom prst="chevron">
-            <a:avLst/>
-          </a:prstGeom>
-          <a:solidFill>
-            <a:srgbClr val="CBD5E1"/>
-          </a:solidFill>
-          <a:ln w="12700">
+            <a:off x="658368" y="4297680"/>
+            <a:ext cx="3017520" cy="0"/>
+          </a:xfrm>
+          <a:prstGeom prst="rect">
+            <a:avLst/>
+          </a:prstGeom>
+          <a:noFill/>
+          <a:ln w="9525">
             <a:solidFill>
-              <a:srgbClr val="CBD5E1"/>
+              <a:srgbClr val="E6E6EE"/>
             </a:solidFill>
           </a:ln>
           <a:effectLst/>
@@ -1664,26 +1599,92 @@
       </p:sp>
       <p:sp>
         <p:nvSpPr>
-          <p:cNvPr id="19" name="Rounded Rectangle 18"/>
+          <p:cNvPr id="24" name="TextBox 23"/>
+          <p:cNvSpPr txBox="1"/>
+          <p:nvPr/>
+        </p:nvSpPr>
+        <p:spPr>
+          <a:xfrm>
+            <a:off x="658368" y="4352544"/>
+            <a:ext cx="1783079" cy="256032"/>
+          </a:xfrm>
+          <a:prstGeom prst="rect">
+            <a:avLst/>
+          </a:prstGeom>
+          <a:noFill/>
+        </p:spPr>
+        <p:txBody>
+          <a:bodyPr wrap="square" lIns="0" rIns="0" tIns="0" bIns="0" anchor="ctr">
+            <a:spAutoFit/>
+          </a:bodyPr>
+          <a:lstStyle/>
+          <a:p>
+            <a:pPr algn="l"/>
+            <a:r>
+              <a:rPr sz="940" b="0">
+                <a:solidFill>
+                  <a:srgbClr val="44454D"/>
+                </a:solidFill>
+                <a:latin typeface="Aptos"/>
+              </a:rPr>
+              <a:t>Login</a:t>
+            </a:r>
+          </a:p>
+        </p:txBody>
+      </p:sp>
+      <p:sp>
+        <p:nvSpPr>
+          <p:cNvPr id="25" name="TextBox 24"/>
+          <p:cNvSpPr txBox="1"/>
+          <p:nvPr/>
+        </p:nvSpPr>
+        <p:spPr>
+          <a:xfrm>
+            <a:off x="2441447" y="4352544"/>
+            <a:ext cx="1234440" cy="256032"/>
+          </a:xfrm>
+          <a:prstGeom prst="rect">
+            <a:avLst/>
+          </a:prstGeom>
+          <a:noFill/>
+        </p:spPr>
+        <p:txBody>
+          <a:bodyPr wrap="square" lIns="0" rIns="0" tIns="0" bIns="0" anchor="ctr">
+            <a:spAutoFit/>
+          </a:bodyPr>
+          <a:lstStyle/>
+          <a:p>
+            <a:pPr algn="r"/>
+            <a:r>
+              <a:rPr sz="819" b="0">
+                <a:solidFill>
+                  <a:srgbClr val="777985"/>
+                </a:solidFill>
+                <a:latin typeface="Aptos"/>
+              </a:rPr>
+              <a:t>RF16</a:t>
+            </a:r>
+          </a:p>
+        </p:txBody>
+      </p:sp>
+      <p:sp>
+        <p:nvSpPr>
+          <p:cNvPr id="26" name="Rectangle 25"/>
           <p:cNvSpPr/>
           <p:nvPr/>
         </p:nvSpPr>
         <p:spPr>
           <a:xfrm>
-            <a:off x="685800" y="2606040"/>
-            <a:ext cx="5120640" cy="3200400"/>
-          </a:xfrm>
-          <a:prstGeom prst="roundRect">
-            <a:avLst>
-              <a:gd name="adj" fmla="val 3000"/>
-            </a:avLst>
-          </a:prstGeom>
-          <a:solidFill>
-            <a:srgbClr val="FFFFFF"/>
-          </a:solidFill>
-          <a:ln w="15240">
+            <a:off x="658368" y="4663440"/>
+            <a:ext cx="3017520" cy="0"/>
+          </a:xfrm>
+          <a:prstGeom prst="rect">
+            <a:avLst/>
+          </a:prstGeom>
+          <a:noFill/>
+          <a:ln w="9525">
             <a:solidFill>
-              <a:srgbClr val="D9E2EC"/>
+              <a:srgbClr val="E6E6EE"/>
             </a:solidFill>
           </a:ln>
           <a:effectLst/>
@@ -1705,97 +1706,99 @@
         <p:txBody>
           <a:bodyPr rtlCol="0" anchor="ctr"/>
           <a:lstStyle/>
-          <a:p/>
-        </p:txBody>
-      </p:sp>
-      <p:sp>
-        <p:nvSpPr>
-          <p:cNvPr id="20" name="TextBox 19"/>
-          <p:cNvSpPr txBox="1"/>
-          <p:nvPr/>
-        </p:nvSpPr>
-        <p:spPr>
-          <a:xfrm>
-            <a:off x="960120" y="2852928"/>
-            <a:ext cx="4572000" cy="292608"/>
-          </a:xfrm>
-          <a:prstGeom prst="rect">
-            <a:avLst/>
-          </a:prstGeom>
-          <a:noFill/>
-        </p:spPr>
-        <p:txBody>
-          <a:bodyPr wrap="square" lIns="0" rIns="0" tIns="0" bIns="0" anchor="t">
+          <a:p>
+            <a:pPr algn="ctr"/>
+          </a:p>
+        </p:txBody>
+      </p:sp>
+      <p:sp>
+        <p:nvSpPr>
+          <p:cNvPr id="27" name="TextBox 26"/>
+          <p:cNvSpPr txBox="1"/>
+          <p:nvPr/>
+        </p:nvSpPr>
+        <p:spPr>
+          <a:xfrm>
+            <a:off x="658368" y="4718304"/>
+            <a:ext cx="1783079" cy="256032"/>
+          </a:xfrm>
+          <a:prstGeom prst="rect">
+            <a:avLst/>
+          </a:prstGeom>
+          <a:noFill/>
+        </p:spPr>
+        <p:txBody>
+          <a:bodyPr wrap="square" lIns="0" rIns="0" tIns="0" bIns="0" anchor="ctr">
             <a:spAutoFit/>
           </a:bodyPr>
           <a:lstStyle/>
           <a:p>
             <a:pPr algn="l"/>
             <a:r>
-              <a:rPr sz="1700" b="1">
-                <a:solidFill>
-                  <a:srgbClr val="2563EB"/>
-                </a:solidFill>
-              </a:rPr>
-              <a:t>Site público — sem login</a:t>
-            </a:r>
-          </a:p>
-        </p:txBody>
-      </p:sp>
-      <p:sp>
-        <p:nvSpPr>
-          <p:cNvPr id="21" name="TextBox 20"/>
-          <p:cNvSpPr txBox="1"/>
-          <p:nvPr/>
-        </p:nvSpPr>
-        <p:spPr>
-          <a:xfrm>
-            <a:off x="960120" y="3163824"/>
-            <a:ext cx="4572000" cy="237744"/>
-          </a:xfrm>
-          <a:prstGeom prst="rect">
-            <a:avLst/>
-          </a:prstGeom>
-          <a:noFill/>
-        </p:spPr>
-        <p:txBody>
-          <a:bodyPr wrap="square" lIns="0" rIns="0" tIns="0" bIns="0" anchor="t">
-            <a:spAutoFit/>
-          </a:bodyPr>
-          <a:lstStyle/>
-          <a:p>
-            <a:pPr algn="l"/>
-            <a:r>
-              <a:rPr sz="1100" b="0">
-                <a:solidFill>
-                  <a:srgbClr val="475569"/>
-                </a:solidFill>
-              </a:rPr>
-              <a:t>Paciente e público geral (RN13)</a:t>
-            </a:r>
-          </a:p>
-        </p:txBody>
-      </p:sp>
-      <p:sp>
-        <p:nvSpPr>
-          <p:cNvPr id="22" name="Oval 21"/>
+              <a:rPr sz="940" b="0">
+                <a:solidFill>
+                  <a:srgbClr val="44454D"/>
+                </a:solidFill>
+                <a:latin typeface="Aptos"/>
+              </a:rPr>
+              <a:t>Agenda do dia</a:t>
+            </a:r>
+          </a:p>
+        </p:txBody>
+      </p:sp>
+      <p:sp>
+        <p:nvSpPr>
+          <p:cNvPr id="28" name="TextBox 27"/>
+          <p:cNvSpPr txBox="1"/>
+          <p:nvPr/>
+        </p:nvSpPr>
+        <p:spPr>
+          <a:xfrm>
+            <a:off x="2441447" y="4718304"/>
+            <a:ext cx="1234440" cy="256032"/>
+          </a:xfrm>
+          <a:prstGeom prst="rect">
+            <a:avLst/>
+          </a:prstGeom>
+          <a:noFill/>
+        </p:spPr>
+        <p:txBody>
+          <a:bodyPr wrap="square" lIns="0" rIns="0" tIns="0" bIns="0" anchor="ctr">
+            <a:spAutoFit/>
+          </a:bodyPr>
+          <a:lstStyle/>
+          <a:p>
+            <a:pPr algn="r"/>
+            <a:r>
+              <a:rPr sz="819" b="0">
+                <a:solidFill>
+                  <a:srgbClr val="777985"/>
+                </a:solidFill>
+                <a:latin typeface="Aptos"/>
+              </a:rPr>
+              <a:t>RF07</a:t>
+            </a:r>
+          </a:p>
+        </p:txBody>
+      </p:sp>
+      <p:sp>
+        <p:nvSpPr>
+          <p:cNvPr id="29" name="Rectangle 28"/>
           <p:cNvSpPr/>
           <p:nvPr/>
         </p:nvSpPr>
         <p:spPr>
           <a:xfrm>
-            <a:off x="987552" y="3621024"/>
-            <a:ext cx="137160" cy="137160"/>
-          </a:xfrm>
-          <a:prstGeom prst="ellipse">
-            <a:avLst/>
-          </a:prstGeom>
-          <a:solidFill>
-            <a:srgbClr val="2563EB"/>
-          </a:solidFill>
-          <a:ln w="12700">
+            <a:off x="658368" y="5029200"/>
+            <a:ext cx="3017520" cy="0"/>
+          </a:xfrm>
+          <a:prstGeom prst="rect">
+            <a:avLst/>
+          </a:prstGeom>
+          <a:noFill/>
+          <a:ln w="9525">
             <a:solidFill>
-              <a:srgbClr val="2563EB"/>
+              <a:srgbClr val="E6E6EE"/>
             </a:solidFill>
           </a:ln>
           <a:effectLst/>
@@ -1824,58 +1827,92 @@
       </p:sp>
       <p:sp>
         <p:nvSpPr>
-          <p:cNvPr id="23" name="TextBox 22"/>
-          <p:cNvSpPr txBox="1"/>
-          <p:nvPr/>
-        </p:nvSpPr>
-        <p:spPr>
-          <a:xfrm>
-            <a:off x="1261872" y="3584448"/>
-            <a:ext cx="4343400" cy="411480"/>
-          </a:xfrm>
-          <a:prstGeom prst="rect">
-            <a:avLst/>
-          </a:prstGeom>
-          <a:noFill/>
-        </p:spPr>
-        <p:txBody>
-          <a:bodyPr wrap="square" lIns="0" rIns="0" tIns="0" bIns="0" anchor="t">
+          <p:cNvPr id="30" name="TextBox 29"/>
+          <p:cNvSpPr txBox="1"/>
+          <p:nvPr/>
+        </p:nvSpPr>
+        <p:spPr>
+          <a:xfrm>
+            <a:off x="658368" y="5084064"/>
+            <a:ext cx="1783079" cy="256032"/>
+          </a:xfrm>
+          <a:prstGeom prst="rect">
+            <a:avLst/>
+          </a:prstGeom>
+          <a:noFill/>
+        </p:spPr>
+        <p:txBody>
+          <a:bodyPr wrap="square" lIns="0" rIns="0" tIns="0" bIns="0" anchor="ctr">
             <a:spAutoFit/>
           </a:bodyPr>
           <a:lstStyle/>
           <a:p>
             <a:pPr algn="l"/>
             <a:r>
-              <a:rPr sz="1250" b="0">
-                <a:solidFill>
-                  <a:srgbClr val="0F172A"/>
-                </a:solidFill>
-              </a:rPr>
-              <a:t>Página inicial: serviços, WhatsApp e telefone</a:t>
-            </a:r>
-          </a:p>
-        </p:txBody>
-      </p:sp>
-      <p:sp>
-        <p:nvSpPr>
-          <p:cNvPr id="24" name="Oval 23"/>
+              <a:rPr sz="940" b="0">
+                <a:solidFill>
+                  <a:srgbClr val="44454D"/>
+                </a:solidFill>
+                <a:latin typeface="Aptos"/>
+              </a:rPr>
+              <a:t>Busca e cadastro de paciente</a:t>
+            </a:r>
+          </a:p>
+        </p:txBody>
+      </p:sp>
+      <p:sp>
+        <p:nvSpPr>
+          <p:cNvPr id="31" name="TextBox 30"/>
+          <p:cNvSpPr txBox="1"/>
+          <p:nvPr/>
+        </p:nvSpPr>
+        <p:spPr>
+          <a:xfrm>
+            <a:off x="2441447" y="5084064"/>
+            <a:ext cx="1234440" cy="256032"/>
+          </a:xfrm>
+          <a:prstGeom prst="rect">
+            <a:avLst/>
+          </a:prstGeom>
+          <a:noFill/>
+        </p:spPr>
+        <p:txBody>
+          <a:bodyPr wrap="square" lIns="0" rIns="0" tIns="0" bIns="0" anchor="ctr">
+            <a:spAutoFit/>
+          </a:bodyPr>
+          <a:lstStyle/>
+          <a:p>
+            <a:pPr algn="r"/>
+            <a:r>
+              <a:rPr sz="819" b="0">
+                <a:solidFill>
+                  <a:srgbClr val="777985"/>
+                </a:solidFill>
+                <a:latin typeface="Aptos"/>
+              </a:rPr>
+              <a:t>RF06</a:t>
+            </a:r>
+          </a:p>
+        </p:txBody>
+      </p:sp>
+      <p:sp>
+        <p:nvSpPr>
+          <p:cNvPr id="32" name="Rectangle 31"/>
           <p:cNvSpPr/>
           <p:nvPr/>
         </p:nvSpPr>
         <p:spPr>
           <a:xfrm>
-            <a:off x="987552" y="4151376"/>
-            <a:ext cx="137160" cy="137160"/>
-          </a:xfrm>
-          <a:prstGeom prst="ellipse">
-            <a:avLst/>
-          </a:prstGeom>
-          <a:solidFill>
-            <a:srgbClr val="2563EB"/>
-          </a:solidFill>
-          <a:ln w="12700">
+            <a:off x="658368" y="5394960"/>
+            <a:ext cx="3017520" cy="0"/>
+          </a:xfrm>
+          <a:prstGeom prst="rect">
+            <a:avLst/>
+          </a:prstGeom>
+          <a:noFill/>
+          <a:ln w="9525">
             <a:solidFill>
-              <a:srgbClr val="2563EB"/>
+              <a:srgbClr val="E6E6EE"/>
             </a:solidFill>
           </a:ln>
           <a:effectLst/>
@@ -1904,58 +1941,92 @@
       </p:sp>
       <p:sp>
         <p:nvSpPr>
-          <p:cNvPr id="25" name="TextBox 24"/>
-          <p:cNvSpPr txBox="1"/>
-          <p:nvPr/>
-        </p:nvSpPr>
-        <p:spPr>
-          <a:xfrm>
-            <a:off x="1261872" y="4114800"/>
-            <a:ext cx="4343400" cy="411480"/>
-          </a:xfrm>
-          <a:prstGeom prst="rect">
-            <a:avLst/>
-          </a:prstGeom>
-          <a:noFill/>
-        </p:spPr>
-        <p:txBody>
-          <a:bodyPr wrap="square" lIns="0" rIns="0" tIns="0" bIns="0" anchor="t">
+          <p:cNvPr id="33" name="TextBox 32"/>
+          <p:cNvSpPr txBox="1"/>
+          <p:nvPr/>
+        </p:nvSpPr>
+        <p:spPr>
+          <a:xfrm>
+            <a:off x="658368" y="5449824"/>
+            <a:ext cx="1783079" cy="256032"/>
+          </a:xfrm>
+          <a:prstGeom prst="rect">
+            <a:avLst/>
+          </a:prstGeom>
+          <a:noFill/>
+        </p:spPr>
+        <p:txBody>
+          <a:bodyPr wrap="square" lIns="0" rIns="0" tIns="0" bIns="0" anchor="ctr">
             <a:spAutoFit/>
           </a:bodyPr>
           <a:lstStyle/>
           <a:p>
             <a:pPr algn="l"/>
             <a:r>
-              <a:rPr sz="1250" b="0">
-                <a:solidFill>
-                  <a:srgbClr val="0F172A"/>
-                </a:solidFill>
-              </a:rPr>
-              <a:t>Unidades: endereço, horário e contato</a:t>
-            </a:r>
-          </a:p>
-        </p:txBody>
-      </p:sp>
-      <p:sp>
-        <p:nvSpPr>
-          <p:cNvPr id="26" name="Oval 25"/>
+              <a:rPr sz="940" b="0">
+                <a:solidFill>
+                  <a:srgbClr val="44454D"/>
+                </a:solidFill>
+                <a:latin typeface="Aptos"/>
+              </a:rPr>
+              <a:t>Nova consulta e disponibilidade</a:t>
+            </a:r>
+          </a:p>
+        </p:txBody>
+      </p:sp>
+      <p:sp>
+        <p:nvSpPr>
+          <p:cNvPr id="34" name="TextBox 33"/>
+          <p:cNvSpPr txBox="1"/>
+          <p:nvPr/>
+        </p:nvSpPr>
+        <p:spPr>
+          <a:xfrm>
+            <a:off x="2441447" y="5449824"/>
+            <a:ext cx="1234440" cy="256032"/>
+          </a:xfrm>
+          <a:prstGeom prst="rect">
+            <a:avLst/>
+          </a:prstGeom>
+          <a:noFill/>
+        </p:spPr>
+        <p:txBody>
+          <a:bodyPr wrap="square" lIns="0" rIns="0" tIns="0" bIns="0" anchor="ctr">
+            <a:spAutoFit/>
+          </a:bodyPr>
+          <a:lstStyle/>
+          <a:p>
+            <a:pPr algn="r"/>
+            <a:r>
+              <a:rPr sz="819" b="0">
+                <a:solidFill>
+                  <a:srgbClr val="777985"/>
+                </a:solidFill>
+                <a:latin typeface="Aptos"/>
+              </a:rPr>
+              <a:t>RF07</a:t>
+            </a:r>
+          </a:p>
+        </p:txBody>
+      </p:sp>
+      <p:sp>
+        <p:nvSpPr>
+          <p:cNvPr id="35" name="Rectangle 34"/>
           <p:cNvSpPr/>
           <p:nvPr/>
         </p:nvSpPr>
         <p:spPr>
           <a:xfrm>
-            <a:off x="987552" y="4681728"/>
-            <a:ext cx="137160" cy="137160"/>
-          </a:xfrm>
-          <a:prstGeom prst="ellipse">
-            <a:avLst/>
-          </a:prstGeom>
-          <a:solidFill>
-            <a:srgbClr val="2563EB"/>
-          </a:solidFill>
-          <a:ln w="12700">
+            <a:off x="3950207" y="4297680"/>
+            <a:ext cx="3017520" cy="0"/>
+          </a:xfrm>
+          <a:prstGeom prst="rect">
+            <a:avLst/>
+          </a:prstGeom>
+          <a:noFill/>
+          <a:ln w="9525">
             <a:solidFill>
-              <a:srgbClr val="2563EB"/>
+              <a:srgbClr val="E6E6EE"/>
             </a:solidFill>
           </a:ln>
           <a:effectLst/>
@@ -1984,58 +2055,92 @@
       </p:sp>
       <p:sp>
         <p:nvSpPr>
-          <p:cNvPr id="27" name="TextBox 26"/>
-          <p:cNvSpPr txBox="1"/>
-          <p:nvPr/>
-        </p:nvSpPr>
-        <p:spPr>
-          <a:xfrm>
-            <a:off x="1261872" y="4645152"/>
-            <a:ext cx="4343400" cy="411480"/>
-          </a:xfrm>
-          <a:prstGeom prst="rect">
-            <a:avLst/>
-          </a:prstGeom>
-          <a:noFill/>
-        </p:spPr>
-        <p:txBody>
-          <a:bodyPr wrap="square" lIns="0" rIns="0" tIns="0" bIns="0" anchor="t">
+          <p:cNvPr id="36" name="TextBox 35"/>
+          <p:cNvSpPr txBox="1"/>
+          <p:nvPr/>
+        </p:nvSpPr>
+        <p:spPr>
+          <a:xfrm>
+            <a:off x="3950207" y="4352544"/>
+            <a:ext cx="1783079" cy="256032"/>
+          </a:xfrm>
+          <a:prstGeom prst="rect">
+            <a:avLst/>
+          </a:prstGeom>
+          <a:noFill/>
+        </p:spPr>
+        <p:txBody>
+          <a:bodyPr wrap="square" lIns="0" rIns="0" tIns="0" bIns="0" anchor="ctr">
             <a:spAutoFit/>
           </a:bodyPr>
           <a:lstStyle/>
           <a:p>
             <a:pPr algn="l"/>
             <a:r>
-              <a:rPr sz="1250" b="0">
-                <a:solidFill>
-                  <a:srgbClr val="0F172A"/>
-                </a:solidFill>
-              </a:rPr>
-              <a:t>Profissionais e especialidades por unidade</a:t>
-            </a:r>
-          </a:p>
-        </p:txBody>
-      </p:sp>
-      <p:sp>
-        <p:nvSpPr>
-          <p:cNvPr id="28" name="Oval 27"/>
+              <a:rPr sz="940" b="0">
+                <a:solidFill>
+                  <a:srgbClr val="44454D"/>
+                </a:solidFill>
+                <a:latin typeface="Aptos"/>
+              </a:rPr>
+              <a:t>Detalhe do agendamento</a:t>
+            </a:r>
+          </a:p>
+        </p:txBody>
+      </p:sp>
+      <p:sp>
+        <p:nvSpPr>
+          <p:cNvPr id="37" name="TextBox 36"/>
+          <p:cNvSpPr txBox="1"/>
+          <p:nvPr/>
+        </p:nvSpPr>
+        <p:spPr>
+          <a:xfrm>
+            <a:off x="5733288" y="4352544"/>
+            <a:ext cx="1234440" cy="256032"/>
+          </a:xfrm>
+          <a:prstGeom prst="rect">
+            <a:avLst/>
+          </a:prstGeom>
+          <a:noFill/>
+        </p:spPr>
+        <p:txBody>
+          <a:bodyPr wrap="square" lIns="0" rIns="0" tIns="0" bIns="0" anchor="ctr">
+            <a:spAutoFit/>
+          </a:bodyPr>
+          <a:lstStyle/>
+          <a:p>
+            <a:pPr algn="r"/>
+            <a:r>
+              <a:rPr sz="819" b="0">
+                <a:solidFill>
+                  <a:srgbClr val="777985"/>
+                </a:solidFill>
+                <a:latin typeface="Aptos"/>
+              </a:rPr>
+              <a:t>RF08 · RF13</a:t>
+            </a:r>
+          </a:p>
+        </p:txBody>
+      </p:sp>
+      <p:sp>
+        <p:nvSpPr>
+          <p:cNvPr id="38" name="Rectangle 37"/>
           <p:cNvSpPr/>
           <p:nvPr/>
         </p:nvSpPr>
         <p:spPr>
           <a:xfrm>
-            <a:off x="987552" y="5212080"/>
-            <a:ext cx="137160" cy="137160"/>
-          </a:xfrm>
-          <a:prstGeom prst="ellipse">
-            <a:avLst/>
-          </a:prstGeom>
-          <a:solidFill>
-            <a:srgbClr val="2563EB"/>
-          </a:solidFill>
-          <a:ln w="12700">
+            <a:off x="3950207" y="4663440"/>
+            <a:ext cx="3017520" cy="0"/>
+          </a:xfrm>
+          <a:prstGeom prst="rect">
+            <a:avLst/>
+          </a:prstGeom>
+          <a:noFill/>
+          <a:ln w="9525">
             <a:solidFill>
-              <a:srgbClr val="2563EB"/>
+              <a:srgbClr val="E6E6EE"/>
             </a:solidFill>
           </a:ln>
           <a:effectLst/>
@@ -2064,94 +2169,92 @@
       </p:sp>
       <p:sp>
         <p:nvSpPr>
-          <p:cNvPr id="29" name="TextBox 28"/>
-          <p:cNvSpPr txBox="1"/>
-          <p:nvPr/>
-        </p:nvSpPr>
-        <p:spPr>
-          <a:xfrm>
-            <a:off x="1261872" y="5175504"/>
-            <a:ext cx="4343400" cy="411480"/>
-          </a:xfrm>
-          <a:prstGeom prst="rect">
-            <a:avLst/>
-          </a:prstGeom>
-          <a:noFill/>
-        </p:spPr>
-        <p:txBody>
-          <a:bodyPr wrap="square" lIns="0" rIns="0" tIns="0" bIns="0" anchor="t">
+          <p:cNvPr id="39" name="TextBox 38"/>
+          <p:cNvSpPr txBox="1"/>
+          <p:nvPr/>
+        </p:nvSpPr>
+        <p:spPr>
+          <a:xfrm>
+            <a:off x="3950207" y="4718304"/>
+            <a:ext cx="1783079" cy="256032"/>
+          </a:xfrm>
+          <a:prstGeom prst="rect">
+            <a:avLst/>
+          </a:prstGeom>
+          <a:noFill/>
+        </p:spPr>
+        <p:txBody>
+          <a:bodyPr wrap="square" lIns="0" rIns="0" tIns="0" bIns="0" anchor="ctr">
             <a:spAutoFit/>
           </a:bodyPr>
           <a:lstStyle/>
           <a:p>
             <a:pPr algn="l"/>
             <a:r>
-              <a:rPr sz="1250" b="0">
-                <a:solidFill>
-                  <a:srgbClr val="0F172A"/>
-                </a:solidFill>
-              </a:rPr>
-              <a:t>Como agendar: passo a passo pelo WhatsApp</a:t>
-            </a:r>
-          </a:p>
-        </p:txBody>
-      </p:sp>
-      <p:sp>
-        <p:nvSpPr>
-          <p:cNvPr id="30" name="TextBox 29"/>
-          <p:cNvSpPr txBox="1"/>
-          <p:nvPr/>
-        </p:nvSpPr>
-        <p:spPr>
-          <a:xfrm>
-            <a:off x="960120" y="5504688"/>
-            <a:ext cx="4572000" cy="237744"/>
-          </a:xfrm>
-          <a:prstGeom prst="rect">
-            <a:avLst/>
-          </a:prstGeom>
-          <a:noFill/>
-        </p:spPr>
-        <p:txBody>
-          <a:bodyPr wrap="square" lIns="0" rIns="0" tIns="0" bIns="0" anchor="t">
-            <a:spAutoFit/>
-          </a:bodyPr>
-          <a:lstStyle/>
-          <a:p>
-            <a:pPr algn="l"/>
-            <a:r>
-              <a:rPr sz="1050" b="0">
-                <a:solidFill>
-                  <a:srgbClr val="475569"/>
-                </a:solidFill>
-              </a:rPr>
-              <a:t>Não exibe dados de paciente nem a agenda interna</a:t>
-            </a:r>
-          </a:p>
-        </p:txBody>
-      </p:sp>
-      <p:sp>
-        <p:nvSpPr>
-          <p:cNvPr id="31" name="Rounded Rectangle 30"/>
+              <a:rPr sz="940" b="0">
+                <a:solidFill>
+                  <a:srgbClr val="44454D"/>
+                </a:solidFill>
+                <a:latin typeface="Aptos"/>
+              </a:rPr>
+              <a:t>Minha agenda</a:t>
+            </a:r>
+          </a:p>
+        </p:txBody>
+      </p:sp>
+      <p:sp>
+        <p:nvSpPr>
+          <p:cNvPr id="40" name="TextBox 39"/>
+          <p:cNvSpPr txBox="1"/>
+          <p:nvPr/>
+        </p:nvSpPr>
+        <p:spPr>
+          <a:xfrm>
+            <a:off x="5733288" y="4718304"/>
+            <a:ext cx="1234440" cy="256032"/>
+          </a:xfrm>
+          <a:prstGeom prst="rect">
+            <a:avLst/>
+          </a:prstGeom>
+          <a:noFill/>
+        </p:spPr>
+        <p:txBody>
+          <a:bodyPr wrap="square" lIns="0" rIns="0" tIns="0" bIns="0" anchor="ctr">
+            <a:spAutoFit/>
+          </a:bodyPr>
+          <a:lstStyle/>
+          <a:p>
+            <a:pPr algn="r"/>
+            <a:r>
+              <a:rPr sz="819" b="0">
+                <a:solidFill>
+                  <a:srgbClr val="777985"/>
+                </a:solidFill>
+                <a:latin typeface="Aptos"/>
+              </a:rPr>
+              <a:t>RF10</a:t>
+            </a:r>
+          </a:p>
+        </p:txBody>
+      </p:sp>
+      <p:sp>
+        <p:nvSpPr>
+          <p:cNvPr id="41" name="Rectangle 40"/>
           <p:cNvSpPr/>
           <p:nvPr/>
         </p:nvSpPr>
         <p:spPr>
           <a:xfrm>
-            <a:off x="6080760" y="2606040"/>
-            <a:ext cx="5394960" cy="3200400"/>
-          </a:xfrm>
-          <a:prstGeom prst="roundRect">
-            <a:avLst>
-              <a:gd name="adj" fmla="val 3000"/>
-            </a:avLst>
-          </a:prstGeom>
-          <a:solidFill>
-            <a:srgbClr val="ECFDF5"/>
-          </a:solidFill>
-          <a:ln w="15240">
+            <a:off x="3950207" y="5029200"/>
+            <a:ext cx="3017520" cy="0"/>
+          </a:xfrm>
+          <a:prstGeom prst="rect">
+            <a:avLst/>
+          </a:prstGeom>
+          <a:noFill/>
+          <a:ln w="9525">
             <a:solidFill>
-              <a:srgbClr val="A7F3D0"/>
+              <a:srgbClr val="E6E6EE"/>
             </a:solidFill>
           </a:ln>
           <a:effectLst/>
@@ -2173,97 +2276,99 @@
         <p:txBody>
           <a:bodyPr rtlCol="0" anchor="ctr"/>
           <a:lstStyle/>
-          <a:p/>
-        </p:txBody>
-      </p:sp>
-      <p:sp>
-        <p:nvSpPr>
-          <p:cNvPr id="32" name="TextBox 31"/>
-          <p:cNvSpPr txBox="1"/>
-          <p:nvPr/>
-        </p:nvSpPr>
-        <p:spPr>
-          <a:xfrm>
-            <a:off x="6355080" y="2852928"/>
-            <a:ext cx="4846320" cy="292608"/>
-          </a:xfrm>
-          <a:prstGeom prst="rect">
-            <a:avLst/>
-          </a:prstGeom>
-          <a:noFill/>
-        </p:spPr>
-        <p:txBody>
-          <a:bodyPr wrap="square" lIns="0" rIns="0" tIns="0" bIns="0" anchor="t">
+          <a:p>
+            <a:pPr algn="ctr"/>
+          </a:p>
+        </p:txBody>
+      </p:sp>
+      <p:sp>
+        <p:nvSpPr>
+          <p:cNvPr id="42" name="TextBox 41"/>
+          <p:cNvSpPr txBox="1"/>
+          <p:nvPr/>
+        </p:nvSpPr>
+        <p:spPr>
+          <a:xfrm>
+            <a:off x="3950207" y="5084064"/>
+            <a:ext cx="1783079" cy="256032"/>
+          </a:xfrm>
+          <a:prstGeom prst="rect">
+            <a:avLst/>
+          </a:prstGeom>
+          <a:noFill/>
+        </p:spPr>
+        <p:txBody>
+          <a:bodyPr wrap="square" lIns="0" rIns="0" tIns="0" bIns="0" anchor="ctr">
             <a:spAutoFit/>
           </a:bodyPr>
           <a:lstStyle/>
           <a:p>
             <a:pPr algn="l"/>
             <a:r>
-              <a:rPr sz="1700" b="1">
-                <a:solidFill>
-                  <a:srgbClr val="0F766E"/>
-                </a:solidFill>
-              </a:rPr>
-              <a:t>Ambiente administrativo — com login</a:t>
-            </a:r>
-          </a:p>
-        </p:txBody>
-      </p:sp>
-      <p:sp>
-        <p:nvSpPr>
-          <p:cNvPr id="33" name="TextBox 32"/>
-          <p:cNvSpPr txBox="1"/>
-          <p:nvPr/>
-        </p:nvSpPr>
-        <p:spPr>
-          <a:xfrm>
-            <a:off x="6355080" y="3163824"/>
-            <a:ext cx="4846320" cy="237744"/>
-          </a:xfrm>
-          <a:prstGeom prst="rect">
-            <a:avLst/>
-          </a:prstGeom>
-          <a:noFill/>
-        </p:spPr>
-        <p:txBody>
-          <a:bodyPr wrap="square" lIns="0" rIns="0" tIns="0" bIns="0" anchor="t">
-            <a:spAutoFit/>
-          </a:bodyPr>
-          <a:lstStyle/>
-          <a:p>
-            <a:pPr algn="l"/>
-            <a:r>
-              <a:rPr sz="1100" b="0">
-                <a:solidFill>
-                  <a:srgbClr val="475569"/>
-                </a:solidFill>
-              </a:rPr>
-              <a:t>Secretária, profissional, gerente e gestão (RF16 e RF17)</a:t>
-            </a:r>
-          </a:p>
-        </p:txBody>
-      </p:sp>
-      <p:sp>
-        <p:nvSpPr>
-          <p:cNvPr id="34" name="Oval 33"/>
+              <a:rPr sz="940" b="0">
+                <a:solidFill>
+                  <a:srgbClr val="44454D"/>
+                </a:solidFill>
+                <a:latin typeface="Aptos"/>
+              </a:rPr>
+              <a:t>Solicitação de bloqueio</a:t>
+            </a:r>
+          </a:p>
+        </p:txBody>
+      </p:sp>
+      <p:sp>
+        <p:nvSpPr>
+          <p:cNvPr id="43" name="TextBox 42"/>
+          <p:cNvSpPr txBox="1"/>
+          <p:nvPr/>
+        </p:nvSpPr>
+        <p:spPr>
+          <a:xfrm>
+            <a:off x="5733288" y="5084064"/>
+            <a:ext cx="1234440" cy="256032"/>
+          </a:xfrm>
+          <a:prstGeom prst="rect">
+            <a:avLst/>
+          </a:prstGeom>
+          <a:noFill/>
+        </p:spPr>
+        <p:txBody>
+          <a:bodyPr wrap="square" lIns="0" rIns="0" tIns="0" bIns="0" anchor="ctr">
+            <a:spAutoFit/>
+          </a:bodyPr>
+          <a:lstStyle/>
+          <a:p>
+            <a:pPr algn="r"/>
+            <a:r>
+              <a:rPr sz="819" b="0">
+                <a:solidFill>
+                  <a:srgbClr val="777985"/>
+                </a:solidFill>
+                <a:latin typeface="Aptos"/>
+              </a:rPr>
+              <a:t>RF11</a:t>
+            </a:r>
+          </a:p>
+        </p:txBody>
+      </p:sp>
+      <p:sp>
+        <p:nvSpPr>
+          <p:cNvPr id="44" name="Rectangle 43"/>
           <p:cNvSpPr/>
           <p:nvPr/>
         </p:nvSpPr>
         <p:spPr>
           <a:xfrm>
-            <a:off x="6382512" y="3584448"/>
-            <a:ext cx="137160" cy="137160"/>
-          </a:xfrm>
-          <a:prstGeom prst="ellipse">
-            <a:avLst/>
-          </a:prstGeom>
-          <a:solidFill>
-            <a:srgbClr val="0F766E"/>
-          </a:solidFill>
-          <a:ln w="12700">
+            <a:off x="3950207" y="5394960"/>
+            <a:ext cx="3017520" cy="0"/>
+          </a:xfrm>
+          <a:prstGeom prst="rect">
+            <a:avLst/>
+          </a:prstGeom>
+          <a:noFill/>
+          <a:ln w="9525">
             <a:solidFill>
-              <a:srgbClr val="0F766E"/>
+              <a:srgbClr val="E6E6EE"/>
             </a:solidFill>
           </a:ln>
           <a:effectLst/>
@@ -2292,58 +2397,92 @@
       </p:sp>
       <p:sp>
         <p:nvSpPr>
-          <p:cNvPr id="35" name="TextBox 34"/>
-          <p:cNvSpPr txBox="1"/>
-          <p:nvPr/>
-        </p:nvSpPr>
-        <p:spPr>
-          <a:xfrm>
-            <a:off x="6656832" y="3547872"/>
-            <a:ext cx="4617720" cy="384048"/>
-          </a:xfrm>
-          <a:prstGeom prst="rect">
-            <a:avLst/>
-          </a:prstGeom>
-          <a:noFill/>
-        </p:spPr>
-        <p:txBody>
-          <a:bodyPr wrap="square" lIns="0" rIns="0" tIns="0" bIns="0" anchor="t">
+          <p:cNvPr id="45" name="TextBox 44"/>
+          <p:cNvSpPr txBox="1"/>
+          <p:nvPr/>
+        </p:nvSpPr>
+        <p:spPr>
+          <a:xfrm>
+            <a:off x="3950207" y="5449824"/>
+            <a:ext cx="1783079" cy="256032"/>
+          </a:xfrm>
+          <a:prstGeom prst="rect">
+            <a:avLst/>
+          </a:prstGeom>
+          <a:noFill/>
+        </p:spPr>
+        <p:txBody>
+          <a:bodyPr wrap="square" lIns="0" rIns="0" tIns="0" bIns="0" anchor="ctr">
             <a:spAutoFit/>
           </a:bodyPr>
           <a:lstStyle/>
           <a:p>
             <a:pPr algn="l"/>
             <a:r>
-              <a:rPr sz="1250" b="0">
-                <a:solidFill>
-                  <a:srgbClr val="0F172A"/>
-                </a:solidFill>
-              </a:rPr>
-              <a:t>Agenda do dia: filtro por data, profissional e unidade</a:t>
-            </a:r>
-          </a:p>
-        </p:txBody>
-      </p:sp>
-      <p:sp>
-        <p:nvSpPr>
-          <p:cNvPr id="36" name="Oval 35"/>
+              <a:rPr sz="940" b="0">
+                <a:solidFill>
+                  <a:srgbClr val="44454D"/>
+                </a:solidFill>
+                <a:latin typeface="Aptos"/>
+              </a:rPr>
+              <a:t>Cadastros da rede</a:t>
+            </a:r>
+          </a:p>
+        </p:txBody>
+      </p:sp>
+      <p:sp>
+        <p:nvSpPr>
+          <p:cNvPr id="46" name="TextBox 45"/>
+          <p:cNvSpPr txBox="1"/>
+          <p:nvPr/>
+        </p:nvSpPr>
+        <p:spPr>
+          <a:xfrm>
+            <a:off x="5733288" y="5449824"/>
+            <a:ext cx="1234440" cy="256032"/>
+          </a:xfrm>
+          <a:prstGeom prst="rect">
+            <a:avLst/>
+          </a:prstGeom>
+          <a:noFill/>
+        </p:spPr>
+        <p:txBody>
+          <a:bodyPr wrap="square" lIns="0" rIns="0" tIns="0" bIns="0" anchor="ctr">
+            <a:spAutoFit/>
+          </a:bodyPr>
+          <a:lstStyle/>
+          <a:p>
+            <a:pPr algn="r"/>
+            <a:r>
+              <a:rPr sz="819" b="0">
+                <a:solidFill>
+                  <a:srgbClr val="777985"/>
+                </a:solidFill>
+                <a:latin typeface="Aptos"/>
+              </a:rPr>
+              <a:t>RF09</a:t>
+            </a:r>
+          </a:p>
+        </p:txBody>
+      </p:sp>
+      <p:sp>
+        <p:nvSpPr>
+          <p:cNvPr id="47" name="Rectangle 46"/>
           <p:cNvSpPr/>
           <p:nvPr/>
         </p:nvSpPr>
         <p:spPr>
           <a:xfrm>
-            <a:off x="6382512" y="4005072"/>
-            <a:ext cx="137160" cy="137160"/>
-          </a:xfrm>
-          <a:prstGeom prst="ellipse">
-            <a:avLst/>
-          </a:prstGeom>
-          <a:solidFill>
-            <a:srgbClr val="0F766E"/>
-          </a:solidFill>
-          <a:ln w="12700">
+            <a:off x="658368" y="5760720"/>
+            <a:ext cx="3017520" cy="0"/>
+          </a:xfrm>
+          <a:prstGeom prst="rect">
+            <a:avLst/>
+          </a:prstGeom>
+          <a:noFill/>
+          <a:ln w="9525">
             <a:solidFill>
-              <a:srgbClr val="0F766E"/>
+              <a:srgbClr val="E6E6EE"/>
             </a:solidFill>
           </a:ln>
           <a:effectLst/>
@@ -2372,58 +2511,22 @@
       </p:sp>
       <p:sp>
         <p:nvSpPr>
-          <p:cNvPr id="37" name="TextBox 36"/>
-          <p:cNvSpPr txBox="1"/>
-          <p:nvPr/>
-        </p:nvSpPr>
-        <p:spPr>
-          <a:xfrm>
-            <a:off x="6656832" y="3968496"/>
-            <a:ext cx="4617720" cy="384048"/>
-          </a:xfrm>
-          <a:prstGeom prst="rect">
-            <a:avLst/>
-          </a:prstGeom>
-          <a:noFill/>
-        </p:spPr>
-        <p:txBody>
-          <a:bodyPr wrap="square" lIns="0" rIns="0" tIns="0" bIns="0" anchor="t">
-            <a:spAutoFit/>
-          </a:bodyPr>
-          <a:lstStyle/>
-          <a:p>
-            <a:pPr algn="l"/>
-            <a:r>
-              <a:rPr sz="1250" b="0">
-                <a:solidFill>
-                  <a:srgbClr val="0F172A"/>
-                </a:solidFill>
-              </a:rPr>
-              <a:t>Busca e cadastro de paciente (RF06)</a:t>
-            </a:r>
-          </a:p>
-        </p:txBody>
-      </p:sp>
-      <p:sp>
-        <p:nvSpPr>
-          <p:cNvPr id="38" name="Oval 37"/>
+          <p:cNvPr id="48" name="Rectangle 47"/>
           <p:cNvSpPr/>
           <p:nvPr/>
         </p:nvSpPr>
         <p:spPr>
           <a:xfrm>
-            <a:off x="6382512" y="4425696"/>
-            <a:ext cx="137160" cy="137160"/>
-          </a:xfrm>
-          <a:prstGeom prst="ellipse">
-            <a:avLst/>
-          </a:prstGeom>
-          <a:solidFill>
-            <a:srgbClr val="0F766E"/>
-          </a:solidFill>
-          <a:ln w="12700">
+            <a:off x="3950207" y="5760720"/>
+            <a:ext cx="3017520" cy="0"/>
+          </a:xfrm>
+          <a:prstGeom prst="rect">
+            <a:avLst/>
+          </a:prstGeom>
+          <a:noFill/>
+          <a:ln w="9525">
             <a:solidFill>
-              <a:srgbClr val="0F766E"/>
+              <a:srgbClr val="E6E6EE"/>
             </a:solidFill>
           </a:ln>
           <a:effectLst/>
@@ -2452,262 +2555,44 @@
       </p:sp>
       <p:sp>
         <p:nvSpPr>
-          <p:cNvPr id="39" name="TextBox 38"/>
-          <p:cNvSpPr txBox="1"/>
-          <p:nvPr/>
-        </p:nvSpPr>
-        <p:spPr>
-          <a:xfrm>
-            <a:off x="6656832" y="4389120"/>
-            <a:ext cx="4617720" cy="384048"/>
-          </a:xfrm>
-          <a:prstGeom prst="rect">
-            <a:avLst/>
-          </a:prstGeom>
-          <a:noFill/>
-        </p:spPr>
-        <p:txBody>
-          <a:bodyPr wrap="square" lIns="0" rIns="0" tIns="0" bIns="0" anchor="t">
+          <p:cNvPr id="49" name="TextBox 48"/>
+          <p:cNvSpPr txBox="1"/>
+          <p:nvPr/>
+        </p:nvSpPr>
+        <p:spPr>
+          <a:xfrm>
+            <a:off x="658368" y="5925312"/>
+            <a:ext cx="6309360" cy="274320"/>
+          </a:xfrm>
+          <a:prstGeom prst="rect">
+            <a:avLst/>
+          </a:prstGeom>
+          <a:noFill/>
+        </p:spPr>
+        <p:txBody>
+          <a:bodyPr wrap="square" lIns="0" rIns="0" tIns="0" bIns="0" anchor="ctr">
             <a:spAutoFit/>
           </a:bodyPr>
           <a:lstStyle/>
           <a:p>
             <a:pPr algn="l"/>
             <a:r>
-              <a:rPr sz="1250" b="0">
-                <a:solidFill>
-                  <a:srgbClr val="0F172A"/>
-                </a:solidFill>
-              </a:rPr>
-              <a:t>Disponibilidade e novo agendamento (RF07)</a:t>
-            </a:r>
-          </a:p>
-        </p:txBody>
-      </p:sp>
-      <p:sp>
-        <p:nvSpPr>
-          <p:cNvPr id="40" name="Oval 39"/>
-          <p:cNvSpPr/>
-          <p:nvPr/>
-        </p:nvSpPr>
-        <p:spPr>
-          <a:xfrm>
-            <a:off x="6382512" y="4846320"/>
-            <a:ext cx="137160" cy="137160"/>
-          </a:xfrm>
-          <a:prstGeom prst="ellipse">
-            <a:avLst/>
-          </a:prstGeom>
-          <a:solidFill>
-            <a:srgbClr val="0F766E"/>
-          </a:solidFill>
-          <a:ln w="12700">
-            <a:solidFill>
-              <a:srgbClr val="0F766E"/>
-            </a:solidFill>
-          </a:ln>
-          <a:effectLst/>
-        </p:spPr>
-        <p:style>
-          <a:lnRef idx="1">
-            <a:schemeClr val="accent1"/>
-          </a:lnRef>
-          <a:fillRef idx="3">
-            <a:schemeClr val="accent1"/>
-          </a:fillRef>
-          <a:effectRef idx="2">
-            <a:schemeClr val="accent1"/>
-          </a:effectRef>
-          <a:fontRef idx="minor">
-            <a:schemeClr val="lt1"/>
-          </a:fontRef>
-        </p:style>
-        <p:txBody>
-          <a:bodyPr rtlCol="0" anchor="ctr"/>
-          <a:lstStyle/>
-          <a:p>
-            <a:pPr algn="ctr"/>
-          </a:p>
-        </p:txBody>
-      </p:sp>
-      <p:sp>
-        <p:nvSpPr>
-          <p:cNvPr id="41" name="TextBox 40"/>
-          <p:cNvSpPr txBox="1"/>
-          <p:nvPr/>
-        </p:nvSpPr>
-        <p:spPr>
-          <a:xfrm>
-            <a:off x="6656832" y="4809744"/>
-            <a:ext cx="4617720" cy="384048"/>
-          </a:xfrm>
-          <a:prstGeom prst="rect">
-            <a:avLst/>
-          </a:prstGeom>
-          <a:noFill/>
-        </p:spPr>
-        <p:txBody>
-          <a:bodyPr wrap="square" lIns="0" rIns="0" tIns="0" bIns="0" anchor="t">
-            <a:spAutoFit/>
-          </a:bodyPr>
-          <a:lstStyle/>
-          <a:p>
-            <a:pPr algn="l"/>
-            <a:r>
-              <a:rPr sz="1250" b="0">
-                <a:solidFill>
-                  <a:srgbClr val="0F172A"/>
-                </a:solidFill>
-              </a:rPr>
-              <a:t>Cancelar, remarcar e registrar o resultado (RF08 e RF13)</a:t>
-            </a:r>
-          </a:p>
-        </p:txBody>
-      </p:sp>
-      <p:sp>
-        <p:nvSpPr>
-          <p:cNvPr id="42" name="Oval 41"/>
-          <p:cNvSpPr/>
-          <p:nvPr/>
-        </p:nvSpPr>
-        <p:spPr>
-          <a:xfrm>
-            <a:off x="6382512" y="5266944"/>
-            <a:ext cx="137160" cy="137160"/>
-          </a:xfrm>
-          <a:prstGeom prst="ellipse">
-            <a:avLst/>
-          </a:prstGeom>
-          <a:solidFill>
-            <a:srgbClr val="0F766E"/>
-          </a:solidFill>
-          <a:ln w="12700">
-            <a:solidFill>
-              <a:srgbClr val="0F766E"/>
-            </a:solidFill>
-          </a:ln>
-          <a:effectLst/>
-        </p:spPr>
-        <p:style>
-          <a:lnRef idx="1">
-            <a:schemeClr val="accent1"/>
-          </a:lnRef>
-          <a:fillRef idx="3">
-            <a:schemeClr val="accent1"/>
-          </a:fillRef>
-          <a:effectRef idx="2">
-            <a:schemeClr val="accent1"/>
-          </a:effectRef>
-          <a:fontRef idx="minor">
-            <a:schemeClr val="lt1"/>
-          </a:fontRef>
-        </p:style>
-        <p:txBody>
-          <a:bodyPr rtlCol="0" anchor="ctr"/>
-          <a:lstStyle/>
-          <a:p>
-            <a:pPr algn="ctr"/>
-          </a:p>
-        </p:txBody>
-      </p:sp>
-      <p:sp>
-        <p:nvSpPr>
-          <p:cNvPr id="43" name="TextBox 42"/>
-          <p:cNvSpPr txBox="1"/>
-          <p:nvPr/>
-        </p:nvSpPr>
-        <p:spPr>
-          <a:xfrm>
-            <a:off x="6656832" y="5230368"/>
-            <a:ext cx="4617720" cy="384048"/>
-          </a:xfrm>
-          <a:prstGeom prst="rect">
-            <a:avLst/>
-          </a:prstGeom>
-          <a:noFill/>
-        </p:spPr>
-        <p:txBody>
-          <a:bodyPr wrap="square" lIns="0" rIns="0" tIns="0" bIns="0" anchor="t">
-            <a:spAutoFit/>
-          </a:bodyPr>
-          <a:lstStyle/>
-          <a:p>
-            <a:pPr algn="l"/>
-            <a:r>
-              <a:rPr sz="1250" b="0">
-                <a:solidFill>
-                  <a:srgbClr val="0F172A"/>
-                </a:solidFill>
-              </a:rPr>
-              <a:t>Minha agenda e bloqueio, para o profissional (RF10 e RF11)</a:t>
-            </a:r>
-          </a:p>
-        </p:txBody>
-      </p:sp>
-      <p:sp>
-        <p:nvSpPr>
-          <p:cNvPr id="44" name="TextBox 43"/>
-          <p:cNvSpPr txBox="1"/>
-          <p:nvPr/>
-        </p:nvSpPr>
-        <p:spPr>
-          <a:xfrm>
-            <a:off x="6355080" y="5532120"/>
-            <a:ext cx="4846320" cy="237744"/>
-          </a:xfrm>
-          <a:prstGeom prst="rect">
-            <a:avLst/>
-          </a:prstGeom>
-          <a:noFill/>
-        </p:spPr>
-        <p:txBody>
-          <a:bodyPr wrap="square" lIns="0" rIns="0" tIns="0" bIns="0" anchor="t">
-            <a:spAutoFit/>
-          </a:bodyPr>
-          <a:lstStyle/>
-          <a:p>
-            <a:pPr algn="l"/>
-            <a:r>
-              <a:rPr sz="1050" b="0">
-                <a:solidFill>
-                  <a:srgbClr val="475569"/>
-                </a:solidFill>
-              </a:rPr>
-              <a:t>Cada perfil vê apenas as ações que pode executar</a:t>
-            </a:r>
-          </a:p>
-        </p:txBody>
-      </p:sp>
-      <p:sp>
-        <p:nvSpPr>
-          <p:cNvPr id="45" name="TextBox 44"/>
-          <p:cNvSpPr txBox="1"/>
-          <p:nvPr/>
-        </p:nvSpPr>
-        <p:spPr>
-          <a:xfrm>
-            <a:off x="914400" y="6016752"/>
-            <a:ext cx="10332720" cy="292608"/>
-          </a:xfrm>
-          <a:prstGeom prst="rect">
-            <a:avLst/>
-          </a:prstGeom>
-          <a:noFill/>
-        </p:spPr>
-        <p:txBody>
-          <a:bodyPr wrap="square" lIns="0" rIns="0" tIns="0" bIns="0" anchor="ctr">
-            <a:spAutoFit/>
-          </a:bodyPr>
-          <a:lstStyle/>
-          <a:p>
-            <a:pPr algn="l"/>
-            <a:r>
-              <a:rPr sz="1250" b="0">
-                <a:solidFill>
-                  <a:srgbClr val="475569"/>
-                </a:solidFill>
-              </a:rPr>
-              <a:t>Duas finalidades diferentes: informar o paciente e operar a agenda da rede.</a:t>
+              <a:rPr sz="980" b="1">
+                <a:solidFill>
+                  <a:srgbClr val="24252E"/>
+                </a:solidFill>
+                <a:latin typeface="Aptos"/>
+              </a:rPr>
+              <a:t>12 telas. </a:t>
+            </a:r>
+            <a:r>
+              <a:rPr sz="980" b="0">
+                <a:solidFill>
+                  <a:srgbClr val="777985"/>
+                </a:solidFill>
+                <a:latin typeface="Aptos"/>
+              </a:rPr>
+              <a:t>Requisito → fluxo de UX/UI → estrutura no navegador → dados do back-end.</a:t>
             </a:r>
           </a:p>
         </p:txBody>
@@ -2732,94 +2617,26 @@
       <p:grpSpPr/>
       <p:sp>
         <p:nvSpPr>
-          <p:cNvPr id="2" name="TextBox 1"/>
-          <p:cNvSpPr txBox="1"/>
-          <p:nvPr/>
-        </p:nvSpPr>
-        <p:spPr>
-          <a:xfrm>
-            <a:off x="566928" y="438912"/>
-            <a:ext cx="10881360" cy="502920"/>
-          </a:xfrm>
-          <a:prstGeom prst="rect">
-            <a:avLst/>
-          </a:prstGeom>
-          <a:noFill/>
-        </p:spPr>
-        <p:txBody>
-          <a:bodyPr wrap="square" lIns="0" rIns="0" tIns="0" bIns="0" anchor="ctr">
-            <a:spAutoFit/>
-          </a:bodyPr>
-          <a:lstStyle/>
-          <a:p>
-            <a:pPr algn="l"/>
-            <a:r>
-              <a:rPr sz="2700" b="1">
-                <a:solidFill>
-                  <a:srgbClr val="0F172A"/>
-                </a:solidFill>
-              </a:rPr>
-              <a:t>Como o front-end estrutura a solução</a:t>
-            </a:r>
-          </a:p>
-        </p:txBody>
-      </p:sp>
-      <p:sp>
-        <p:nvSpPr>
-          <p:cNvPr id="3" name="TextBox 2"/>
-          <p:cNvSpPr txBox="1"/>
-          <p:nvPr/>
-        </p:nvSpPr>
-        <p:spPr>
-          <a:xfrm>
-            <a:off x="585216" y="941832"/>
-            <a:ext cx="10607040" cy="320040"/>
-          </a:xfrm>
-          <a:prstGeom prst="rect">
-            <a:avLst/>
-          </a:prstGeom>
-          <a:noFill/>
-        </p:spPr>
-        <p:txBody>
-          <a:bodyPr wrap="square" lIns="0" rIns="0" tIns="0" bIns="0" anchor="ctr">
-            <a:spAutoFit/>
-          </a:bodyPr>
-          <a:lstStyle/>
-          <a:p>
-            <a:pPr algn="l"/>
-            <a:r>
-              <a:rPr sz="1250" b="0">
-                <a:solidFill>
-                  <a:srgbClr val="475569"/>
-                </a:solidFill>
-              </a:rPr>
-              <a:t>HTML semântico, formulários claros e acessibilidade desde o início</a:t>
-            </a:r>
-          </a:p>
-        </p:txBody>
-      </p:sp>
-      <p:sp>
-        <p:nvSpPr>
-          <p:cNvPr id="4" name="Rounded Rectangle 3"/>
+          <p:cNvPr id="2" name="Rounded Rectangle 1"/>
           <p:cNvSpPr/>
           <p:nvPr/>
         </p:nvSpPr>
         <p:spPr>
           <a:xfrm>
-            <a:off x="640080" y="1463040"/>
-            <a:ext cx="3154680" cy="3154680"/>
+            <a:off x="658368" y="438912"/>
+            <a:ext cx="1078992" cy="274320"/>
           </a:xfrm>
           <a:prstGeom prst="roundRect">
             <a:avLst>
-              <a:gd name="adj" fmla="val 3000"/>
+              <a:gd name="adj" fmla="val 20000"/>
             </a:avLst>
           </a:prstGeom>
           <a:solidFill>
-            <a:srgbClr val="FFFFFF"/>
+            <a:srgbClr val="E6E6EE"/>
           </a:solidFill>
-          <a:ln w="15240">
+          <a:ln w="12700">
             <a:solidFill>
-              <a:srgbClr val="D9E2EC"/>
+              <a:srgbClr val="E6E6EE"/>
             </a:solidFill>
           </a:ln>
           <a:effectLst/>
@@ -2841,7 +2658,79 @@
         <p:txBody>
           <a:bodyPr rtlCol="0" anchor="ctr"/>
           <a:lstStyle/>
-          <a:p/>
+          <a:p>
+            <a:pPr algn="ctr"/>
+          </a:p>
+        </p:txBody>
+      </p:sp>
+      <p:sp>
+        <p:nvSpPr>
+          <p:cNvPr id="3" name="TextBox 2"/>
+          <p:cNvSpPr txBox="1"/>
+          <p:nvPr/>
+        </p:nvSpPr>
+        <p:spPr>
+          <a:xfrm>
+            <a:off x="768096" y="493776"/>
+            <a:ext cx="896112" cy="164592"/>
+          </a:xfrm>
+          <a:prstGeom prst="rect">
+            <a:avLst/>
+          </a:prstGeom>
+          <a:noFill/>
+        </p:spPr>
+        <p:txBody>
+          <a:bodyPr wrap="square" lIns="0" rIns="0" tIns="0" bIns="0" anchor="ctr">
+            <a:spAutoFit/>
+          </a:bodyPr>
+          <a:lstStyle/>
+          <a:p>
+            <a:pPr algn="l"/>
+            <a:r>
+              <a:rPr sz="840" b="0">
+                <a:solidFill>
+                  <a:srgbClr val="44454D"/>
+                </a:solidFill>
+                <a:latin typeface="Aptos"/>
+              </a:rPr>
+              <a:t>ESTRUTURA</a:t>
+            </a:r>
+          </a:p>
+        </p:txBody>
+      </p:sp>
+      <p:sp>
+        <p:nvSpPr>
+          <p:cNvPr id="4" name="TextBox 3"/>
+          <p:cNvSpPr txBox="1"/>
+          <p:nvPr/>
+        </p:nvSpPr>
+        <p:spPr>
+          <a:xfrm>
+            <a:off x="658368" y="841248"/>
+            <a:ext cx="10835640" cy="640080"/>
+          </a:xfrm>
+          <a:prstGeom prst="rect">
+            <a:avLst/>
+          </a:prstGeom>
+          <a:noFill/>
+        </p:spPr>
+        <p:txBody>
+          <a:bodyPr wrap="square" lIns="0" rIns="0" tIns="0" bIns="0" anchor="ctr">
+            <a:spAutoFit/>
+          </a:bodyPr>
+          <a:lstStyle/>
+          <a:p>
+            <a:pPr algn="l"/>
+            <a:r>
+              <a:rPr sz="2600" b="0">
+                <a:solidFill>
+                  <a:srgbClr val="24252E"/>
+                </a:solidFill>
+                <a:latin typeface="Aptos Display"/>
+              </a:rPr>
+              <a:t>Como o front-end organiza a solução</a:t>
+            </a:r>
+          </a:p>
         </p:txBody>
       </p:sp>
       <p:sp>
@@ -2852,8 +2741,43 @@
         </p:nvSpPr>
         <p:spPr>
           <a:xfrm>
-            <a:off x="841247" y="1709928"/>
-            <a:ext cx="2651760" cy="292608"/>
+            <a:off x="676656" y="1527048"/>
+            <a:ext cx="10469880" cy="347472"/>
+          </a:xfrm>
+          <a:prstGeom prst="rect">
+            <a:avLst/>
+          </a:prstGeom>
+          <a:noFill/>
+        </p:spPr>
+        <p:txBody>
+          <a:bodyPr wrap="square" lIns="0" rIns="0" tIns="0" bIns="0" anchor="ctr">
+            <a:spAutoFit/>
+          </a:bodyPr>
+          <a:lstStyle/>
+          <a:p>
+            <a:pPr algn="l"/>
+            <a:r>
+              <a:rPr sz="1150" b="0">
+                <a:solidFill>
+                  <a:srgbClr val="44454D"/>
+                </a:solidFill>
+                <a:latin typeface="Aptos"/>
+              </a:rPr>
+              <a:t>A mesma informação, montada de forma que a pessoa entenda e a tecnologia assistiva também.</a:t>
+            </a:r>
+          </a:p>
+        </p:txBody>
+      </p:sp>
+      <p:sp>
+        <p:nvSpPr>
+          <p:cNvPr id="6" name="TextBox 5"/>
+          <p:cNvSpPr txBox="1"/>
+          <p:nvPr/>
+        </p:nvSpPr>
+        <p:spPr>
+          <a:xfrm>
+            <a:off x="658368" y="2048256"/>
+            <a:ext cx="3017520" cy="292608"/>
           </a:xfrm>
           <a:prstGeom prst="rect">
             <a:avLst/>
@@ -2868,36 +2792,35 @@
           <a:p>
             <a:pPr algn="l"/>
             <a:r>
-              <a:rPr sz="1700" b="1">
-                <a:solidFill>
-                  <a:srgbClr val="0F766E"/>
-                </a:solidFill>
-              </a:rPr>
-              <a:t>HTML semântico</a:t>
-            </a:r>
-          </a:p>
-        </p:txBody>
-      </p:sp>
-      <p:sp>
-        <p:nvSpPr>
-          <p:cNvPr id="6" name="Oval 5"/>
+              <a:rPr sz="1500" b="0">
+                <a:solidFill>
+                  <a:srgbClr val="24252E"/>
+                </a:solidFill>
+                <a:latin typeface="Aptos Display"/>
+              </a:rPr>
+              <a:t>Cada parte tem um lugar</a:t>
+            </a:r>
+          </a:p>
+        </p:txBody>
+      </p:sp>
+      <p:sp>
+        <p:nvSpPr>
+          <p:cNvPr id="7" name="Rectangle 6"/>
           <p:cNvSpPr/>
           <p:nvPr/>
         </p:nvSpPr>
         <p:spPr>
           <a:xfrm>
-            <a:off x="868680" y="2194560"/>
-            <a:ext cx="118872" cy="118872"/>
-          </a:xfrm>
-          <a:prstGeom prst="ellipse">
-            <a:avLst/>
-          </a:prstGeom>
-          <a:solidFill>
-            <a:srgbClr val="0F766E"/>
-          </a:solidFill>
-          <a:ln w="12700">
+            <a:off x="658368" y="2450592"/>
+            <a:ext cx="402336" cy="0"/>
+          </a:xfrm>
+          <a:prstGeom prst="rect">
+            <a:avLst/>
+          </a:prstGeom>
+          <a:noFill/>
+          <a:ln w="17780">
             <a:solidFill>
-              <a:srgbClr val="0F766E"/>
+              <a:srgbClr val="2AB59B"/>
             </a:solidFill>
           </a:ln>
           <a:effectLst/>
@@ -2926,58 +2849,24 @@
       </p:sp>
       <p:sp>
         <p:nvSpPr>
-          <p:cNvPr id="7" name="TextBox 6"/>
-          <p:cNvSpPr txBox="1"/>
-          <p:nvPr/>
-        </p:nvSpPr>
-        <p:spPr>
-          <a:xfrm>
-            <a:off x="1115568" y="2148840"/>
-            <a:ext cx="2423160" cy="548640"/>
-          </a:xfrm>
-          <a:prstGeom prst="rect">
-            <a:avLst/>
-          </a:prstGeom>
-          <a:noFill/>
-        </p:spPr>
-        <p:txBody>
-          <a:bodyPr wrap="square" lIns="0" rIns="0" tIns="0" bIns="0" anchor="t">
-            <a:spAutoFit/>
-          </a:bodyPr>
-          <a:lstStyle/>
-          <a:p>
-            <a:pPr algn="l"/>
-            <a:r>
-              <a:rPr sz="1200" b="0">
-                <a:solidFill>
-                  <a:srgbClr val="0F172A"/>
-                </a:solidFill>
-              </a:rPr>
-              <a:t>header, nav, main, section e footer</a:t>
-            </a:r>
-          </a:p>
-        </p:txBody>
-      </p:sp>
-      <p:sp>
-        <p:nvSpPr>
-          <p:cNvPr id="8" name="Oval 7"/>
+          <p:cNvPr id="8" name="Rounded Rectangle 7"/>
           <p:cNvSpPr/>
           <p:nvPr/>
         </p:nvSpPr>
         <p:spPr>
           <a:xfrm>
-            <a:off x="868680" y="2779776"/>
-            <a:ext cx="118872" cy="118872"/>
-          </a:xfrm>
-          <a:prstGeom prst="ellipse">
-            <a:avLst/>
-          </a:prstGeom>
-          <a:solidFill>
-            <a:srgbClr val="0F766E"/>
-          </a:solidFill>
-          <a:ln w="12700">
+            <a:off x="658368" y="2651760"/>
+            <a:ext cx="3017520" cy="2048256"/>
+          </a:xfrm>
+          <a:prstGeom prst="roundRect">
+            <a:avLst>
+              <a:gd name="adj" fmla="val 3500"/>
+            </a:avLst>
+          </a:prstGeom>
+          <a:noFill/>
+          <a:ln w="10160">
             <a:solidFill>
-              <a:srgbClr val="0F766E"/>
+              <a:srgbClr val="C7C8D2"/>
             </a:solidFill>
           </a:ln>
           <a:effectLst/>
@@ -3006,58 +2895,26 @@
       </p:sp>
       <p:sp>
         <p:nvSpPr>
-          <p:cNvPr id="9" name="TextBox 8"/>
-          <p:cNvSpPr txBox="1"/>
-          <p:nvPr/>
-        </p:nvSpPr>
-        <p:spPr>
-          <a:xfrm>
-            <a:off x="1115568" y="2734056"/>
-            <a:ext cx="2423160" cy="548640"/>
-          </a:xfrm>
-          <a:prstGeom prst="rect">
-            <a:avLst/>
-          </a:prstGeom>
-          <a:noFill/>
-        </p:spPr>
-        <p:txBody>
-          <a:bodyPr wrap="square" lIns="0" rIns="0" tIns="0" bIns="0" anchor="t">
-            <a:spAutoFit/>
-          </a:bodyPr>
-          <a:lstStyle/>
-          <a:p>
-            <a:pPr algn="l"/>
-            <a:r>
-              <a:rPr sz="1200" b="0">
-                <a:solidFill>
-                  <a:srgbClr val="0F172A"/>
-                </a:solidFill>
-              </a:rPr>
-              <a:t>table com caption e th na agenda</a:t>
-            </a:r>
-          </a:p>
-        </p:txBody>
-      </p:sp>
-      <p:sp>
-        <p:nvSpPr>
-          <p:cNvPr id="10" name="Oval 9"/>
+          <p:cNvPr id="9" name="Rounded Rectangle 8"/>
           <p:cNvSpPr/>
           <p:nvPr/>
         </p:nvSpPr>
         <p:spPr>
           <a:xfrm>
-            <a:off x="868680" y="3364992"/>
-            <a:ext cx="118872" cy="118872"/>
-          </a:xfrm>
-          <a:prstGeom prst="ellipse">
-            <a:avLst/>
+            <a:off x="804672" y="2779776"/>
+            <a:ext cx="2724912" cy="310896"/>
+          </a:xfrm>
+          <a:prstGeom prst="roundRect">
+            <a:avLst>
+              <a:gd name="adj" fmla="val 12000"/>
+            </a:avLst>
           </a:prstGeom>
           <a:solidFill>
-            <a:srgbClr val="0F766E"/>
+            <a:srgbClr val="F0F0F4"/>
           </a:solidFill>
-          <a:ln w="12700">
+          <a:ln w="8890">
             <a:solidFill>
-              <a:srgbClr val="0F766E"/>
+              <a:srgbClr val="C7C8D2"/>
             </a:solidFill>
           </a:ln>
           <a:effectLst/>
@@ -3086,58 +2943,61 @@
       </p:sp>
       <p:sp>
         <p:nvSpPr>
-          <p:cNvPr id="11" name="TextBox 10"/>
-          <p:cNvSpPr txBox="1"/>
-          <p:nvPr/>
-        </p:nvSpPr>
-        <p:spPr>
-          <a:xfrm>
-            <a:off x="1115568" y="3319272"/>
-            <a:ext cx="2423160" cy="548640"/>
-          </a:xfrm>
-          <a:prstGeom prst="rect">
-            <a:avLst/>
-          </a:prstGeom>
-          <a:noFill/>
-        </p:spPr>
-        <p:txBody>
-          <a:bodyPr wrap="square" lIns="0" rIns="0" tIns="0" bIns="0" anchor="t">
+          <p:cNvPr id="10" name="TextBox 9"/>
+          <p:cNvSpPr txBox="1"/>
+          <p:nvPr/>
+        </p:nvSpPr>
+        <p:spPr>
+          <a:xfrm>
+            <a:off x="932688" y="2779776"/>
+            <a:ext cx="2468879" cy="310896"/>
+          </a:xfrm>
+          <a:prstGeom prst="rect">
+            <a:avLst/>
+          </a:prstGeom>
+          <a:noFill/>
+        </p:spPr>
+        <p:txBody>
+          <a:bodyPr wrap="square" lIns="0" rIns="0" tIns="0" bIns="0" anchor="ctr">
             <a:spAutoFit/>
           </a:bodyPr>
           <a:lstStyle/>
           <a:p>
             <a:pPr algn="l"/>
             <a:r>
-              <a:rPr sz="1200" b="0">
-                <a:solidFill>
-                  <a:srgbClr val="0F172A"/>
-                </a:solidFill>
-              </a:rPr>
-              <a:t>títulos em hierarquia, sem pular níveis</a:t>
-            </a:r>
-          </a:p>
-        </p:txBody>
-      </p:sp>
-      <p:sp>
-        <p:nvSpPr>
-          <p:cNvPr id="12" name="Oval 11"/>
+              <a:rPr sz="860" b="0">
+                <a:solidFill>
+                  <a:srgbClr val="777985"/>
+                </a:solidFill>
+                <a:latin typeface="Aptos"/>
+              </a:rPr>
+              <a:t>topo</a:t>
+            </a:r>
+          </a:p>
+        </p:txBody>
+      </p:sp>
+      <p:sp>
+        <p:nvSpPr>
+          <p:cNvPr id="11" name="Rounded Rectangle 10"/>
           <p:cNvSpPr/>
           <p:nvPr/>
         </p:nvSpPr>
         <p:spPr>
           <a:xfrm>
-            <a:off x="868680" y="3950208"/>
-            <a:ext cx="118872" cy="118872"/>
-          </a:xfrm>
-          <a:prstGeom prst="ellipse">
-            <a:avLst/>
+            <a:off x="804672" y="3145536"/>
+            <a:ext cx="2724912" cy="237744"/>
+          </a:xfrm>
+          <a:prstGeom prst="roundRect">
+            <a:avLst>
+              <a:gd name="adj" fmla="val 12000"/>
+            </a:avLst>
           </a:prstGeom>
           <a:solidFill>
-            <a:srgbClr val="0F766E"/>
+            <a:srgbClr val="F0F0F4"/>
           </a:solidFill>
-          <a:ln w="12700">
+          <a:ln w="8890">
             <a:solidFill>
-              <a:srgbClr val="0F766E"/>
+              <a:srgbClr val="C7C8D2"/>
             </a:solidFill>
           </a:ln>
           <a:effectLst/>
@@ -3166,60 +3026,59 @@
       </p:sp>
       <p:sp>
         <p:nvSpPr>
-          <p:cNvPr id="13" name="TextBox 12"/>
-          <p:cNvSpPr txBox="1"/>
-          <p:nvPr/>
-        </p:nvSpPr>
-        <p:spPr>
-          <a:xfrm>
-            <a:off x="1115568" y="3904488"/>
-            <a:ext cx="2423160" cy="548640"/>
-          </a:xfrm>
-          <a:prstGeom prst="rect">
-            <a:avLst/>
-          </a:prstGeom>
-          <a:noFill/>
-        </p:spPr>
-        <p:txBody>
-          <a:bodyPr wrap="square" lIns="0" rIns="0" tIns="0" bIns="0" anchor="t">
+          <p:cNvPr id="12" name="TextBox 11"/>
+          <p:cNvSpPr txBox="1"/>
+          <p:nvPr/>
+        </p:nvSpPr>
+        <p:spPr>
+          <a:xfrm>
+            <a:off x="932688" y="3145536"/>
+            <a:ext cx="2468879" cy="237744"/>
+          </a:xfrm>
+          <a:prstGeom prst="rect">
+            <a:avLst/>
+          </a:prstGeom>
+          <a:noFill/>
+        </p:spPr>
+        <p:txBody>
+          <a:bodyPr wrap="square" lIns="0" rIns="0" tIns="0" bIns="0" anchor="ctr">
             <a:spAutoFit/>
           </a:bodyPr>
           <a:lstStyle/>
           <a:p>
             <a:pPr algn="l"/>
             <a:r>
-              <a:rPr sz="1200" b="0">
-                <a:solidFill>
-                  <a:srgbClr val="0F172A"/>
-                </a:solidFill>
-              </a:rPr>
-              <a:t>estrutura que também serve ao leitor de tela</a:t>
-            </a:r>
-          </a:p>
-        </p:txBody>
-      </p:sp>
-      <p:sp>
-        <p:nvSpPr>
-          <p:cNvPr id="14" name="Rounded Rectangle 13"/>
+              <a:rPr sz="860" b="0">
+                <a:solidFill>
+                  <a:srgbClr val="777985"/>
+                </a:solidFill>
+                <a:latin typeface="Aptos"/>
+              </a:rPr>
+              <a:t>menu</a:t>
+            </a:r>
+          </a:p>
+        </p:txBody>
+      </p:sp>
+      <p:sp>
+        <p:nvSpPr>
+          <p:cNvPr id="13" name="Rounded Rectangle 12"/>
           <p:cNvSpPr/>
           <p:nvPr/>
         </p:nvSpPr>
         <p:spPr>
           <a:xfrm>
-            <a:off x="4160520" y="1463040"/>
-            <a:ext cx="3154680" cy="3154680"/>
+            <a:off x="804672" y="3438144"/>
+            <a:ext cx="2724912" cy="932688"/>
           </a:xfrm>
           <a:prstGeom prst="roundRect">
             <a:avLst>
-              <a:gd name="adj" fmla="val 3000"/>
+              <a:gd name="adj" fmla="val 12000"/>
             </a:avLst>
           </a:prstGeom>
-          <a:solidFill>
-            <a:srgbClr val="FFFFFF"/>
-          </a:solidFill>
-          <a:ln w="15240">
+          <a:noFill/>
+          <a:ln w="8890">
             <a:solidFill>
-              <a:srgbClr val="D9E2EC"/>
+              <a:srgbClr val="2AB59B"/>
             </a:solidFill>
           </a:ln>
           <a:effectLst/>
@@ -3241,63 +3100,68 @@
         <p:txBody>
           <a:bodyPr rtlCol="0" anchor="ctr"/>
           <a:lstStyle/>
-          <a:p/>
-        </p:txBody>
-      </p:sp>
-      <p:sp>
-        <p:nvSpPr>
-          <p:cNvPr id="15" name="TextBox 14"/>
-          <p:cNvSpPr txBox="1"/>
-          <p:nvPr/>
-        </p:nvSpPr>
-        <p:spPr>
-          <a:xfrm>
-            <a:off x="4361688" y="1709928"/>
-            <a:ext cx="2651760" cy="292608"/>
-          </a:xfrm>
-          <a:prstGeom prst="rect">
-            <a:avLst/>
-          </a:prstGeom>
-          <a:noFill/>
-        </p:spPr>
-        <p:txBody>
-          <a:bodyPr wrap="square" lIns="0" rIns="0" tIns="0" bIns="0" anchor="t">
+          <a:p>
+            <a:pPr algn="ctr"/>
+          </a:p>
+        </p:txBody>
+      </p:sp>
+      <p:sp>
+        <p:nvSpPr>
+          <p:cNvPr id="14" name="TextBox 13"/>
+          <p:cNvSpPr txBox="1"/>
+          <p:nvPr/>
+        </p:nvSpPr>
+        <p:spPr>
+          <a:xfrm>
+            <a:off x="932688" y="3438144"/>
+            <a:ext cx="2468879" cy="932688"/>
+          </a:xfrm>
+          <a:prstGeom prst="rect">
+            <a:avLst/>
+          </a:prstGeom>
+          <a:noFill/>
+        </p:spPr>
+        <p:txBody>
+          <a:bodyPr wrap="square" lIns="0" rIns="0" tIns="0" bIns="0" anchor="ctr">
             <a:spAutoFit/>
           </a:bodyPr>
           <a:lstStyle/>
           <a:p>
             <a:pPr algn="l"/>
             <a:r>
-              <a:rPr sz="1700" b="1">
-                <a:solidFill>
-                  <a:srgbClr val="2563EB"/>
-                </a:solidFill>
-              </a:rPr>
-              <a:t>Formulários</a:t>
-            </a:r>
-          </a:p>
-        </p:txBody>
-      </p:sp>
-      <p:sp>
-        <p:nvSpPr>
-          <p:cNvPr id="16" name="Oval 15"/>
+              <a:rPr sz="860" b="0">
+                <a:solidFill>
+                  <a:srgbClr val="1A8E7A"/>
+                </a:solidFill>
+                <a:latin typeface="Aptos"/>
+              </a:rPr>
+              <a:t>conteúdo principal</a:t>
+            </a:r>
+          </a:p>
+        </p:txBody>
+      </p:sp>
+      <p:sp>
+        <p:nvSpPr>
+          <p:cNvPr id="15" name="Rounded Rectangle 14"/>
           <p:cNvSpPr/>
           <p:nvPr/>
         </p:nvSpPr>
         <p:spPr>
           <a:xfrm>
-            <a:off x="4389120" y="2194560"/>
-            <a:ext cx="118872" cy="118872"/>
-          </a:xfrm>
-          <a:prstGeom prst="ellipse">
-            <a:avLst/>
+            <a:off x="804672" y="4425696"/>
+            <a:ext cx="2724912" cy="237744"/>
+          </a:xfrm>
+          <a:prstGeom prst="roundRect">
+            <a:avLst>
+              <a:gd name="adj" fmla="val 12000"/>
+            </a:avLst>
           </a:prstGeom>
           <a:solidFill>
-            <a:srgbClr val="2563EB"/>
+            <a:srgbClr val="F0F0F4"/>
           </a:solidFill>
-          <a:ln w="12700">
+          <a:ln w="8890">
             <a:solidFill>
-              <a:srgbClr val="2563EB"/>
+              <a:srgbClr val="C7C8D2"/>
             </a:solidFill>
           </a:ln>
           <a:effectLst/>
@@ -3326,14 +3190,49 @@
       </p:sp>
       <p:sp>
         <p:nvSpPr>
+          <p:cNvPr id="16" name="TextBox 15"/>
+          <p:cNvSpPr txBox="1"/>
+          <p:nvPr/>
+        </p:nvSpPr>
+        <p:spPr>
+          <a:xfrm>
+            <a:off x="932688" y="4425696"/>
+            <a:ext cx="2468879" cy="237744"/>
+          </a:xfrm>
+          <a:prstGeom prst="rect">
+            <a:avLst/>
+          </a:prstGeom>
+          <a:noFill/>
+        </p:spPr>
+        <p:txBody>
+          <a:bodyPr wrap="square" lIns="0" rIns="0" tIns="0" bIns="0" anchor="ctr">
+            <a:spAutoFit/>
+          </a:bodyPr>
+          <a:lstStyle/>
+          <a:p>
+            <a:pPr algn="l"/>
+            <a:r>
+              <a:rPr sz="860" b="0">
+                <a:solidFill>
+                  <a:srgbClr val="777985"/>
+                </a:solidFill>
+                <a:latin typeface="Aptos"/>
+              </a:rPr>
+              <a:t>rodapé</a:t>
+            </a:r>
+          </a:p>
+        </p:txBody>
+      </p:sp>
+      <p:sp>
+        <p:nvSpPr>
           <p:cNvPr id="17" name="TextBox 16"/>
           <p:cNvSpPr txBox="1"/>
           <p:nvPr/>
         </p:nvSpPr>
         <p:spPr>
           <a:xfrm>
-            <a:off x="4636008" y="2148840"/>
-            <a:ext cx="2423160" cy="548640"/>
+            <a:off x="658368" y="4809744"/>
+            <a:ext cx="3017520" cy="457200"/>
           </a:xfrm>
           <a:prstGeom prst="rect">
             <a:avLst/>
@@ -3346,38 +3245,41 @@
           </a:bodyPr>
           <a:lstStyle/>
           <a:p>
-            <a:pPr algn="l"/>
-            <a:r>
-              <a:rPr sz="1200" b="0">
-                <a:solidFill>
-                  <a:srgbClr val="0F172A"/>
-                </a:solidFill>
-              </a:rPr>
-              <a:t>label visível e associado a cada campo</a:t>
-            </a:r>
-          </a:p>
-        </p:txBody>
-      </p:sp>
-      <p:sp>
-        <p:nvSpPr>
-          <p:cNvPr id="18" name="Oval 17"/>
+            <a:pPr algn="l">
+              <a:lnSpc>
+                <a:spcPct val="112000"/>
+              </a:lnSpc>
+            </a:pPr>
+            <a:r>
+              <a:rPr sz="900" b="0">
+                <a:solidFill>
+                  <a:srgbClr val="777985"/>
+                </a:solidFill>
+                <a:latin typeface="Aptos"/>
+              </a:rPr>
+              <a:t>A página é marcada por partes — é isso que o leitor de tela consegue anunciar.</a:t>
+            </a:r>
+          </a:p>
+        </p:txBody>
+      </p:sp>
+      <p:sp>
+        <p:nvSpPr>
+          <p:cNvPr id="18" name="Rectangle 17"/>
           <p:cNvSpPr/>
           <p:nvPr/>
         </p:nvSpPr>
         <p:spPr>
           <a:xfrm>
-            <a:off x="4389120" y="2779776"/>
-            <a:ext cx="118872" cy="118872"/>
-          </a:xfrm>
-          <a:prstGeom prst="ellipse">
-            <a:avLst/>
-          </a:prstGeom>
-          <a:solidFill>
-            <a:srgbClr val="2563EB"/>
-          </a:solidFill>
-          <a:ln w="12700">
+            <a:off x="4041648" y="2048256"/>
+            <a:ext cx="0" cy="3017520"/>
+          </a:xfrm>
+          <a:prstGeom prst="rect">
+            <a:avLst/>
+          </a:prstGeom>
+          <a:noFill/>
+          <a:ln w="9525">
             <a:solidFill>
-              <a:srgbClr val="2563EB"/>
+              <a:srgbClr val="E6E6EE"/>
             </a:solidFill>
           </a:ln>
           <a:effectLst/>
@@ -3412,8 +3314,8 @@
         </p:nvSpPr>
         <p:spPr>
           <a:xfrm>
-            <a:off x="4636008" y="2734056"/>
-            <a:ext cx="2423160" cy="548640"/>
+            <a:off x="4352544" y="2048256"/>
+            <a:ext cx="3200400" cy="292608"/>
           </a:xfrm>
           <a:prstGeom prst="rect">
             <a:avLst/>
@@ -3428,36 +3330,35 @@
           <a:p>
             <a:pPr algn="l"/>
             <a:r>
-              <a:rPr sz="1200" b="0">
-                <a:solidFill>
-                  <a:srgbClr val="0F172A"/>
-                </a:solidFill>
-              </a:rPr>
-              <a:t>obrigatório indicado por texto, não só por cor</a:t>
-            </a:r>
-          </a:p>
-        </p:txBody>
-      </p:sp>
-      <p:sp>
-        <p:nvSpPr>
-          <p:cNvPr id="20" name="Oval 19"/>
+              <a:rPr sz="1500" b="0">
+                <a:solidFill>
+                  <a:srgbClr val="24252E"/>
+                </a:solidFill>
+                <a:latin typeface="Aptos Display"/>
+              </a:rPr>
+              <a:t>Formulários que não confundem</a:t>
+            </a:r>
+          </a:p>
+        </p:txBody>
+      </p:sp>
+      <p:sp>
+        <p:nvSpPr>
+          <p:cNvPr id="20" name="Rectangle 19"/>
           <p:cNvSpPr/>
           <p:nvPr/>
         </p:nvSpPr>
         <p:spPr>
           <a:xfrm>
-            <a:off x="4389120" y="3364992"/>
-            <a:ext cx="118872" cy="118872"/>
-          </a:xfrm>
-          <a:prstGeom prst="ellipse">
-            <a:avLst/>
-          </a:prstGeom>
-          <a:solidFill>
-            <a:srgbClr val="2563EB"/>
-          </a:solidFill>
-          <a:ln w="12700">
+            <a:off x="4352544" y="2450592"/>
+            <a:ext cx="402336" cy="0"/>
+          </a:xfrm>
+          <a:prstGeom prst="rect">
+            <a:avLst/>
+          </a:prstGeom>
+          <a:noFill/>
+          <a:ln w="17780">
             <a:solidFill>
-              <a:srgbClr val="2563EB"/>
+              <a:srgbClr val="2AB59B"/>
             </a:solidFill>
           </a:ln>
           <a:effectLst/>
@@ -3492,8 +3393,8 @@
         </p:nvSpPr>
         <p:spPr>
           <a:xfrm>
-            <a:off x="4636008" y="3319272"/>
-            <a:ext cx="2423160" cy="548640"/>
+            <a:off x="4352544" y="2724912"/>
+            <a:ext cx="3200400" cy="457200"/>
           </a:xfrm>
           <a:prstGeom prst="rect">
             <a:avLst/>
@@ -3506,38 +3407,41 @@
           </a:bodyPr>
           <a:lstStyle/>
           <a:p>
-            <a:pPr algn="l"/>
-            <a:r>
-              <a:rPr sz="1200" b="0">
-                <a:solidFill>
-                  <a:srgbClr val="0F172A"/>
-                </a:solidFill>
-              </a:rPr>
-              <a:t>erro explica como corrigir e mantém o preenchido</a:t>
-            </a:r>
-          </a:p>
-        </p:txBody>
-      </p:sp>
-      <p:sp>
-        <p:nvSpPr>
-          <p:cNvPr id="22" name="Oval 21"/>
+            <a:pPr algn="l">
+              <a:lnSpc>
+                <a:spcPct val="112000"/>
+              </a:lnSpc>
+            </a:pPr>
+            <a:r>
+              <a:rPr sz="980" b="0">
+                <a:solidFill>
+                  <a:srgbClr val="44454D"/>
+                </a:solidFill>
+                <a:latin typeface="Aptos"/>
+              </a:rPr>
+              <a:t>todo campo tem um rótulo visível</a:t>
+            </a:r>
+          </a:p>
+        </p:txBody>
+      </p:sp>
+      <p:sp>
+        <p:nvSpPr>
+          <p:cNvPr id="22" name="Rectangle 21"/>
           <p:cNvSpPr/>
           <p:nvPr/>
         </p:nvSpPr>
         <p:spPr>
           <a:xfrm>
-            <a:off x="4389120" y="3950208"/>
-            <a:ext cx="118872" cy="118872"/>
-          </a:xfrm>
-          <a:prstGeom prst="ellipse">
-            <a:avLst/>
-          </a:prstGeom>
-          <a:solidFill>
-            <a:srgbClr val="2563EB"/>
-          </a:solidFill>
-          <a:ln w="12700">
+            <a:off x="4352544" y="3145536"/>
+            <a:ext cx="3200400" cy="0"/>
+          </a:xfrm>
+          <a:prstGeom prst="rect">
+            <a:avLst/>
+          </a:prstGeom>
+          <a:noFill/>
+          <a:ln w="9525">
             <a:solidFill>
-              <a:srgbClr val="2563EB"/>
+              <a:srgbClr val="E6E6EE"/>
             </a:solidFill>
           </a:ln>
           <a:effectLst/>
@@ -3572,8 +3476,8 @@
         </p:nvSpPr>
         <p:spPr>
           <a:xfrm>
-            <a:off x="4636008" y="3904488"/>
-            <a:ext cx="2423160" cy="548640"/>
+            <a:off x="4352544" y="3273552"/>
+            <a:ext cx="3200400" cy="457200"/>
           </a:xfrm>
           <a:prstGeom prst="rect">
             <a:avLst/>
@@ -3586,40 +3490,41 @@
           </a:bodyPr>
           <a:lstStyle/>
           <a:p>
-            <a:pPr algn="l"/>
-            <a:r>
-              <a:rPr sz="1200" b="0">
-                <a:solidFill>
-                  <a:srgbClr val="0F172A"/>
-                </a:solidFill>
-              </a:rPr>
-              <a:t>confirmação antes de cancelar uma consulta</a:t>
-            </a:r>
-          </a:p>
-        </p:txBody>
-      </p:sp>
-      <p:sp>
-        <p:nvSpPr>
-          <p:cNvPr id="24" name="Rounded Rectangle 23"/>
+            <a:pPr algn="l">
+              <a:lnSpc>
+                <a:spcPct val="112000"/>
+              </a:lnSpc>
+            </a:pPr>
+            <a:r>
+              <a:rPr sz="980" b="0">
+                <a:solidFill>
+                  <a:srgbClr val="44454D"/>
+                </a:solidFill>
+                <a:latin typeface="Aptos"/>
+              </a:rPr>
+              <a:t>obrigatório é dito por escrito, não só por cor</a:t>
+            </a:r>
+          </a:p>
+        </p:txBody>
+      </p:sp>
+      <p:sp>
+        <p:nvSpPr>
+          <p:cNvPr id="24" name="Rectangle 23"/>
           <p:cNvSpPr/>
           <p:nvPr/>
         </p:nvSpPr>
         <p:spPr>
           <a:xfrm>
-            <a:off x="7680960" y="1463040"/>
-            <a:ext cx="3154680" cy="3154680"/>
-          </a:xfrm>
-          <a:prstGeom prst="roundRect">
-            <a:avLst>
-              <a:gd name="adj" fmla="val 3000"/>
-            </a:avLst>
-          </a:prstGeom>
-          <a:solidFill>
-            <a:srgbClr val="FFFFFF"/>
-          </a:solidFill>
-          <a:ln w="15240">
+            <a:off x="4352544" y="3694176"/>
+            <a:ext cx="3200400" cy="0"/>
+          </a:xfrm>
+          <a:prstGeom prst="rect">
+            <a:avLst/>
+          </a:prstGeom>
+          <a:noFill/>
+          <a:ln w="9525">
             <a:solidFill>
-              <a:srgbClr val="D9E2EC"/>
+              <a:srgbClr val="E6E6EE"/>
             </a:solidFill>
           </a:ln>
           <a:effectLst/>
@@ -3641,7 +3546,9 @@
         <p:txBody>
           <a:bodyPr rtlCol="0" anchor="ctr"/>
           <a:lstStyle/>
-          <a:p/>
+          <a:p>
+            <a:pPr algn="ctr"/>
+          </a:p>
         </p:txBody>
       </p:sp>
       <p:sp>
@@ -3652,8 +3559,8 @@
         </p:nvSpPr>
         <p:spPr>
           <a:xfrm>
-            <a:off x="7882128" y="1709928"/>
-            <a:ext cx="2651760" cy="292608"/>
+            <a:off x="4352544" y="3822191"/>
+            <a:ext cx="3200400" cy="457200"/>
           </a:xfrm>
           <a:prstGeom prst="rect">
             <a:avLst/>
@@ -3666,38 +3573,41 @@
           </a:bodyPr>
           <a:lstStyle/>
           <a:p>
-            <a:pPr algn="l"/>
-            <a:r>
-              <a:rPr sz="1700" b="1">
-                <a:solidFill>
-                  <a:srgbClr val="D97706"/>
-                </a:solidFill>
-              </a:rPr>
-              <a:t>Acessibilidade</a:t>
-            </a:r>
-          </a:p>
-        </p:txBody>
-      </p:sp>
-      <p:sp>
-        <p:nvSpPr>
-          <p:cNvPr id="26" name="Oval 25"/>
+            <a:pPr algn="l">
+              <a:lnSpc>
+                <a:spcPct val="112000"/>
+              </a:lnSpc>
+            </a:pPr>
+            <a:r>
+              <a:rPr sz="980" b="0">
+                <a:solidFill>
+                  <a:srgbClr val="44454D"/>
+                </a:solidFill>
+                <a:latin typeface="Aptos"/>
+              </a:rPr>
+              <a:t>o erro explica como corrigir e não apaga o preenchido</a:t>
+            </a:r>
+          </a:p>
+        </p:txBody>
+      </p:sp>
+      <p:sp>
+        <p:nvSpPr>
+          <p:cNvPr id="26" name="Rectangle 25"/>
           <p:cNvSpPr/>
           <p:nvPr/>
         </p:nvSpPr>
         <p:spPr>
           <a:xfrm>
-            <a:off x="7909560" y="2194560"/>
-            <a:ext cx="118872" cy="118872"/>
-          </a:xfrm>
-          <a:prstGeom prst="ellipse">
-            <a:avLst/>
-          </a:prstGeom>
-          <a:solidFill>
-            <a:srgbClr val="D97706"/>
-          </a:solidFill>
-          <a:ln w="12700">
+            <a:off x="4352544" y="4242816"/>
+            <a:ext cx="3200400" cy="0"/>
+          </a:xfrm>
+          <a:prstGeom prst="rect">
+            <a:avLst/>
+          </a:prstGeom>
+          <a:noFill/>
+          <a:ln w="9525">
             <a:solidFill>
-              <a:srgbClr val="D97706"/>
+              <a:srgbClr val="E6E6EE"/>
             </a:solidFill>
           </a:ln>
           <a:effectLst/>
@@ -3732,8 +3642,8 @@
         </p:nvSpPr>
         <p:spPr>
           <a:xfrm>
-            <a:off x="8156448" y="2148840"/>
-            <a:ext cx="2423160" cy="548640"/>
+            <a:off x="4352544" y="4370831"/>
+            <a:ext cx="3200400" cy="457200"/>
           </a:xfrm>
           <a:prstGeom prst="rect">
             <a:avLst/>
@@ -3746,38 +3656,41 @@
           </a:bodyPr>
           <a:lstStyle/>
           <a:p>
-            <a:pPr algn="l"/>
-            <a:r>
-              <a:rPr sz="1200" b="0">
-                <a:solidFill>
-                  <a:srgbClr val="0F172A"/>
-                </a:solidFill>
-              </a:rPr>
-              <a:t>navegação por teclado com foco visível</a:t>
-            </a:r>
-          </a:p>
-        </p:txBody>
-      </p:sp>
-      <p:sp>
-        <p:nvSpPr>
-          <p:cNvPr id="28" name="Oval 27"/>
+            <a:pPr algn="l">
+              <a:lnSpc>
+                <a:spcPct val="112000"/>
+              </a:lnSpc>
+            </a:pPr>
+            <a:r>
+              <a:rPr sz="980" b="0">
+                <a:solidFill>
+                  <a:srgbClr val="44454D"/>
+                </a:solidFill>
+                <a:latin typeface="Aptos"/>
+              </a:rPr>
+              <a:t>cancelar uma consulta pede confirmação</a:t>
+            </a:r>
+          </a:p>
+        </p:txBody>
+      </p:sp>
+      <p:sp>
+        <p:nvSpPr>
+          <p:cNvPr id="28" name="Rectangle 27"/>
           <p:cNvSpPr/>
           <p:nvPr/>
         </p:nvSpPr>
         <p:spPr>
           <a:xfrm>
-            <a:off x="7909560" y="2779776"/>
-            <a:ext cx="118872" cy="118872"/>
-          </a:xfrm>
-          <a:prstGeom prst="ellipse">
-            <a:avLst/>
-          </a:prstGeom>
-          <a:solidFill>
-            <a:srgbClr val="D97706"/>
-          </a:solidFill>
-          <a:ln w="12700">
+            <a:off x="4352544" y="4791455"/>
+            <a:ext cx="3200400" cy="0"/>
+          </a:xfrm>
+          <a:prstGeom prst="rect">
+            <a:avLst/>
+          </a:prstGeom>
+          <a:noFill/>
+          <a:ln w="9525">
             <a:solidFill>
-              <a:srgbClr val="D97706"/>
+              <a:srgbClr val="E6E6EE"/>
             </a:solidFill>
           </a:ln>
           <a:effectLst/>
@@ -3812,8 +3725,8 @@
         </p:nvSpPr>
         <p:spPr>
           <a:xfrm>
-            <a:off x="8156448" y="2734056"/>
-            <a:ext cx="2423160" cy="548640"/>
+            <a:off x="8101583" y="2048256"/>
+            <a:ext cx="3200400" cy="292608"/>
           </a:xfrm>
           <a:prstGeom prst="rect">
             <a:avLst/>
@@ -3828,36 +3741,35 @@
           <a:p>
             <a:pPr algn="l"/>
             <a:r>
-              <a:rPr sz="1200" b="0">
-                <a:solidFill>
-                  <a:srgbClr val="0F172A"/>
-                </a:solidFill>
-              </a:rPr>
-              <a:t>contraste e fonte confortável (público idoso)</a:t>
-            </a:r>
-          </a:p>
-        </p:txBody>
-      </p:sp>
-      <p:sp>
-        <p:nvSpPr>
-          <p:cNvPr id="30" name="Oval 29"/>
+              <a:rPr sz="1500" b="0">
+                <a:solidFill>
+                  <a:srgbClr val="24252E"/>
+                </a:solidFill>
+                <a:latin typeface="Aptos Display"/>
+              </a:rPr>
+              <a:t>Acessível desde o início</a:t>
+            </a:r>
+          </a:p>
+        </p:txBody>
+      </p:sp>
+      <p:sp>
+        <p:nvSpPr>
+          <p:cNvPr id="30" name="Rectangle 29"/>
           <p:cNvSpPr/>
           <p:nvPr/>
         </p:nvSpPr>
         <p:spPr>
           <a:xfrm>
-            <a:off x="7909560" y="3364992"/>
-            <a:ext cx="118872" cy="118872"/>
-          </a:xfrm>
-          <a:prstGeom prst="ellipse">
-            <a:avLst/>
-          </a:prstGeom>
-          <a:solidFill>
-            <a:srgbClr val="D97706"/>
-          </a:solidFill>
-          <a:ln w="12700">
+            <a:off x="8101583" y="2450592"/>
+            <a:ext cx="402336" cy="0"/>
+          </a:xfrm>
+          <a:prstGeom prst="rect">
+            <a:avLst/>
+          </a:prstGeom>
+          <a:noFill/>
+          <a:ln w="17780">
             <a:solidFill>
-              <a:srgbClr val="D97706"/>
+              <a:srgbClr val="2AB59B"/>
             </a:solidFill>
           </a:ln>
           <a:effectLst/>
@@ -3892,8 +3804,8 @@
         </p:nvSpPr>
         <p:spPr>
           <a:xfrm>
-            <a:off x="8156448" y="3319272"/>
-            <a:ext cx="2423160" cy="548640"/>
+            <a:off x="8101583" y="2724912"/>
+            <a:ext cx="3200400" cy="457200"/>
           </a:xfrm>
           <a:prstGeom prst="rect">
             <a:avLst/>
@@ -3906,38 +3818,41 @@
           </a:bodyPr>
           <a:lstStyle/>
           <a:p>
-            <a:pPr algn="l"/>
-            <a:r>
-              <a:rPr sz="1200" b="0">
-                <a:solidFill>
-                  <a:srgbClr val="0F172A"/>
-                </a:solidFill>
-              </a:rPr>
-              <a:t>status por texto + cor: Agendada, Cancelada</a:t>
-            </a:r>
-          </a:p>
-        </p:txBody>
-      </p:sp>
-      <p:sp>
-        <p:nvSpPr>
-          <p:cNvPr id="32" name="Oval 31"/>
+            <a:pPr algn="l">
+              <a:lnSpc>
+                <a:spcPct val="112000"/>
+              </a:lnSpc>
+            </a:pPr>
+            <a:r>
+              <a:rPr sz="980" b="0">
+                <a:solidFill>
+                  <a:srgbClr val="44454D"/>
+                </a:solidFill>
+                <a:latin typeface="Aptos"/>
+              </a:rPr>
+              <a:t>dá para usar só com o teclado</a:t>
+            </a:r>
+          </a:p>
+        </p:txBody>
+      </p:sp>
+      <p:sp>
+        <p:nvSpPr>
+          <p:cNvPr id="32" name="Rectangle 31"/>
           <p:cNvSpPr/>
           <p:nvPr/>
         </p:nvSpPr>
         <p:spPr>
           <a:xfrm>
-            <a:off x="7909560" y="3950208"/>
-            <a:ext cx="118872" cy="118872"/>
-          </a:xfrm>
-          <a:prstGeom prst="ellipse">
-            <a:avLst/>
-          </a:prstGeom>
-          <a:solidFill>
-            <a:srgbClr val="D97706"/>
-          </a:solidFill>
-          <a:ln w="12700">
+            <a:off x="8101583" y="3145536"/>
+            <a:ext cx="3200400" cy="0"/>
+          </a:xfrm>
+          <a:prstGeom prst="rect">
+            <a:avLst/>
+          </a:prstGeom>
+          <a:noFill/>
+          <a:ln w="9525">
             <a:solidFill>
-              <a:srgbClr val="D97706"/>
+              <a:srgbClr val="E6E6EE"/>
             </a:solidFill>
           </a:ln>
           <a:effectLst/>
@@ -3972,8 +3887,8 @@
         </p:nvSpPr>
         <p:spPr>
           <a:xfrm>
-            <a:off x="8156448" y="3904488"/>
-            <a:ext cx="2423160" cy="548640"/>
+            <a:off x="8101583" y="3273552"/>
+            <a:ext cx="3200400" cy="457200"/>
           </a:xfrm>
           <a:prstGeom prst="rect">
             <a:avLst/>
@@ -3986,40 +3901,41 @@
           </a:bodyPr>
           <a:lstStyle/>
           <a:p>
-            <a:pPr algn="l"/>
-            <a:r>
-              <a:rPr sz="1200" b="0">
-                <a:solidFill>
-                  <a:srgbClr val="0F172A"/>
-                </a:solidFill>
-              </a:rPr>
-              <a:t>mesma estrutura no computador e no celular</a:t>
-            </a:r>
-          </a:p>
-        </p:txBody>
-      </p:sp>
-      <p:sp>
-        <p:nvSpPr>
-          <p:cNvPr id="34" name="Rounded Rectangle 33"/>
+            <a:pPr algn="l">
+              <a:lnSpc>
+                <a:spcPct val="112000"/>
+              </a:lnSpc>
+            </a:pPr>
+            <a:r>
+              <a:rPr sz="980" b="0">
+                <a:solidFill>
+                  <a:srgbClr val="44454D"/>
+                </a:solidFill>
+                <a:latin typeface="Aptos"/>
+              </a:rPr>
+              <a:t>contraste e letra confortável — público idoso</a:t>
+            </a:r>
+          </a:p>
+        </p:txBody>
+      </p:sp>
+      <p:sp>
+        <p:nvSpPr>
+          <p:cNvPr id="34" name="Rectangle 33"/>
           <p:cNvSpPr/>
           <p:nvPr/>
         </p:nvSpPr>
         <p:spPr>
           <a:xfrm>
-            <a:off x="640080" y="4773168"/>
-            <a:ext cx="11018520" cy="566928"/>
-          </a:xfrm>
-          <a:prstGeom prst="roundRect">
-            <a:avLst>
-              <a:gd name="adj" fmla="val 9000"/>
-            </a:avLst>
-          </a:prstGeom>
-          <a:solidFill>
-            <a:srgbClr val="FFF7ED"/>
-          </a:solidFill>
-          <a:ln w="12700">
+            <a:off x="8101583" y="3694176"/>
+            <a:ext cx="3200400" cy="0"/>
+          </a:xfrm>
+          <a:prstGeom prst="rect">
+            <a:avLst/>
+          </a:prstGeom>
+          <a:noFill/>
+          <a:ln w="9525">
             <a:solidFill>
-              <a:srgbClr val="FED7AA"/>
+              <a:srgbClr val="E6E6EE"/>
             </a:solidFill>
           </a:ln>
           <a:effectLst/>
@@ -4041,7 +3957,9 @@
         <p:txBody>
           <a:bodyPr rtlCol="0" anchor="ctr"/>
           <a:lstStyle/>
-          <a:p/>
+          <a:p>
+            <a:pPr algn="ctr"/>
+          </a:p>
         </p:txBody>
       </p:sp>
       <p:sp>
@@ -4052,88 +3970,55 @@
         </p:nvSpPr>
         <p:spPr>
           <a:xfrm>
-            <a:off x="896112" y="4901184"/>
-            <a:ext cx="2468880" cy="274320"/>
-          </a:xfrm>
-          <a:prstGeom prst="rect">
-            <a:avLst/>
-          </a:prstGeom>
-          <a:noFill/>
-        </p:spPr>
-        <p:txBody>
-          <a:bodyPr wrap="square" lIns="0" rIns="0" tIns="0" bIns="0" anchor="ctr">
-            <a:spAutoFit/>
-          </a:bodyPr>
-          <a:lstStyle/>
-          <a:p>
-            <a:pPr algn="l"/>
-            <a:r>
-              <a:rPr sz="1200" b="1">
-                <a:solidFill>
-                  <a:srgbClr val="D97706"/>
-                </a:solidFill>
-              </a:rPr>
-              <a:t>Cuidado registrado</a:t>
-            </a:r>
-          </a:p>
-        </p:txBody>
-      </p:sp>
-      <p:sp>
-        <p:nvSpPr>
-          <p:cNvPr id="36" name="TextBox 35"/>
-          <p:cNvSpPr txBox="1"/>
-          <p:nvPr/>
-        </p:nvSpPr>
-        <p:spPr>
-          <a:xfrm>
-            <a:off x="3063240" y="4901184"/>
-            <a:ext cx="8321040" cy="274320"/>
-          </a:xfrm>
-          <a:prstGeom prst="rect">
-            <a:avLst/>
-          </a:prstGeom>
-          <a:noFill/>
-        </p:spPr>
-        <p:txBody>
-          <a:bodyPr wrap="square" lIns="0" rIns="0" tIns="0" bIns="0" anchor="ctr">
-            <a:spAutoFit/>
-          </a:bodyPr>
-          <a:lstStyle/>
-          <a:p>
-            <a:pPr algn="l"/>
-            <a:r>
-              <a:rPr sz="1300" b="0">
-                <a:solidFill>
-                  <a:srgbClr val="0F172A"/>
-                </a:solidFill>
-              </a:rPr>
-              <a:t>Esconder um botão não é controle de acesso: a tela reflete a permissão, mas quem autoriza é o back-end (RNF01).</a:t>
-            </a:r>
-          </a:p>
-        </p:txBody>
-      </p:sp>
-      <p:sp>
-        <p:nvSpPr>
-          <p:cNvPr id="37" name="Rounded Rectangle 36"/>
+            <a:off x="8101583" y="3822191"/>
+            <a:ext cx="3200400" cy="457200"/>
+          </a:xfrm>
+          <a:prstGeom prst="rect">
+            <a:avLst/>
+          </a:prstGeom>
+          <a:noFill/>
+        </p:spPr>
+        <p:txBody>
+          <a:bodyPr wrap="square" lIns="0" rIns="0" tIns="0" bIns="0" anchor="t">
+            <a:spAutoFit/>
+          </a:bodyPr>
+          <a:lstStyle/>
+          <a:p>
+            <a:pPr algn="l">
+              <a:lnSpc>
+                <a:spcPct val="112000"/>
+              </a:lnSpc>
+            </a:pPr>
+            <a:r>
+              <a:rPr sz="980" b="0">
+                <a:solidFill>
+                  <a:srgbClr val="44454D"/>
+                </a:solidFill>
+                <a:latin typeface="Aptos"/>
+              </a:rPr>
+              <a:t>status escrito: Agendada, Cancelada, Realizada</a:t>
+            </a:r>
+          </a:p>
+        </p:txBody>
+      </p:sp>
+      <p:sp>
+        <p:nvSpPr>
+          <p:cNvPr id="36" name="Rectangle 35"/>
           <p:cNvSpPr/>
           <p:nvPr/>
         </p:nvSpPr>
         <p:spPr>
           <a:xfrm>
-            <a:off x="640080" y="5468112"/>
-            <a:ext cx="11018520" cy="868680"/>
-          </a:xfrm>
-          <a:prstGeom prst="roundRect">
-            <a:avLst>
-              <a:gd name="adj" fmla="val 6000"/>
-            </a:avLst>
-          </a:prstGeom>
-          <a:solidFill>
-            <a:srgbClr val="ECFDF5"/>
-          </a:solidFill>
-          <a:ln w="12700">
+            <a:off x="8101583" y="4242816"/>
+            <a:ext cx="3200400" cy="0"/>
+          </a:xfrm>
+          <a:prstGeom prst="rect">
+            <a:avLst/>
+          </a:prstGeom>
+          <a:noFill/>
+          <a:ln w="9525">
             <a:solidFill>
-              <a:srgbClr val="A7F3D0"/>
+              <a:srgbClr val="E6E6EE"/>
             </a:solidFill>
           </a:ln>
           <a:effectLst/>
@@ -4155,19 +4040,21 @@
         <p:txBody>
           <a:bodyPr rtlCol="0" anchor="ctr"/>
           <a:lstStyle/>
-          <a:p/>
-        </p:txBody>
-      </p:sp>
-      <p:sp>
-        <p:nvSpPr>
-          <p:cNvPr id="38" name="TextBox 37"/>
-          <p:cNvSpPr txBox="1"/>
-          <p:nvPr/>
-        </p:nvSpPr>
-        <p:spPr>
-          <a:xfrm>
-            <a:off x="896112" y="5669280"/>
-            <a:ext cx="2194560" cy="256032"/>
+          <a:p>
+            <a:pPr algn="ctr"/>
+          </a:p>
+        </p:txBody>
+      </p:sp>
+      <p:sp>
+        <p:nvSpPr>
+          <p:cNvPr id="37" name="TextBox 36"/>
+          <p:cNvSpPr txBox="1"/>
+          <p:nvPr/>
+        </p:nvSpPr>
+        <p:spPr>
+          <a:xfrm>
+            <a:off x="8101583" y="4370831"/>
+            <a:ext cx="3200400" cy="457200"/>
           </a:xfrm>
           <a:prstGeom prst="rect">
             <a:avLst/>
@@ -4180,28 +4067,204 @@
           </a:bodyPr>
           <a:lstStyle/>
           <a:p>
+            <a:pPr algn="l">
+              <a:lnSpc>
+                <a:spcPct val="112000"/>
+              </a:lnSpc>
+            </a:pPr>
+            <a:r>
+              <a:rPr sz="980" b="0">
+                <a:solidFill>
+                  <a:srgbClr val="44454D"/>
+                </a:solidFill>
+                <a:latin typeface="Aptos"/>
+              </a:rPr>
+              <a:t>funciona no computador e no celular</a:t>
+            </a:r>
+          </a:p>
+        </p:txBody>
+      </p:sp>
+      <p:sp>
+        <p:nvSpPr>
+          <p:cNvPr id="38" name="Rectangle 37"/>
+          <p:cNvSpPr/>
+          <p:nvPr/>
+        </p:nvSpPr>
+        <p:spPr>
+          <a:xfrm>
+            <a:off x="8101583" y="4791455"/>
+            <a:ext cx="3200400" cy="0"/>
+          </a:xfrm>
+          <a:prstGeom prst="rect">
+            <a:avLst/>
+          </a:prstGeom>
+          <a:noFill/>
+          <a:ln w="9525">
+            <a:solidFill>
+              <a:srgbClr val="E6E6EE"/>
+            </a:solidFill>
+          </a:ln>
+          <a:effectLst/>
+        </p:spPr>
+        <p:style>
+          <a:lnRef idx="1">
+            <a:schemeClr val="accent1"/>
+          </a:lnRef>
+          <a:fillRef idx="3">
+            <a:schemeClr val="accent1"/>
+          </a:fillRef>
+          <a:effectRef idx="2">
+            <a:schemeClr val="accent1"/>
+          </a:effectRef>
+          <a:fontRef idx="minor">
+            <a:schemeClr val="lt1"/>
+          </a:fontRef>
+        </p:style>
+        <p:txBody>
+          <a:bodyPr rtlCol="0" anchor="ctr"/>
+          <a:lstStyle/>
+          <a:p>
+            <a:pPr algn="ctr"/>
+          </a:p>
+        </p:txBody>
+      </p:sp>
+      <p:sp>
+        <p:nvSpPr>
+          <p:cNvPr id="39" name="Rectangle 38"/>
+          <p:cNvSpPr/>
+          <p:nvPr/>
+        </p:nvSpPr>
+        <p:spPr>
+          <a:xfrm>
+            <a:off x="7790688" y="2048256"/>
+            <a:ext cx="0" cy="3017520"/>
+          </a:xfrm>
+          <a:prstGeom prst="rect">
+            <a:avLst/>
+          </a:prstGeom>
+          <a:noFill/>
+          <a:ln w="9525">
+            <a:solidFill>
+              <a:srgbClr val="E6E6EE"/>
+            </a:solidFill>
+          </a:ln>
+          <a:effectLst/>
+        </p:spPr>
+        <p:style>
+          <a:lnRef idx="1">
+            <a:schemeClr val="accent1"/>
+          </a:lnRef>
+          <a:fillRef idx="3">
+            <a:schemeClr val="accent1"/>
+          </a:fillRef>
+          <a:effectRef idx="2">
+            <a:schemeClr val="accent1"/>
+          </a:effectRef>
+          <a:fontRef idx="minor">
+            <a:schemeClr val="lt1"/>
+          </a:fontRef>
+        </p:style>
+        <p:txBody>
+          <a:bodyPr rtlCol="0" anchor="ctr"/>
+          <a:lstStyle/>
+          <a:p>
+            <a:pPr algn="ctr"/>
+          </a:p>
+        </p:txBody>
+      </p:sp>
+      <p:sp>
+        <p:nvSpPr>
+          <p:cNvPr id="40" name="Rounded Rectangle 39"/>
+          <p:cNvSpPr/>
+          <p:nvPr/>
+        </p:nvSpPr>
+        <p:spPr>
+          <a:xfrm>
+            <a:off x="658368" y="5358384"/>
+            <a:ext cx="10881360" cy="786384"/>
+          </a:xfrm>
+          <a:prstGeom prst="roundRect">
+            <a:avLst>
+              <a:gd name="adj" fmla="val 6000"/>
+            </a:avLst>
+          </a:prstGeom>
+          <a:solidFill>
+            <a:srgbClr val="24252E"/>
+          </a:solidFill>
+          <a:ln w="12700">
+            <a:solidFill>
+              <a:srgbClr val="24252E"/>
+            </a:solidFill>
+          </a:ln>
+          <a:effectLst/>
+        </p:spPr>
+        <p:style>
+          <a:lnRef idx="1">
+            <a:schemeClr val="accent1"/>
+          </a:lnRef>
+          <a:fillRef idx="3">
+            <a:schemeClr val="accent1"/>
+          </a:fillRef>
+          <a:effectRef idx="2">
+            <a:schemeClr val="accent1"/>
+          </a:effectRef>
+          <a:fontRef idx="minor">
+            <a:schemeClr val="lt1"/>
+          </a:fontRef>
+        </p:style>
+        <p:txBody>
+          <a:bodyPr rtlCol="0" anchor="ctr"/>
+          <a:lstStyle/>
+          <a:p>
+            <a:pPr algn="ctr"/>
+          </a:p>
+        </p:txBody>
+      </p:sp>
+      <p:sp>
+        <p:nvSpPr>
+          <p:cNvPr id="41" name="TextBox 40"/>
+          <p:cNvSpPr txBox="1"/>
+          <p:nvPr/>
+        </p:nvSpPr>
+        <p:spPr>
+          <a:xfrm>
+            <a:off x="969264" y="5522976"/>
+            <a:ext cx="2743200" cy="201168"/>
+          </a:xfrm>
+          <a:prstGeom prst="rect">
+            <a:avLst/>
+          </a:prstGeom>
+          <a:noFill/>
+        </p:spPr>
+        <p:txBody>
+          <a:bodyPr wrap="square" lIns="0" rIns="0" tIns="0" bIns="0" anchor="t">
+            <a:spAutoFit/>
+          </a:bodyPr>
+          <a:lstStyle/>
+          <a:p>
             <a:pPr algn="l"/>
             <a:r>
-              <a:rPr sz="1200" b="1">
-                <a:solidFill>
-                  <a:srgbClr val="0F766E"/>
-                </a:solidFill>
-              </a:rPr>
-              <a:t>Postagem LinkedIn — ideia central</a:t>
-            </a:r>
-          </a:p>
-        </p:txBody>
-      </p:sp>
-      <p:sp>
-        <p:nvSpPr>
-          <p:cNvPr id="39" name="TextBox 38"/>
-          <p:cNvSpPr txBox="1"/>
-          <p:nvPr/>
-        </p:nvSpPr>
-        <p:spPr>
-          <a:xfrm>
-            <a:off x="3063240" y="5614416"/>
-            <a:ext cx="8321040" cy="384048"/>
+              <a:rPr sz="840" b="0">
+                <a:solidFill>
+                  <a:srgbClr val="D7D8E1"/>
+                </a:solidFill>
+                <a:latin typeface="Aptos"/>
+              </a:rPr>
+              <a:t>CUIDADO REGISTRADO</a:t>
+            </a:r>
+          </a:p>
+        </p:txBody>
+      </p:sp>
+      <p:sp>
+        <p:nvSpPr>
+          <p:cNvPr id="42" name="TextBox 41"/>
+          <p:cNvSpPr txBox="1"/>
+          <p:nvPr/>
+        </p:nvSpPr>
+        <p:spPr>
+          <a:xfrm>
+            <a:off x="969264" y="5742432"/>
+            <a:ext cx="9966960" cy="256032"/>
           </a:xfrm>
           <a:prstGeom prst="rect">
             <a:avLst/>
@@ -4216,26 +4279,303 @@
           <a:p>
             <a:pPr algn="l"/>
             <a:r>
-              <a:rPr sz="1350" b="0">
-                <a:solidFill>
-                  <a:srgbClr val="0F172A"/>
-                </a:solidFill>
-              </a:rPr>
-              <a:t>“Interface não é só o que aparece na tela. É a forma como uma regra do negócio chega até a pessoa que vai usá-la.”</a:t>
-            </a:r>
-          </a:p>
-        </p:txBody>
-      </p:sp>
-      <p:sp>
-        <p:nvSpPr>
-          <p:cNvPr id="40" name="TextBox 39"/>
-          <p:cNvSpPr txBox="1"/>
-          <p:nvPr/>
-        </p:nvSpPr>
-        <p:spPr>
-          <a:xfrm>
-            <a:off x="3063240" y="6035040"/>
-            <a:ext cx="8321040" cy="201168"/>
+              <a:rPr sz="1300" b="0">
+                <a:solidFill>
+                  <a:srgbClr val="FFFFFF"/>
+                </a:solidFill>
+                <a:latin typeface="Aptos"/>
+              </a:rPr>
+              <a:t>Esconder um botão não é controle de acesso: a tela reflete a permissão, mas quem autoriza é o back-end.</a:t>
+            </a:r>
+          </a:p>
+        </p:txBody>
+      </p:sp>
+    </p:spTree>
+  </p:cSld>
+  <p:clrMapOvr>
+    <a:masterClrMapping/>
+  </p:clrMapOvr>
+</p:sld>
+</file>
+
+<file path=ppt/slides/slide3.xml><?xml version="1.0" encoding="utf-8"?>
+<p:sld xmlns:a="http://schemas.openxmlformats.org/drawingml/2006/main" xmlns:p="http://schemas.openxmlformats.org/presentationml/2006/main" xmlns:r="http://schemas.openxmlformats.org/officeDocument/2006/relationships">
+  <p:cSld>
+    <p:spTree>
+      <p:nvGrpSpPr>
+        <p:cNvPr id="1" name=""/>
+        <p:cNvGrpSpPr/>
+        <p:nvPr/>
+      </p:nvGrpSpPr>
+      <p:grpSpPr/>
+      <p:sp>
+        <p:nvSpPr>
+          <p:cNvPr id="2" name="Rounded Rectangle 1"/>
+          <p:cNvSpPr/>
+          <p:nvPr/>
+        </p:nvSpPr>
+        <p:spPr>
+          <a:xfrm>
+            <a:off x="658368" y="438912"/>
+            <a:ext cx="950976" cy="274320"/>
+          </a:xfrm>
+          <a:prstGeom prst="roundRect">
+            <a:avLst>
+              <a:gd name="adj" fmla="val 20000"/>
+            </a:avLst>
+          </a:prstGeom>
+          <a:solidFill>
+            <a:srgbClr val="E6E6EE"/>
+          </a:solidFill>
+          <a:ln w="12700">
+            <a:solidFill>
+              <a:srgbClr val="E6E6EE"/>
+            </a:solidFill>
+          </a:ln>
+          <a:effectLst/>
+        </p:spPr>
+        <p:style>
+          <a:lnRef idx="1">
+            <a:schemeClr val="accent1"/>
+          </a:lnRef>
+          <a:fillRef idx="3">
+            <a:schemeClr val="accent1"/>
+          </a:fillRef>
+          <a:effectRef idx="2">
+            <a:schemeClr val="accent1"/>
+          </a:effectRef>
+          <a:fontRef idx="minor">
+            <a:schemeClr val="lt1"/>
+          </a:fontRef>
+        </p:style>
+        <p:txBody>
+          <a:bodyPr rtlCol="0" anchor="ctr"/>
+          <a:lstStyle/>
+          <a:p>
+            <a:pPr algn="ctr"/>
+          </a:p>
+        </p:txBody>
+      </p:sp>
+      <p:sp>
+        <p:nvSpPr>
+          <p:cNvPr id="3" name="TextBox 2"/>
+          <p:cNvSpPr txBox="1"/>
+          <p:nvPr/>
+        </p:nvSpPr>
+        <p:spPr>
+          <a:xfrm>
+            <a:off x="768096" y="493776"/>
+            <a:ext cx="768096" cy="164592"/>
+          </a:xfrm>
+          <a:prstGeom prst="rect">
+            <a:avLst/>
+          </a:prstGeom>
+          <a:noFill/>
+        </p:spPr>
+        <p:txBody>
+          <a:bodyPr wrap="square" lIns="0" rIns="0" tIns="0" bIns="0" anchor="ctr">
+            <a:spAutoFit/>
+          </a:bodyPr>
+          <a:lstStyle/>
+          <a:p>
+            <a:pPr algn="l"/>
+            <a:r>
+              <a:rPr sz="840" b="0">
+                <a:solidFill>
+                  <a:srgbClr val="44454D"/>
+                </a:solidFill>
+                <a:latin typeface="Aptos"/>
+              </a:rPr>
+              <a:t>LINKEDIN</a:t>
+            </a:r>
+          </a:p>
+        </p:txBody>
+      </p:sp>
+      <p:sp>
+        <p:nvSpPr>
+          <p:cNvPr id="4" name="TextBox 3"/>
+          <p:cNvSpPr txBox="1"/>
+          <p:nvPr/>
+        </p:nvSpPr>
+        <p:spPr>
+          <a:xfrm>
+            <a:off x="658368" y="841248"/>
+            <a:ext cx="10835640" cy="640080"/>
+          </a:xfrm>
+          <a:prstGeom prst="rect">
+            <a:avLst/>
+          </a:prstGeom>
+          <a:noFill/>
+        </p:spPr>
+        <p:txBody>
+          <a:bodyPr wrap="square" lIns="0" rIns="0" tIns="0" bIns="0" anchor="ctr">
+            <a:spAutoFit/>
+          </a:bodyPr>
+          <a:lstStyle/>
+          <a:p>
+            <a:pPr algn="l"/>
+            <a:r>
+              <a:rPr sz="2550" b="0">
+                <a:solidFill>
+                  <a:srgbClr val="24252E"/>
+                </a:solidFill>
+                <a:latin typeface="Aptos Display"/>
+              </a:rPr>
+              <a:t>Proposta de postagem profissional</a:t>
+            </a:r>
+          </a:p>
+        </p:txBody>
+      </p:sp>
+      <p:sp>
+        <p:nvSpPr>
+          <p:cNvPr id="5" name="Rounded Rectangle 4"/>
+          <p:cNvSpPr/>
+          <p:nvPr/>
+        </p:nvSpPr>
+        <p:spPr>
+          <a:xfrm>
+            <a:off x="932688" y="1792224"/>
+            <a:ext cx="7360920" cy="4334256"/>
+          </a:xfrm>
+          <a:prstGeom prst="roundRect">
+            <a:avLst>
+              <a:gd name="adj" fmla="val 1700"/>
+            </a:avLst>
+          </a:prstGeom>
+          <a:noFill/>
+          <a:ln w="11430">
+            <a:solidFill>
+              <a:srgbClr val="C7C8D2"/>
+            </a:solidFill>
+          </a:ln>
+          <a:effectLst/>
+        </p:spPr>
+        <p:style>
+          <a:lnRef idx="1">
+            <a:schemeClr val="accent1"/>
+          </a:lnRef>
+          <a:fillRef idx="3">
+            <a:schemeClr val="accent1"/>
+          </a:fillRef>
+          <a:effectRef idx="2">
+            <a:schemeClr val="accent1"/>
+          </a:effectRef>
+          <a:fontRef idx="minor">
+            <a:schemeClr val="lt1"/>
+          </a:fontRef>
+        </p:style>
+        <p:txBody>
+          <a:bodyPr rtlCol="0" anchor="ctr"/>
+          <a:lstStyle/>
+          <a:p>
+            <a:pPr algn="ctr"/>
+          </a:p>
+        </p:txBody>
+      </p:sp>
+      <p:pic>
+        <p:nvPicPr>
+          <p:cNvPr id="6" name="Picture 5" descr="avatar-frontend.png"/>
+          <p:cNvPicPr>
+            <a:picLocks noChangeAspect="1"/>
+          </p:cNvPicPr>
+          <p:nvPr/>
+        </p:nvPicPr>
+        <p:blipFill>
+          <a:blip r:embed="rId2"/>
+          <a:stretch>
+            <a:fillRect/>
+          </a:stretch>
+        </p:blipFill>
+        <p:spPr>
+          <a:xfrm>
+            <a:off x="1243584" y="2048256"/>
+            <a:ext cx="566928" cy="566928"/>
+          </a:xfrm>
+          <a:prstGeom prst="ellipse">
+            <a:avLst/>
+          </a:prstGeom>
+        </p:spPr>
+      </p:pic>
+      <p:sp>
+        <p:nvSpPr>
+          <p:cNvPr id="7" name="TextBox 6"/>
+          <p:cNvSpPr txBox="1"/>
+          <p:nvPr/>
+        </p:nvSpPr>
+        <p:spPr>
+          <a:xfrm>
+            <a:off x="1938528" y="2029968"/>
+            <a:ext cx="4206240" cy="237744"/>
+          </a:xfrm>
+          <a:prstGeom prst="rect">
+            <a:avLst/>
+          </a:prstGeom>
+          <a:noFill/>
+        </p:spPr>
+        <p:txBody>
+          <a:bodyPr wrap="square" lIns="0" rIns="0" tIns="0" bIns="0" anchor="ctr">
+            <a:spAutoFit/>
+          </a:bodyPr>
+          <a:lstStyle/>
+          <a:p>
+            <a:pPr algn="l"/>
+            <a:r>
+              <a:rPr sz="1150" b="1">
+                <a:solidFill>
+                  <a:srgbClr val="24252E"/>
+                </a:solidFill>
+                <a:latin typeface="Aptos"/>
+              </a:rPr>
+              <a:t>José Thiago</a:t>
+            </a:r>
+          </a:p>
+        </p:txBody>
+      </p:sp>
+      <p:sp>
+        <p:nvSpPr>
+          <p:cNvPr id="8" name="TextBox 7"/>
+          <p:cNvSpPr txBox="1"/>
+          <p:nvPr/>
+        </p:nvSpPr>
+        <p:spPr>
+          <a:xfrm>
+            <a:off x="1938528" y="2304288"/>
+            <a:ext cx="4206240" cy="201168"/>
+          </a:xfrm>
+          <a:prstGeom prst="rect">
+            <a:avLst/>
+          </a:prstGeom>
+          <a:noFill/>
+        </p:spPr>
+        <p:txBody>
+          <a:bodyPr wrap="square" lIns="0" rIns="0" tIns="0" bIns="0" anchor="ctr">
+            <a:spAutoFit/>
+          </a:bodyPr>
+          <a:lstStyle/>
+          <a:p>
+            <a:pPr algn="l"/>
+            <a:r>
+              <a:rPr sz="880" b="0">
+                <a:solidFill>
+                  <a:srgbClr val="777985"/>
+                </a:solidFill>
+                <a:latin typeface="Aptos"/>
+              </a:rPr>
+              <a:t>Desenvolvedor Front-end · Clínica-Tech</a:t>
+            </a:r>
+          </a:p>
+        </p:txBody>
+      </p:sp>
+      <p:sp>
+        <p:nvSpPr>
+          <p:cNvPr id="9" name="TextBox 8"/>
+          <p:cNvSpPr txBox="1"/>
+          <p:nvPr/>
+        </p:nvSpPr>
+        <p:spPr>
+          <a:xfrm>
+            <a:off x="1261872" y="2798064"/>
+            <a:ext cx="6693408" cy="2560320"/>
           </a:xfrm>
           <a:prstGeom prst="rect">
             <a:avLst/>
@@ -4248,14 +4588,614 @@
           </a:bodyPr>
           <a:lstStyle/>
           <a:p>
+            <a:pPr algn="l">
+              <a:lnSpc>
+                <a:spcPct val="105000"/>
+              </a:lnSpc>
+              <a:spcAft>
+                <a:spcPts val="700"/>
+              </a:spcAft>
+            </a:pPr>
+            <a:r>
+              <a:rPr sz="1010" b="0">
+                <a:solidFill>
+                  <a:srgbClr val="44454D"/>
+                </a:solidFill>
+                <a:latin typeface="Aptos"/>
+              </a:rPr>
+              <a:t>No projeto Clínica-Tech, atuo no Front-end da plataforma web integrada ao WhatsApp. Minha etapa foi transformar os requisitos do produto e os fluxos aprovados em UX/UI em uma estrutura de telas: o que cada perfil vê, quais informações aparecem e quais ações ficam disponíveis.</a:t>
+            </a:r>
+          </a:p>
+          <a:p>
+            <a:pPr algn="l">
+              <a:lnSpc>
+                <a:spcPct val="105000"/>
+              </a:lnSpc>
+              <a:spcAft>
+                <a:spcPts val="700"/>
+              </a:spcAft>
+            </a:pPr>
+            <a:r>
+              <a:rPr sz="1010" b="0">
+                <a:solidFill>
+                  <a:srgbClr val="44454D"/>
+                </a:solidFill>
+                <a:latin typeface="Aptos"/>
+              </a:rPr>
+              <a:t>A decisão mais importante foi separar o site público, informativo e sem login, do ambiente administrativo, autenticado e sensível ao perfil de quem acessa — e começar pela organização da página, não pela aparência.</a:t>
+            </a:r>
+          </a:p>
+          <a:p>
+            <a:pPr algn="l">
+              <a:lnSpc>
+                <a:spcPct val="105000"/>
+              </a:lnSpc>
+              <a:spcAft>
+                <a:spcPts val="700"/>
+              </a:spcAft>
+            </a:pPr>
+            <a:r>
+              <a:rPr sz="1010" b="0">
+                <a:solidFill>
+                  <a:srgbClr val="44454D"/>
+                </a:solidFill>
+                <a:latin typeface="Aptos"/>
+              </a:rPr>
+              <a:t>A preocupação que orientou o trabalho foi a acessibilidade. Parte do público da rede é idosa e tem pouca familiaridade digital: rótulo visível em todo campo, navegação por teclado e status indicado por texto, e não apenas por cor.</a:t>
+            </a:r>
+          </a:p>
+          <a:p>
+            <a:pPr algn="l">
+              <a:lnSpc>
+                <a:spcPct val="105000"/>
+              </a:lnSpc>
+              <a:spcAft>
+                <a:spcPts val="700"/>
+              </a:spcAft>
+            </a:pPr>
+            <a:r>
+              <a:rPr sz="1010" b="0">
+                <a:solidFill>
+                  <a:srgbClr val="44454D"/>
+                </a:solidFill>
+                <a:latin typeface="Aptos"/>
+              </a:rPr>
+              <a:t>Registro também um limite que considero importante: esconder um botão não é controle de acesso. A tela reflete a permissão, mas quem autoriza é o back-end. O sistema ainda está em definição — o que temos é uma base estruturada para que a implementação comece sem improviso.</a:t>
+            </a:r>
+          </a:p>
+        </p:txBody>
+      </p:sp>
+      <p:sp>
+        <p:nvSpPr>
+          <p:cNvPr id="10" name="Rectangle 9"/>
+          <p:cNvSpPr/>
+          <p:nvPr/>
+        </p:nvSpPr>
+        <p:spPr>
+          <a:xfrm>
+            <a:off x="1243584" y="5559552"/>
+            <a:ext cx="6711696" cy="0"/>
+          </a:xfrm>
+          <a:prstGeom prst="rect">
+            <a:avLst/>
+          </a:prstGeom>
+          <a:noFill/>
+          <a:ln w="7620">
+            <a:solidFill>
+              <a:srgbClr val="E6E6EE"/>
+            </a:solidFill>
+          </a:ln>
+          <a:effectLst/>
+        </p:spPr>
+        <p:style>
+          <a:lnRef idx="1">
+            <a:schemeClr val="accent1"/>
+          </a:lnRef>
+          <a:fillRef idx="3">
+            <a:schemeClr val="accent1"/>
+          </a:fillRef>
+          <a:effectRef idx="2">
+            <a:schemeClr val="accent1"/>
+          </a:effectRef>
+          <a:fontRef idx="minor">
+            <a:schemeClr val="lt1"/>
+          </a:fontRef>
+        </p:style>
+        <p:txBody>
+          <a:bodyPr rtlCol="0" anchor="ctr"/>
+          <a:lstStyle/>
+          <a:p>
+            <a:pPr algn="ctr"/>
+          </a:p>
+        </p:txBody>
+      </p:sp>
+      <p:sp>
+        <p:nvSpPr>
+          <p:cNvPr id="11" name="TextBox 10"/>
+          <p:cNvSpPr txBox="1"/>
+          <p:nvPr/>
+        </p:nvSpPr>
+        <p:spPr>
+          <a:xfrm>
+            <a:off x="1261872" y="5669280"/>
+            <a:ext cx="6675120" cy="219456"/>
+          </a:xfrm>
+          <a:prstGeom prst="rect">
+            <a:avLst/>
+          </a:prstGeom>
+          <a:noFill/>
+        </p:spPr>
+        <p:txBody>
+          <a:bodyPr wrap="square" lIns="0" rIns="0" tIns="0" bIns="0" anchor="t">
+            <a:spAutoFit/>
+          </a:bodyPr>
+          <a:lstStyle/>
+          <a:p>
             <a:pPr algn="l"/>
             <a:r>
-              <a:rPr sz="1050" b="0">
-                <a:solidFill>
-                  <a:srgbClr val="475569"/>
-                </a:solidFill>
-              </a:rPr>
-              <a:t>Entregas desta área: frontend.md  •  linkedin-frontend.md  •  apresentação do Front-end</a:t>
+              <a:rPr sz="880" b="0">
+                <a:solidFill>
+                  <a:srgbClr val="777985"/>
+                </a:solidFill>
+                <a:latin typeface="Aptos"/>
+              </a:rPr>
+              <a:t>#FrontEnd · #Acessibilidade · #UXUI · #Tecnologia · #Saude</a:t>
+            </a:r>
+          </a:p>
+        </p:txBody>
+      </p:sp>
+      <p:sp>
+        <p:nvSpPr>
+          <p:cNvPr id="12" name="Rounded Rectangle 11"/>
+          <p:cNvSpPr/>
+          <p:nvPr/>
+        </p:nvSpPr>
+        <p:spPr>
+          <a:xfrm>
+            <a:off x="8613648" y="1792224"/>
+            <a:ext cx="2578608" cy="4334256"/>
+          </a:xfrm>
+          <a:prstGeom prst="roundRect">
+            <a:avLst>
+              <a:gd name="adj" fmla="val 2800"/>
+            </a:avLst>
+          </a:prstGeom>
+          <a:noFill/>
+          <a:ln w="10160">
+            <a:solidFill>
+              <a:srgbClr val="C7C8D2"/>
+            </a:solidFill>
+          </a:ln>
+          <a:effectLst/>
+        </p:spPr>
+        <p:style>
+          <a:lnRef idx="1">
+            <a:schemeClr val="accent1"/>
+          </a:lnRef>
+          <a:fillRef idx="3">
+            <a:schemeClr val="accent1"/>
+          </a:fillRef>
+          <a:effectRef idx="2">
+            <a:schemeClr val="accent1"/>
+          </a:effectRef>
+          <a:fontRef idx="minor">
+            <a:schemeClr val="lt1"/>
+          </a:fontRef>
+        </p:style>
+        <p:txBody>
+          <a:bodyPr rtlCol="0" anchor="ctr"/>
+          <a:lstStyle/>
+          <a:p>
+            <a:pPr algn="ctr"/>
+          </a:p>
+        </p:txBody>
+      </p:sp>
+      <p:sp>
+        <p:nvSpPr>
+          <p:cNvPr id="13" name="TextBox 12"/>
+          <p:cNvSpPr txBox="1"/>
+          <p:nvPr/>
+        </p:nvSpPr>
+        <p:spPr>
+          <a:xfrm>
+            <a:off x="8906256" y="2103120"/>
+            <a:ext cx="2011680" cy="310896"/>
+          </a:xfrm>
+          <a:prstGeom prst="rect">
+            <a:avLst/>
+          </a:prstGeom>
+          <a:noFill/>
+        </p:spPr>
+        <p:txBody>
+          <a:bodyPr wrap="square" lIns="0" rIns="0" tIns="0" bIns="0" anchor="t">
+            <a:spAutoFit/>
+          </a:bodyPr>
+          <a:lstStyle/>
+          <a:p>
+            <a:pPr algn="l"/>
+            <a:r>
+              <a:rPr sz="1500" b="0">
+                <a:solidFill>
+                  <a:srgbClr val="24252E"/>
+                </a:solidFill>
+                <a:latin typeface="Aptos Display"/>
+              </a:rPr>
+              <a:t>O post contempla</a:t>
+            </a:r>
+          </a:p>
+        </p:txBody>
+      </p:sp>
+      <p:sp>
+        <p:nvSpPr>
+          <p:cNvPr id="14" name="Rectangle 13"/>
+          <p:cNvSpPr/>
+          <p:nvPr/>
+        </p:nvSpPr>
+        <p:spPr>
+          <a:xfrm>
+            <a:off x="8906256" y="2523744"/>
+            <a:ext cx="402336" cy="0"/>
+          </a:xfrm>
+          <a:prstGeom prst="rect">
+            <a:avLst/>
+          </a:prstGeom>
+          <a:noFill/>
+          <a:ln w="17780">
+            <a:solidFill>
+              <a:srgbClr val="2AB59B"/>
+            </a:solidFill>
+          </a:ln>
+          <a:effectLst/>
+        </p:spPr>
+        <p:style>
+          <a:lnRef idx="1">
+            <a:schemeClr val="accent1"/>
+          </a:lnRef>
+          <a:fillRef idx="3">
+            <a:schemeClr val="accent1"/>
+          </a:fillRef>
+          <a:effectRef idx="2">
+            <a:schemeClr val="accent1"/>
+          </a:effectRef>
+          <a:fontRef idx="minor">
+            <a:schemeClr val="lt1"/>
+          </a:fontRef>
+        </p:style>
+        <p:txBody>
+          <a:bodyPr rtlCol="0" anchor="ctr"/>
+          <a:lstStyle/>
+          <a:p>
+            <a:pPr algn="ctr"/>
+          </a:p>
+        </p:txBody>
+      </p:sp>
+      <p:sp>
+        <p:nvSpPr>
+          <p:cNvPr id="15" name="TextBox 14"/>
+          <p:cNvSpPr txBox="1"/>
+          <p:nvPr/>
+        </p:nvSpPr>
+        <p:spPr>
+          <a:xfrm>
+            <a:off x="8906256" y="2743200"/>
+            <a:ext cx="2011680" cy="201168"/>
+          </a:xfrm>
+          <a:prstGeom prst="rect">
+            <a:avLst/>
+          </a:prstGeom>
+          <a:noFill/>
+        </p:spPr>
+        <p:txBody>
+          <a:bodyPr wrap="square" lIns="0" rIns="0" tIns="0" bIns="0" anchor="t">
+            <a:spAutoFit/>
+          </a:bodyPr>
+          <a:lstStyle/>
+          <a:p>
+            <a:pPr algn="l"/>
+            <a:r>
+              <a:rPr sz="919" b="1">
+                <a:solidFill>
+                  <a:srgbClr val="24252E"/>
+                </a:solidFill>
+                <a:latin typeface="Aptos"/>
+              </a:rPr>
+              <a:t>Decisão tomada</a:t>
+            </a:r>
+          </a:p>
+        </p:txBody>
+      </p:sp>
+      <p:sp>
+        <p:nvSpPr>
+          <p:cNvPr id="16" name="TextBox 15"/>
+          <p:cNvSpPr txBox="1"/>
+          <p:nvPr/>
+        </p:nvSpPr>
+        <p:spPr>
+          <a:xfrm>
+            <a:off x="8906256" y="2962656"/>
+            <a:ext cx="2011680" cy="402336"/>
+          </a:xfrm>
+          <a:prstGeom prst="rect">
+            <a:avLst/>
+          </a:prstGeom>
+          <a:noFill/>
+        </p:spPr>
+        <p:txBody>
+          <a:bodyPr wrap="square" lIns="0" rIns="0" tIns="0" bIns="0" anchor="t">
+            <a:spAutoFit/>
+          </a:bodyPr>
+          <a:lstStyle/>
+          <a:p>
+            <a:pPr algn="l">
+              <a:lnSpc>
+                <a:spcPct val="100000"/>
+              </a:lnSpc>
+            </a:pPr>
+            <a:r>
+              <a:rPr sz="869" b="0">
+                <a:solidFill>
+                  <a:srgbClr val="44454D"/>
+                </a:solidFill>
+                <a:latin typeface="Aptos"/>
+              </a:rPr>
+              <a:t>público e administrativo separados</a:t>
+            </a:r>
+          </a:p>
+        </p:txBody>
+      </p:sp>
+      <p:sp>
+        <p:nvSpPr>
+          <p:cNvPr id="17" name="TextBox 16"/>
+          <p:cNvSpPr txBox="1"/>
+          <p:nvPr/>
+        </p:nvSpPr>
+        <p:spPr>
+          <a:xfrm>
+            <a:off x="8906256" y="3529584"/>
+            <a:ext cx="2011680" cy="201168"/>
+          </a:xfrm>
+          <a:prstGeom prst="rect">
+            <a:avLst/>
+          </a:prstGeom>
+          <a:noFill/>
+        </p:spPr>
+        <p:txBody>
+          <a:bodyPr wrap="square" lIns="0" rIns="0" tIns="0" bIns="0" anchor="t">
+            <a:spAutoFit/>
+          </a:bodyPr>
+          <a:lstStyle/>
+          <a:p>
+            <a:pPr algn="l"/>
+            <a:r>
+              <a:rPr sz="919" b="1">
+                <a:solidFill>
+                  <a:srgbClr val="24252E"/>
+                </a:solidFill>
+                <a:latin typeface="Aptos"/>
+              </a:rPr>
+              <a:t>Etapa</a:t>
+            </a:r>
+          </a:p>
+        </p:txBody>
+      </p:sp>
+      <p:sp>
+        <p:nvSpPr>
+          <p:cNvPr id="18" name="TextBox 17"/>
+          <p:cNvSpPr txBox="1"/>
+          <p:nvPr/>
+        </p:nvSpPr>
+        <p:spPr>
+          <a:xfrm>
+            <a:off x="8906256" y="3749039"/>
+            <a:ext cx="2011680" cy="402336"/>
+          </a:xfrm>
+          <a:prstGeom prst="rect">
+            <a:avLst/>
+          </a:prstGeom>
+          <a:noFill/>
+        </p:spPr>
+        <p:txBody>
+          <a:bodyPr wrap="square" lIns="0" rIns="0" tIns="0" bIns="0" anchor="t">
+            <a:spAutoFit/>
+          </a:bodyPr>
+          <a:lstStyle/>
+          <a:p>
+            <a:pPr algn="l">
+              <a:lnSpc>
+                <a:spcPct val="100000"/>
+              </a:lnSpc>
+            </a:pPr>
+            <a:r>
+              <a:rPr sz="869" b="0">
+                <a:solidFill>
+                  <a:srgbClr val="44454D"/>
+                </a:solidFill>
+                <a:latin typeface="Aptos"/>
+              </a:rPr>
+              <a:t>definição das interfaces</a:t>
+            </a:r>
+          </a:p>
+        </p:txBody>
+      </p:sp>
+      <p:sp>
+        <p:nvSpPr>
+          <p:cNvPr id="19" name="TextBox 18"/>
+          <p:cNvSpPr txBox="1"/>
+          <p:nvPr/>
+        </p:nvSpPr>
+        <p:spPr>
+          <a:xfrm>
+            <a:off x="8906256" y="4315968"/>
+            <a:ext cx="2011680" cy="201168"/>
+          </a:xfrm>
+          <a:prstGeom prst="rect">
+            <a:avLst/>
+          </a:prstGeom>
+          <a:noFill/>
+        </p:spPr>
+        <p:txBody>
+          <a:bodyPr wrap="square" lIns="0" rIns="0" tIns="0" bIns="0" anchor="t">
+            <a:spAutoFit/>
+          </a:bodyPr>
+          <a:lstStyle/>
+          <a:p>
+            <a:pPr algn="l"/>
+            <a:r>
+              <a:rPr sz="919" b="1">
+                <a:solidFill>
+                  <a:srgbClr val="24252E"/>
+                </a:solidFill>
+                <a:latin typeface="Aptos"/>
+              </a:rPr>
+              <a:t>Preocupação</a:t>
+            </a:r>
+          </a:p>
+        </p:txBody>
+      </p:sp>
+      <p:sp>
+        <p:nvSpPr>
+          <p:cNvPr id="20" name="TextBox 19"/>
+          <p:cNvSpPr txBox="1"/>
+          <p:nvPr/>
+        </p:nvSpPr>
+        <p:spPr>
+          <a:xfrm>
+            <a:off x="8906256" y="4535424"/>
+            <a:ext cx="2011680" cy="402336"/>
+          </a:xfrm>
+          <a:prstGeom prst="rect">
+            <a:avLst/>
+          </a:prstGeom>
+          <a:noFill/>
+        </p:spPr>
+        <p:txBody>
+          <a:bodyPr wrap="square" lIns="0" rIns="0" tIns="0" bIns="0" anchor="t">
+            <a:spAutoFit/>
+          </a:bodyPr>
+          <a:lstStyle/>
+          <a:p>
+            <a:pPr algn="l">
+              <a:lnSpc>
+                <a:spcPct val="100000"/>
+              </a:lnSpc>
+            </a:pPr>
+            <a:r>
+              <a:rPr sz="869" b="0">
+                <a:solidFill>
+                  <a:srgbClr val="44454D"/>
+                </a:solidFill>
+                <a:latin typeface="Aptos"/>
+              </a:rPr>
+              <a:t>acessibilidade desde o início</a:t>
+            </a:r>
+          </a:p>
+        </p:txBody>
+      </p:sp>
+      <p:sp>
+        <p:nvSpPr>
+          <p:cNvPr id="21" name="TextBox 20"/>
+          <p:cNvSpPr txBox="1"/>
+          <p:nvPr/>
+        </p:nvSpPr>
+        <p:spPr>
+          <a:xfrm>
+            <a:off x="8906256" y="5102352"/>
+            <a:ext cx="2011680" cy="201168"/>
+          </a:xfrm>
+          <a:prstGeom prst="rect">
+            <a:avLst/>
+          </a:prstGeom>
+          <a:noFill/>
+        </p:spPr>
+        <p:txBody>
+          <a:bodyPr wrap="square" lIns="0" rIns="0" tIns="0" bIns="0" anchor="t">
+            <a:spAutoFit/>
+          </a:bodyPr>
+          <a:lstStyle/>
+          <a:p>
+            <a:pPr algn="l"/>
+            <a:r>
+              <a:rPr sz="919" b="1">
+                <a:solidFill>
+                  <a:srgbClr val="24252E"/>
+                </a:solidFill>
+                <a:latin typeface="Aptos"/>
+              </a:rPr>
+              <a:t>Resultado esperado</a:t>
+            </a:r>
+          </a:p>
+        </p:txBody>
+      </p:sp>
+      <p:sp>
+        <p:nvSpPr>
+          <p:cNvPr id="22" name="TextBox 21"/>
+          <p:cNvSpPr txBox="1"/>
+          <p:nvPr/>
+        </p:nvSpPr>
+        <p:spPr>
+          <a:xfrm>
+            <a:off x="8906256" y="5321808"/>
+            <a:ext cx="2011680" cy="402336"/>
+          </a:xfrm>
+          <a:prstGeom prst="rect">
+            <a:avLst/>
+          </a:prstGeom>
+          <a:noFill/>
+        </p:spPr>
+        <p:txBody>
+          <a:bodyPr wrap="square" lIns="0" rIns="0" tIns="0" bIns="0" anchor="t">
+            <a:spAutoFit/>
+          </a:bodyPr>
+          <a:lstStyle/>
+          <a:p>
+            <a:pPr algn="l">
+              <a:lnSpc>
+                <a:spcPct val="100000"/>
+              </a:lnSpc>
+            </a:pPr>
+            <a:r>
+              <a:rPr sz="869" b="0">
+                <a:solidFill>
+                  <a:srgbClr val="44454D"/>
+                </a:solidFill>
+                <a:latin typeface="Aptos"/>
+              </a:rPr>
+              <a:t>base pronta para implementar</a:t>
+            </a:r>
+          </a:p>
+        </p:txBody>
+      </p:sp>
+      <p:sp>
+        <p:nvSpPr>
+          <p:cNvPr id="23" name="TextBox 22"/>
+          <p:cNvSpPr txBox="1"/>
+          <p:nvPr/>
+        </p:nvSpPr>
+        <p:spPr>
+          <a:xfrm>
+            <a:off x="658368" y="6327648"/>
+            <a:ext cx="10881360" cy="256032"/>
+          </a:xfrm>
+          <a:prstGeom prst="rect">
+            <a:avLst/>
+          </a:prstGeom>
+          <a:noFill/>
+        </p:spPr>
+        <p:txBody>
+          <a:bodyPr wrap="square" lIns="0" rIns="0" tIns="0" bIns="0" anchor="ctr">
+            <a:spAutoFit/>
+          </a:bodyPr>
+          <a:lstStyle/>
+          <a:p>
+            <a:pPr algn="ctr"/>
+            <a:r>
+              <a:rPr sz="919" b="0">
+                <a:solidFill>
+                  <a:srgbClr val="777985"/>
+                </a:solidFill>
+                <a:latin typeface="Aptos"/>
+              </a:rPr>
+              <a:t>Texto completo em 03-frontend/linkedin-frontend.md</a:t>
             </a:r>
           </a:p>
         </p:txBody>
@@ -4561,4 +5501,299 @@
     </a:ext>
   </a:extLst>
 </a:theme>
+</file>
+
+<file path=ppt/theme/theme2.xml><?xml version="1.0" encoding="utf-8"?>
+<a:theme xmlns:a="http://schemas.openxmlformats.org/drawingml/2006/main" name="Tema do Office">
+  <a:themeElements>
+    <a:clrScheme name="Office">
+      <a:dk1>
+        <a:sysClr val="windowText" lastClr="000000"/>
+      </a:dk1>
+      <a:lt1>
+        <a:sysClr val="window" lastClr="FFFFFF"/>
+      </a:lt1>
+      <a:dk2>
+        <a:srgbClr val="44546A"/>
+      </a:dk2>
+      <a:lt2>
+        <a:srgbClr val="E7E6E6"/>
+      </a:lt2>
+      <a:accent1>
+        <a:srgbClr val="4472C4"/>
+      </a:accent1>
+      <a:accent2>
+        <a:srgbClr val="ED7D31"/>
+      </a:accent2>
+      <a:accent3>
+        <a:srgbClr val="A5A5A5"/>
+      </a:accent3>
+      <a:accent4>
+        <a:srgbClr val="FFC000"/>
+      </a:accent4>
+      <a:accent5>
+        <a:srgbClr val="5B9BD5"/>
+      </a:accent5>
+      <a:accent6>
+        <a:srgbClr val="70AD47"/>
+      </a:accent6>
+      <a:hlink>
+        <a:srgbClr val="0563C1"/>
+      </a:hlink>
+      <a:folHlink>
+        <a:srgbClr val="954F72"/>
+      </a:folHlink>
+    </a:clrScheme>
+    <a:fontScheme name="Office">
+      <a:majorFont>
+        <a:latin typeface="Calibri Light" panose="020F0302020204030204"/>
+        <a:ea typeface=""/>
+        <a:cs typeface=""/>
+        <a:font script="Jpan" typeface="游ゴシック Light"/>
+        <a:font script="Hang" typeface="맑은 고딕"/>
+        <a:font script="Hans" typeface="等线 Light"/>
+        <a:font script="Hant" typeface="新細明體"/>
+        <a:font script="Arab" typeface="Times New Roman"/>
+        <a:font script="Hebr" typeface="Times New Roman"/>
+        <a:font script="Thai" typeface="Angsana New"/>
+        <a:font script="Ethi" typeface="Nyala"/>
+        <a:font script="Beng" typeface="Vrinda"/>
+        <a:font script="Gujr" typeface="Shruti"/>
+        <a:font script="Khmr" typeface="MoolBoran"/>
+        <a:font script="Knda" typeface="Tunga"/>
+        <a:font script="Guru" typeface="Raavi"/>
+        <a:font script="Cans" typeface="Euphemia"/>
+        <a:font script="Cher" typeface="Plantagenet Cherokee"/>
+        <a:font script="Yiii" typeface="Microsoft Yi Baiti"/>
+        <a:font script="Tibt" typeface="Microsoft Himalaya"/>
+        <a:font script="Thaa" typeface="MV Boli"/>
+        <a:font script="Deva" typeface="Mangal"/>
+        <a:font script="Telu" typeface="Gautami"/>
+        <a:font script="Taml" typeface="Latha"/>
+        <a:font script="Syrc" typeface="Estrangelo Edessa"/>
+        <a:font script="Orya" typeface="Kalinga"/>
+        <a:font script="Mlym" typeface="Kartika"/>
+        <a:font script="Laoo" typeface="DokChampa"/>
+        <a:font script="Sinh" typeface="Iskoola Pota"/>
+        <a:font script="Mong" typeface="Mongolian Baiti"/>
+        <a:font script="Viet" typeface="Times New Roman"/>
+        <a:font script="Uigh" typeface="Microsoft Uighur"/>
+        <a:font script="Geor" typeface="Sylfaen"/>
+        <a:font script="Armn" typeface="Arial"/>
+        <a:font script="Bugi" typeface="Leelawadee UI"/>
+        <a:font script="Bopo" typeface="Microsoft JhengHei"/>
+        <a:font script="Java" typeface="Javanese Text"/>
+        <a:font script="Lisu" typeface="Segoe UI"/>
+        <a:font script="Mymr" typeface="Myanmar Text"/>
+        <a:font script="Nkoo" typeface="Ebrima"/>
+        <a:font script="Olck" typeface="Nirmala UI"/>
+        <a:font script="Osma" typeface="Ebrima"/>
+        <a:font script="Phag" typeface="Phagspa"/>
+        <a:font script="Syrn" typeface="Estrangelo Edessa"/>
+        <a:font script="Syrj" typeface="Estrangelo Edessa"/>
+        <a:font script="Syre" typeface="Estrangelo Edessa"/>
+        <a:font script="Sora" typeface="Nirmala UI"/>
+        <a:font script="Tale" typeface="Microsoft Tai Le"/>
+        <a:font script="Talu" typeface="Microsoft New Tai Lue"/>
+        <a:font script="Tfng" typeface="Ebrima"/>
+      </a:majorFont>
+      <a:minorFont>
+        <a:latin typeface="Calibri" panose="020F0502020204030204"/>
+        <a:ea typeface=""/>
+        <a:cs typeface=""/>
+        <a:font script="Jpan" typeface="游ゴシック"/>
+        <a:font script="Hang" typeface="맑은 고딕"/>
+        <a:font script="Hans" typeface="等线"/>
+        <a:font script="Hant" typeface="新細明體"/>
+        <a:font script="Arab" typeface="Arial"/>
+        <a:font script="Hebr" typeface="Arial"/>
+        <a:font script="Thai" typeface="Cordia New"/>
+        <a:font script="Ethi" typeface="Nyala"/>
+        <a:font script="Beng" typeface="Vrinda"/>
+        <a:font script="Gujr" typeface="Shruti"/>
+        <a:font script="Khmr" typeface="DaunPenh"/>
+        <a:font script="Knda" typeface="Tunga"/>
+        <a:font script="Guru" typeface="Raavi"/>
+        <a:font script="Cans" typeface="Euphemia"/>
+        <a:font script="Cher" typeface="Plantagenet Cherokee"/>
+        <a:font script="Yiii" typeface="Microsoft Yi Baiti"/>
+        <a:font script="Tibt" typeface="Microsoft Himalaya"/>
+        <a:font script="Thaa" typeface="MV Boli"/>
+        <a:font script="Deva" typeface="Mangal"/>
+        <a:font script="Telu" typeface="Gautami"/>
+        <a:font script="Taml" typeface="Latha"/>
+        <a:font script="Syrc" typeface="Estrangelo Edessa"/>
+        <a:font script="Orya" typeface="Kalinga"/>
+        <a:font script="Mlym" typeface="Kartika"/>
+        <a:font script="Laoo" typeface="DokChampa"/>
+        <a:font script="Sinh" typeface="Iskoola Pota"/>
+        <a:font script="Mong" typeface="Mongolian Baiti"/>
+        <a:font script="Viet" typeface="Arial"/>
+        <a:font script="Uigh" typeface="Microsoft Uighur"/>
+        <a:font script="Geor" typeface="Sylfaen"/>
+        <a:font script="Armn" typeface="Arial"/>
+        <a:font script="Bugi" typeface="Leelawadee UI"/>
+        <a:font script="Bopo" typeface="Microsoft JhengHei"/>
+        <a:font script="Java" typeface="Javanese Text"/>
+        <a:font script="Lisu" typeface="Segoe UI"/>
+        <a:font script="Mymr" typeface="Myanmar Text"/>
+        <a:font script="Nkoo" typeface="Ebrima"/>
+        <a:font script="Olck" typeface="Nirmala UI"/>
+        <a:font script="Osma" typeface="Ebrima"/>
+        <a:font script="Phag" typeface="Phagspa"/>
+        <a:font script="Syrn" typeface="Estrangelo Edessa"/>
+        <a:font script="Syrj" typeface="Estrangelo Edessa"/>
+        <a:font script="Syre" typeface="Estrangelo Edessa"/>
+        <a:font script="Sora" typeface="Nirmala UI"/>
+        <a:font script="Tale" typeface="Microsoft Tai Le"/>
+        <a:font script="Talu" typeface="Microsoft New Tai Lue"/>
+        <a:font script="Tfng" typeface="Ebrima"/>
+      </a:minorFont>
+    </a:fontScheme>
+    <a:fmtScheme name="Office">
+      <a:fillStyleLst>
+        <a:solidFill>
+          <a:schemeClr val="phClr"/>
+        </a:solidFill>
+        <a:gradFill rotWithShape="1">
+          <a:gsLst>
+            <a:gs pos="0">
+              <a:schemeClr val="phClr">
+                <a:lumMod val="110000"/>
+                <a:satMod val="105000"/>
+                <a:tint val="67000"/>
+              </a:schemeClr>
+            </a:gs>
+            <a:gs pos="50000">
+              <a:schemeClr val="phClr">
+                <a:lumMod val="105000"/>
+                <a:satMod val="103000"/>
+                <a:tint val="73000"/>
+              </a:schemeClr>
+            </a:gs>
+            <a:gs pos="100000">
+              <a:schemeClr val="phClr">
+                <a:lumMod val="105000"/>
+                <a:satMod val="109000"/>
+                <a:tint val="81000"/>
+              </a:schemeClr>
+            </a:gs>
+          </a:gsLst>
+          <a:lin ang="5400000" scaled="0"/>
+        </a:gradFill>
+        <a:gradFill rotWithShape="1">
+          <a:gsLst>
+            <a:gs pos="0">
+              <a:schemeClr val="phClr">
+                <a:satMod val="103000"/>
+                <a:lumMod val="102000"/>
+                <a:tint val="94000"/>
+              </a:schemeClr>
+            </a:gs>
+            <a:gs pos="50000">
+              <a:schemeClr val="phClr">
+                <a:satMod val="110000"/>
+                <a:lumMod val="100000"/>
+                <a:shade val="100000"/>
+              </a:schemeClr>
+            </a:gs>
+            <a:gs pos="100000">
+              <a:schemeClr val="phClr">
+                <a:lumMod val="99000"/>
+                <a:satMod val="120000"/>
+                <a:shade val="78000"/>
+              </a:schemeClr>
+            </a:gs>
+          </a:gsLst>
+          <a:lin ang="5400000" scaled="0"/>
+        </a:gradFill>
+      </a:fillStyleLst>
+      <a:lnStyleLst>
+        <a:ln w="6350" cap="flat" cmpd="sng" algn="ctr">
+          <a:solidFill>
+            <a:schemeClr val="phClr"/>
+          </a:solidFill>
+          <a:prstDash val="solid"/>
+          <a:miter lim="800000"/>
+        </a:ln>
+        <a:ln w="12700" cap="flat" cmpd="sng" algn="ctr">
+          <a:solidFill>
+            <a:schemeClr val="phClr"/>
+          </a:solidFill>
+          <a:prstDash val="solid"/>
+          <a:miter lim="800000"/>
+        </a:ln>
+        <a:ln w="19050" cap="flat" cmpd="sng" algn="ctr">
+          <a:solidFill>
+            <a:schemeClr val="phClr"/>
+          </a:solidFill>
+          <a:prstDash val="solid"/>
+          <a:miter lim="800000"/>
+        </a:ln>
+      </a:lnStyleLst>
+      <a:effectStyleLst>
+        <a:effectStyle>
+          <a:effectLst/>
+        </a:effectStyle>
+        <a:effectStyle>
+          <a:effectLst/>
+        </a:effectStyle>
+        <a:effectStyle>
+          <a:effectLst>
+            <a:outerShdw blurRad="57150" dist="19050" dir="5400000" algn="ctr" rotWithShape="0">
+              <a:srgbClr val="000000">
+                <a:alpha val="63000"/>
+              </a:srgbClr>
+            </a:outerShdw>
+          </a:effectLst>
+        </a:effectStyle>
+      </a:effectStyleLst>
+      <a:bgFillStyleLst>
+        <a:solidFill>
+          <a:schemeClr val="phClr"/>
+        </a:solidFill>
+        <a:solidFill>
+          <a:schemeClr val="phClr">
+            <a:tint val="95000"/>
+            <a:satMod val="170000"/>
+          </a:schemeClr>
+        </a:solidFill>
+        <a:gradFill rotWithShape="1">
+          <a:gsLst>
+            <a:gs pos="0">
+              <a:schemeClr val="phClr">
+                <a:tint val="93000"/>
+                <a:satMod val="150000"/>
+                <a:shade val="98000"/>
+                <a:lumMod val="102000"/>
+              </a:schemeClr>
+            </a:gs>
+            <a:gs pos="50000">
+              <a:schemeClr val="phClr">
+                <a:tint val="98000"/>
+                <a:satMod val="130000"/>
+                <a:shade val="90000"/>
+                <a:lumMod val="103000"/>
+              </a:schemeClr>
+            </a:gs>
+            <a:gs pos="100000">
+              <a:schemeClr val="phClr">
+                <a:shade val="63000"/>
+                <a:satMod val="120000"/>
+              </a:schemeClr>
+            </a:gs>
+          </a:gsLst>
+          <a:lin ang="5400000" scaled="0"/>
+        </a:gradFill>
+      </a:bgFillStyleLst>
+    </a:fmtScheme>
+  </a:themeElements>
+  <a:objectDefaults/>
+  <a:extraClrSchemeLst/>
+  <a:extLst>
+    <a:ext uri="{05A4C25C-085E-4340-85A3-A5531E510DB2}">
+      <thm15:themeFamily xmlns:thm15="http://schemas.microsoft.com/office/thememl/2012/main" name="Office Theme" id="{62F939B6-93AF-4DB8-9C6B-D6C7DFDC589F}" vid="{4A3C46E8-61CC-4603-A589-7422A47A8E4A}"/>
+    </a:ext>
+  </a:extLst>
+</a:theme>
 </file>